--- a/projects/review_nhan_su_t7_redesign_ppt169_20260722/exports/review_nhan_su_t7_redesign_20260724_210106.pptx
+++ b/projects/review_nhan_su_t7_redesign_ppt169_20260722/exports/review_nhan_su_t7_redesign_20260724_210106.pptx
@@ -5,34 +5,33 @@
     <p:sldMasterId id="2147483648" r:id="rId1"/>
   </p:sldMasterIdLst>
   <p:notesMasterIdLst>
-    <p:notesMasterId r:id="rId30"/>
+    <p:notesMasterId r:id="rId24"/>
   </p:notesMasterIdLst>
   <p:sldIdLst>
-    <p:sldId id="256" r:id="rId7"/>
-    <p:sldId id="257" r:id="rId8"/>
-    <p:sldId id="258" r:id="rId9"/>
-    <p:sldId id="259" r:id="rId10"/>
-    <p:sldId id="260" r:id="rId11"/>
-    <p:sldId id="261" r:id="rId12"/>
-    <p:sldId id="262" r:id="rId13"/>
-    <p:sldId id="263" r:id="rId14"/>
-    <p:sldId id="264" r:id="rId15"/>
-    <p:sldId id="265" r:id="rId16"/>
-    <p:sldId id="266" r:id="rId17"/>
-    <p:sldId id="267" r:id="rId18"/>
-    <p:sldId id="268" r:id="rId19"/>
-    <p:sldId id="269" r:id="rId20"/>
-    <p:sldId id="270" r:id="rId21"/>
-    <p:sldId id="271" r:id="rId22"/>
-    <p:sldId id="272" r:id="rId23"/>
-    <p:sldId id="273" r:id="rId24"/>
-    <p:sldId id="274" r:id="rId25"/>
-    <p:sldId id="275" r:id="rId26"/>
-    <p:sldId id="276" r:id="rId27"/>
-    <p:sldId id="277" r:id="rId28"/>
-    <p:sldId id="278" r:id="rId29"/>
+    <p:sldId id="256" r:id="rId2"/>
+    <p:sldId id="257" r:id="rId3"/>
+    <p:sldId id="258" r:id="rId4"/>
+    <p:sldId id="259" r:id="rId5"/>
+    <p:sldId id="260" r:id="rId6"/>
+    <p:sldId id="261" r:id="rId7"/>
+    <p:sldId id="262" r:id="rId8"/>
+    <p:sldId id="263" r:id="rId9"/>
+    <p:sldId id="264" r:id="rId10"/>
+    <p:sldId id="265" r:id="rId11"/>
+    <p:sldId id="266" r:id="rId12"/>
+    <p:sldId id="267" r:id="rId13"/>
+    <p:sldId id="268" r:id="rId14"/>
+    <p:sldId id="269" r:id="rId15"/>
+    <p:sldId id="270" r:id="rId16"/>
+    <p:sldId id="271" r:id="rId17"/>
+    <p:sldId id="273" r:id="rId18"/>
+    <p:sldId id="274" r:id="rId19"/>
+    <p:sldId id="275" r:id="rId20"/>
+    <p:sldId id="276" r:id="rId21"/>
+    <p:sldId id="277" r:id="rId22"/>
+    <p:sldId id="278" r:id="rId23"/>
   </p:sldIdLst>
-  <p:sldSz cx="12192000" cy="6858000" type="screen4x3"/>
+  <p:sldSz cx="12192000" cy="6858000"/>
   <p:notesSz cx="6858000" cy="9144000"/>
   <p:defaultTextStyle>
     <a:defPPr>
@@ -129,12 +128,33 @@
       </a:defRPr>
     </a:lvl9pPr>
   </p:defaultTextStyle>
+  <p:extLst>
+    <p:ext uri="{EFAFB233-063F-42B5-8137-9DF3F51BA10A}">
+      <p15:sldGuideLst xmlns:p15="http://schemas.microsoft.com/office/powerpoint/2012/main">
+        <p15:guide id="1" orient="horz" pos="2160">
+          <p15:clr>
+            <a:srgbClr val="A4A3A4"/>
+          </p15:clr>
+        </p15:guide>
+        <p15:guide id="2" pos="2880">
+          <p15:clr>
+            <a:srgbClr val="A4A3A4"/>
+          </p15:clr>
+        </p15:guide>
+      </p15:sldGuideLst>
+    </p:ext>
+  </p:extLst>
 </p:presentation>
 </file>
 
 <file path=ppt/notesMasters/notesMaster1.xml><?xml version="1.0" encoding="utf-8"?>
 <p:notesMaster xmlns:a="http://schemas.openxmlformats.org/drawingml/2006/main" xmlns:r="http://schemas.openxmlformats.org/officeDocument/2006/relationships" xmlns:p="http://schemas.openxmlformats.org/presentationml/2006/main">
   <p:cSld>
+    <p:bg>
+      <p:bgRef idx="1001">
+        <a:schemeClr val="bg1"/>
+      </p:bgRef>
+    </p:bg>
     <p:spTree>
       <p:nvGrpSpPr>
         <p:cNvPr id="1" name=""/>
@@ -310,7 +330,7 @@
   <p:hf/>
   <p:notesStyle>
     <a:lvl1pPr marL="0" algn="l">
-      <a:defRPr sz="1200" lang="en-US"/>
+      <a:defRPr lang="en-US" sz="1200"/>
     </a:lvl1pPr>
   </p:notesStyle>
 </p:notesMaster>
@@ -520,7 +540,12 @@
             <p:ph type="sldImg" idx="2"/>
           </p:nvPr>
         </p:nvSpPr>
-        <p:spPr/>
+        <p:spPr>
+          <a:xfrm>
+            <a:off x="381000" y="685800"/>
+            <a:ext cx="6096000" cy="3429000"/>
+          </a:xfrm>
+        </p:spPr>
       </p:sp>
       <p:sp>
         <p:nvSpPr>
@@ -834,7 +859,7 @@
           <a:p>
             <a:r>
               <a:rPr lang="en-US" dirty="0"/>
-              <a:t>MSB là dự án riêng, tập trung xử lý lỗi đo sai năng lượng và kiểm tra Jig tại nhà máy.</a:t>
+              <a:t>Nhánh Tool Design cho Smart Lighting bắt đầu từ ngày 20 tháng 7 và đang dựng nền tool test cho Deep Dimming và CCT Tunable. Trọng tâm hiện tại là chốt dải đo, cấu trúc dữ liệu và tiêu chí pass fail trước khi hoàn thiện tool.</a:t>
             </a:r>
           </a:p>
         </p:txBody>
@@ -893,7 +918,7 @@
           <a:p>
             <a:r>
               <a:rPr lang="en-US" dirty="0"/>
-              <a:t>Nhánh Tool Design cho Smart Lighting bắt đầu từ ngày 20 tháng 7 và đang dựng nền tool test cho Deep Dimming và CCT Tunable. Trọng tâm hiện tại là chốt dải đo, cấu trúc dữ liệu và tiêu chí pass fail trước khi hoàn thiện tool.</a:t>
+              <a:t>AI hỗ trợ code, tài liệu và học nhanh; mọi kết luận kỹ thuật vẫn phải được kiểm chứng thực tế.</a:t>
             </a:r>
           </a:p>
         </p:txBody>
@@ -952,7 +977,7 @@
           <a:p>
             <a:r>
               <a:rPr lang="en-US" dirty="0"/>
-              <a:t>AI hỗ trợ code, tài liệu và học nhanh; mọi kết luận kỹ thuật vẫn phải được kiểm chứng thực tế.</a:t>
+              <a:t>Điểm mạnh là năng lực end-to-end và chủ động; điểm cần cải thiện là ưu tiên và đóng vòng công việc.</a:t>
             </a:r>
           </a:p>
         </p:txBody>
@@ -1070,7 +1095,7 @@
           <a:p>
             <a:r>
               <a:rPr lang="en-US" dirty="0"/>
-              <a:t>Điểm mạnh là năng lực end-to-end và chủ động; điểm cần cải thiện là ưu tiên và đóng vòng công việc.</a:t>
+              <a:t>Bài học chung là chuẩn hóa interface, logging, acceptance và handoff càng sớm càng tốt.</a:t>
             </a:r>
           </a:p>
         </p:txBody>
@@ -1129,7 +1154,7 @@
           <a:p>
             <a:r>
               <a:rPr lang="en-US" dirty="0"/>
-              <a:t>Bài học chung là chuẩn hóa interface, logging, acceptance và handoff càng sớm càng tốt.</a:t>
+              <a:t>Mục tiêu tiếp theo là hoàn tất dự án đang chạy, đóng task còn mở và chuẩn hóa tài sản dùng lại.</a:t>
             </a:r>
           </a:p>
         </p:txBody>
@@ -1143,65 +1168,6 @@
 </file>
 
 <file path=ppt/notesSlides/notesSlide22.xml><?xml version="1.0" encoding="utf-8"?>
-<p:notes xmlns:a="http://schemas.openxmlformats.org/drawingml/2006/main" xmlns:r="http://schemas.openxmlformats.org/officeDocument/2006/relationships" xmlns:p="http://schemas.openxmlformats.org/presentationml/2006/main">
-  <p:cSld>
-    <p:spTree>
-      <p:nvGrpSpPr>
-        <p:cNvPr id="1" name=""/>
-        <p:cNvGrpSpPr/>
-        <p:nvPr/>
-      </p:nvGrpSpPr>
-      <p:grpSpPr>
-        <a:xfrm>
-          <a:off x="0" y="0"/>
-          <a:ext cx="0" cy="0"/>
-          <a:chOff x="0" y="0"/>
-          <a:chExt cx="0" cy="0"/>
-        </a:xfrm>
-      </p:grpSpPr>
-      <p:sp>
-        <p:nvSpPr>
-          <p:cNvPr id="2" name="Slide Image Placeholder 1"/>
-          <p:cNvSpPr>
-            <a:spLocks noGrp="1" noRot="1" noChangeAspect="1"/>
-          </p:cNvSpPr>
-          <p:nvPr>
-            <p:ph type="sldImg" idx="2"/>
-          </p:nvPr>
-        </p:nvSpPr>
-        <p:spPr/>
-      </p:sp>
-      <p:sp>
-        <p:nvSpPr>
-          <p:cNvPr id="3" name="Notes Placeholder 2"/>
-          <p:cNvSpPr>
-            <a:spLocks noGrp="1"/>
-          </p:cNvSpPr>
-          <p:nvPr>
-            <p:ph type="body" sz="quarter" idx="3"/>
-          </p:nvPr>
-        </p:nvSpPr>
-        <p:spPr/>
-        <p:txBody>
-          <a:bodyPr/>
-          <a:lstStyle/>
-          <a:p>
-            <a:r>
-              <a:rPr lang="en-US" dirty="0"/>
-              <a:t>Mục tiêu tiếp theo là hoàn tất dự án đang chạy, đóng task còn mở và chuẩn hóa tài sản dùng lại.</a:t>
-            </a:r>
-          </a:p>
-        </p:txBody>
-      </p:sp>
-    </p:spTree>
-  </p:cSld>
-  <p:clrMapOvr>
-    <a:masterClrMapping/>
-  </p:clrMapOvr>
-</p:notes>
-</file>
-
-<file path=ppt/notesSlides/notesSlide23.xml><?xml version="1.0" encoding="utf-8"?>
 <p:notes xmlns:a="http://schemas.openxmlformats.org/drawingml/2006/main" xmlns:r="http://schemas.openxmlformats.org/officeDocument/2006/relationships" xmlns:p="http://schemas.openxmlformats.org/presentationml/2006/main">
   <p:cSld>
     <p:spTree>
@@ -1287,7 +1253,12 @@
             <p:ph type="sldImg" idx="2"/>
           </p:nvPr>
         </p:nvSpPr>
-        <p:spPr/>
+        <p:spPr>
+          <a:xfrm>
+            <a:off x="381000" y="685800"/>
+            <a:ext cx="6096000" cy="3429000"/>
+          </a:xfrm>
+        </p:spPr>
       </p:sp>
       <p:sp>
         <p:nvSpPr>
@@ -1346,7 +1317,12 @@
             <p:ph type="sldImg" idx="2"/>
           </p:nvPr>
         </p:nvSpPr>
-        <p:spPr/>
+        <p:spPr>
+          <a:xfrm>
+            <a:off x="381000" y="685800"/>
+            <a:ext cx="6096000" cy="3429000"/>
+          </a:xfrm>
+        </p:spPr>
       </p:sp>
       <p:sp>
         <p:nvSpPr>
@@ -1673,8 +1649,8 @@
 </p:notes>
 </file>
 
-<file path=ppt/slideLayouts/slideLayout7.xml><?xml version="1.0" encoding="utf-8"?>
-<p:sldLayout xmlns:a="http://schemas.openxmlformats.org/drawingml/2006/main" xmlns:p="http://schemas.openxmlformats.org/presentationml/2006/main" type="blank" preserve="1">
+<file path=ppt/slideLayouts/slideLayout1.xml><?xml version="1.0" encoding="utf-8"?>
+<p:sldLayout xmlns:a="http://schemas.openxmlformats.org/drawingml/2006/main" xmlns:r="http://schemas.openxmlformats.org/officeDocument/2006/relationships" xmlns:p="http://schemas.openxmlformats.org/presentationml/2006/main" type="blank" preserve="1">
   <p:cSld name="review_nhan_su_t7_redesign — Blank">
     <p:spTree>
       <p:nvGrpSpPr>
@@ -1707,7 +1683,7 @@
           <a:p>
             <a:fld id="{5BCAD085-E8A6-8845-BD4E-CB4CCA059FC4}" type="datetimeFigureOut">
               <a:rPr lang="en-US" smtClean="0"/>
-              <a:t>1/27/13</a:t>
+              <a:t>7/29/2026</a:t>
             </a:fld>
             <a:endParaRPr lang="en-US"/>
           </a:p>
@@ -1764,7 +1740,7 @@
 </file>
 
 <file path=ppt/slideMasters/slideMaster1.xml><?xml version="1.0" encoding="utf-8"?>
-<p:sldMaster xmlns:a="http://schemas.openxmlformats.org/drawingml/2006/main" xmlns:p="http://schemas.openxmlformats.org/presentationml/2006/main" xmlns:r="http://schemas.openxmlformats.org/officeDocument/2006/relationships">
+<p:sldMaster xmlns:a="http://schemas.openxmlformats.org/drawingml/2006/main" xmlns:r="http://schemas.openxmlformats.org/officeDocument/2006/relationships" xmlns:p="http://schemas.openxmlformats.org/presentationml/2006/main">
   <p:cSld name="review_nhan_su_t7_redesign — Master">
     <p:bg>
       <p:bgRef idx="1001">
@@ -1820,7 +1796,7 @@
           <a:p>
             <a:fld id="{5BCAD085-E8A6-8845-BD4E-CB4CCA059FC4}" type="datetimeFigureOut">
               <a:rPr lang="en-US" smtClean="0"/>
-              <a:t>1/27/13</a:t>
+              <a:t>7/29/2026</a:t>
             </a:fld>
             <a:endParaRPr lang="en-US"/>
           </a:p>
@@ -1908,7 +1884,7 @@
   </p:cSld>
   <p:clrMap bg1="lt1" tx1="dk1" bg2="lt2" tx2="dk2" accent1="accent1" accent2="accent2" accent3="accent3" accent4="accent4" accent5="accent5" accent6="accent6" hlink="hlink" folHlink="folHlink"/>
   <p:sldLayoutIdLst>
-    <p:sldLayoutId id="2147483655" r:id="rId7"/>
+    <p:sldLayoutId id="2147483655" r:id="rId1"/>
   </p:sldLayoutIdLst>
   <p:txStyles>
     <p:titleStyle>
@@ -2197,7 +2173,7 @@
           <p:nvPr/>
         </p:nvPicPr>
         <p:blipFill>
-          <a:blip r:embed="rId2"/>
+          <a:blip r:embed="rId3"/>
           <a:stretch>
             <a:fillRect/>
           </a:stretch>
@@ -2343,6 +2319,13 @@
               </a:solidFill>
             </a:ln>
           </p:spPr>
+          <p:txBody>
+            <a:bodyPr/>
+            <a:lstStyle/>
+            <a:p>
+              <a:endParaRPr lang="en-US"/>
+            </a:p>
+          </p:txBody>
         </p:sp>
         <p:sp>
           <p:nvSpPr>
@@ -2448,7 +2431,7 @@
             <p:nvPr/>
           </p:nvPicPr>
           <p:blipFill>
-            <a:blip r:embed="rId3"/>
+            <a:blip r:embed="rId4"/>
             <a:stretch>
               <a:fillRect/>
             </a:stretch>
@@ -2509,9 +2492,18 @@
   <p:clrMapOvr>
     <a:masterClrMapping/>
   </p:clrMapOvr>
-  <p:transition xmlns:p14="http://schemas.microsoft.com/office/powerpoint/2010/main" p14:dur="400">
-    <p:fade/>
-  </p:transition>
+  <mc:AlternateContent xmlns:mc="http://schemas.openxmlformats.org/markup-compatibility/2006">
+    <mc:Choice xmlns:p14="http://schemas.microsoft.com/office/powerpoint/2010/main" Requires="p14">
+      <p:transition p14:dur="400">
+        <p:fade/>
+      </p:transition>
+    </mc:Choice>
+    <mc:Fallback>
+      <p:transition>
+        <p:fade/>
+      </p:transition>
+    </mc:Fallback>
+  </mc:AlternateContent>
 </p:sld>
 </file>
 
@@ -2549,7 +2541,7 @@
           <p:nvPr/>
         </p:nvPicPr>
         <p:blipFill>
-          <a:blip r:embed="rId2"/>
+          <a:blip r:embed="rId3"/>
           <a:stretch>
             <a:fillRect/>
           </a:stretch>
@@ -2627,6 +2619,13 @@
             <a:noFill/>
           </a:ln>
         </p:spPr>
+        <p:txBody>
+          <a:bodyPr/>
+          <a:lstStyle/>
+          <a:p>
+            <a:endParaRPr lang="en-US"/>
+          </a:p>
+        </p:txBody>
       </p:sp>
       <p:sp>
         <p:nvSpPr>
@@ -2707,6 +2706,13 @@
               </a:solidFill>
             </a:ln>
           </p:spPr>
+          <p:txBody>
+            <a:bodyPr/>
+            <a:lstStyle/>
+            <a:p>
+              <a:endParaRPr lang="en-US"/>
+            </a:p>
+          </p:txBody>
         </p:sp>
         <p:pic>
           <p:nvPicPr>
@@ -2717,7 +2723,7 @@
             <p:nvPr/>
           </p:nvPicPr>
           <p:blipFill>
-            <a:blip r:embed="rId3"/>
+            <a:blip r:embed="rId4"/>
             <a:stretch>
               <a:fillRect/>
             </a:stretch>
@@ -2755,6 +2761,13 @@
               <a:noFill/>
             </a:ln>
           </p:spPr>
+          <p:txBody>
+            <a:bodyPr/>
+            <a:lstStyle/>
+            <a:p>
+              <a:endParaRPr lang="en-US"/>
+            </a:p>
+          </p:txBody>
         </p:sp>
         <p:sp>
           <p:nvSpPr>
@@ -2882,9 +2895,18 @@
   <p:clrMapOvr>
     <a:masterClrMapping/>
   </p:clrMapOvr>
-  <p:transition xmlns:p14="http://schemas.microsoft.com/office/powerpoint/2010/main" p14:dur="400">
-    <p:fade/>
-  </p:transition>
+  <mc:AlternateContent xmlns:mc="http://schemas.openxmlformats.org/markup-compatibility/2006">
+    <mc:Choice xmlns:p14="http://schemas.microsoft.com/office/powerpoint/2010/main" Requires="p14">
+      <p:transition p14:dur="400">
+        <p:fade/>
+      </p:transition>
+    </mc:Choice>
+    <mc:Fallback>
+      <p:transition>
+        <p:fade/>
+      </p:transition>
+    </mc:Fallback>
+  </mc:AlternateContent>
 </p:sld>
 </file>
 
@@ -2922,7 +2944,7 @@
           <p:nvPr/>
         </p:nvPicPr>
         <p:blipFill>
-          <a:blip r:embed="rId2"/>
+          <a:blip r:embed="rId3"/>
           <a:stretch>
             <a:fillRect/>
           </a:stretch>
@@ -3000,6 +3022,13 @@
             <a:noFill/>
           </a:ln>
         </p:spPr>
+        <p:txBody>
+          <a:bodyPr/>
+          <a:lstStyle/>
+          <a:p>
+            <a:endParaRPr lang="en-US"/>
+          </a:p>
+        </p:txBody>
       </p:sp>
       <p:sp>
         <p:nvSpPr>
@@ -3080,6 +3109,13 @@
               </a:solidFill>
             </a:ln>
           </p:spPr>
+          <p:txBody>
+            <a:bodyPr/>
+            <a:lstStyle/>
+            <a:p>
+              <a:endParaRPr lang="en-US"/>
+            </a:p>
+          </p:txBody>
         </p:sp>
         <p:pic>
           <p:nvPicPr>
@@ -3090,7 +3126,7 @@
             <p:nvPr/>
           </p:nvPicPr>
           <p:blipFill>
-            <a:blip r:embed="rId3"/>
+            <a:blip r:embed="rId4"/>
             <a:stretch>
               <a:fillRect/>
             </a:stretch>
@@ -3143,6 +3179,13 @@
               <a:noFill/>
             </a:ln>
           </p:spPr>
+          <p:txBody>
+            <a:bodyPr/>
+            <a:lstStyle/>
+            <a:p>
+              <a:endParaRPr lang="en-US"/>
+            </a:p>
+          </p:txBody>
         </p:sp>
         <p:sp>
           <p:nvSpPr>
@@ -3287,6 +3330,13 @@
               <a:noFill/>
             </a:ln>
           </p:spPr>
+          <p:txBody>
+            <a:bodyPr/>
+            <a:lstStyle/>
+            <a:p>
+              <a:endParaRPr lang="en-US"/>
+            </a:p>
+          </p:txBody>
         </p:sp>
         <p:sp>
           <p:nvSpPr>
@@ -3351,6 +3401,13 @@
               <a:noFill/>
             </a:ln>
           </p:spPr>
+          <p:txBody>
+            <a:bodyPr/>
+            <a:lstStyle/>
+            <a:p>
+              <a:endParaRPr lang="en-US"/>
+            </a:p>
+          </p:txBody>
         </p:sp>
         <p:sp>
           <p:nvSpPr>
@@ -3415,6 +3472,13 @@
               <a:noFill/>
             </a:ln>
           </p:spPr>
+          <p:txBody>
+            <a:bodyPr/>
+            <a:lstStyle/>
+            <a:p>
+              <a:endParaRPr lang="en-US"/>
+            </a:p>
+          </p:txBody>
         </p:sp>
         <p:pic>
           <p:nvPicPr>
@@ -3425,7 +3489,7 @@
             <p:nvPr/>
           </p:nvPicPr>
           <p:blipFill>
-            <a:blip r:embed="rId4"/>
+            <a:blip r:embed="rId5"/>
             <a:stretch>
               <a:fillRect/>
             </a:stretch>
@@ -3623,6 +3687,13 @@
               <a:noFill/>
             </a:ln>
           </p:spPr>
+          <p:txBody>
+            <a:bodyPr/>
+            <a:lstStyle/>
+            <a:p>
+              <a:endParaRPr lang="en-US"/>
+            </a:p>
+          </p:txBody>
         </p:sp>
         <p:sp>
           <p:nvSpPr>
@@ -3750,9 +3821,18 @@
   <p:clrMapOvr>
     <a:masterClrMapping/>
   </p:clrMapOvr>
-  <p:transition xmlns:p14="http://schemas.microsoft.com/office/powerpoint/2010/main" p14:dur="400">
-    <p:fade/>
-  </p:transition>
+  <mc:AlternateContent xmlns:mc="http://schemas.openxmlformats.org/markup-compatibility/2006">
+    <mc:Choice xmlns:p14="http://schemas.microsoft.com/office/powerpoint/2010/main" Requires="p14">
+      <p:transition p14:dur="400">
+        <p:fade/>
+      </p:transition>
+    </mc:Choice>
+    <mc:Fallback>
+      <p:transition>
+        <p:fade/>
+      </p:transition>
+    </mc:Fallback>
+  </mc:AlternateContent>
 </p:sld>
 </file>
 
@@ -3790,7 +3870,7 @@
           <p:nvPr/>
         </p:nvPicPr>
         <p:blipFill>
-          <a:blip r:embed="rId2"/>
+          <a:blip r:embed="rId3"/>
           <a:stretch>
             <a:fillRect/>
           </a:stretch>
@@ -3868,6 +3948,13 @@
             <a:noFill/>
           </a:ln>
         </p:spPr>
+        <p:txBody>
+          <a:bodyPr/>
+          <a:lstStyle/>
+          <a:p>
+            <a:endParaRPr lang="en-US"/>
+          </a:p>
+        </p:txBody>
       </p:sp>
       <p:sp>
         <p:nvSpPr>
@@ -3960,6 +4047,13 @@
                 <a:noFill/>
               </a:ln>
             </p:spPr>
+            <p:txBody>
+              <a:bodyPr/>
+              <a:lstStyle/>
+              <a:p>
+                <a:endParaRPr lang="en-US"/>
+              </a:p>
+            </p:txBody>
           </p:sp>
           <p:sp>
             <p:nvSpPr>
@@ -4159,6 +4253,13 @@
                 <a:noFill/>
               </a:ln>
             </p:spPr>
+            <p:txBody>
+              <a:bodyPr/>
+              <a:lstStyle/>
+              <a:p>
+                <a:endParaRPr lang="en-US"/>
+              </a:p>
+            </p:txBody>
           </p:sp>
           <p:sp>
             <p:nvSpPr>
@@ -4358,6 +4459,13 @@
                 <a:noFill/>
               </a:ln>
             </p:spPr>
+            <p:txBody>
+              <a:bodyPr/>
+              <a:lstStyle/>
+              <a:p>
+                <a:endParaRPr lang="en-US"/>
+              </a:p>
+            </p:txBody>
           </p:sp>
           <p:sp>
             <p:nvSpPr>
@@ -4557,6 +4665,13 @@
                 <a:noFill/>
               </a:ln>
             </p:spPr>
+            <p:txBody>
+              <a:bodyPr/>
+              <a:lstStyle/>
+              <a:p>
+                <a:endParaRPr lang="en-US"/>
+              </a:p>
+            </p:txBody>
           </p:sp>
           <p:sp>
             <p:nvSpPr>
@@ -4756,6 +4871,13 @@
                 <a:noFill/>
               </a:ln>
             </p:spPr>
+            <p:txBody>
+              <a:bodyPr/>
+              <a:lstStyle/>
+              <a:p>
+                <a:endParaRPr lang="en-US"/>
+              </a:p>
+            </p:txBody>
           </p:sp>
           <p:sp>
             <p:nvSpPr>
@@ -4955,6 +5077,13 @@
                 <a:noFill/>
               </a:ln>
             </p:spPr>
+            <p:txBody>
+              <a:bodyPr/>
+              <a:lstStyle/>
+              <a:p>
+                <a:endParaRPr lang="en-US"/>
+              </a:p>
+            </p:txBody>
           </p:sp>
           <p:sp>
             <p:nvSpPr>
@@ -5116,31 +5245,6 @@
               </a:p>
             </p:txBody>
           </p:sp>
-          <p:pic>
-            <p:nvPicPr>
-              <p:cNvPr id="41" name="Image 41"/>
-              <p:cNvPicPr>
-                <a:picLocks noChangeAspect="1"/>
-              </p:cNvPicPr>
-              <p:nvPr/>
-            </p:nvPicPr>
-            <p:blipFill>
-              <a:blip r:embed="rId3"/>
-              <a:srcRect l="0" t="14819" r="0" b="14819"/>
-              <a:stretch>
-                <a:fillRect/>
-              </a:stretch>
-            </p:blipFill>
-            <p:spPr>
-              <a:xfrm>
-                <a:off x="10382250" y="4143375"/>
-                <a:ext cx="1000125" cy="1190625"/>
-              </a:xfrm>
-              <a:prstGeom prst="rect">
-                <a:avLst/>
-              </a:prstGeom>
-            </p:spPr>
-          </p:pic>
         </p:grpSp>
       </p:grpSp>
       <p:sp>
@@ -5188,9 +5292,18 @@
   <p:clrMapOvr>
     <a:masterClrMapping/>
   </p:clrMapOvr>
-  <p:transition xmlns:p14="http://schemas.microsoft.com/office/powerpoint/2010/main" p14:dur="400">
-    <p:fade/>
-  </p:transition>
+  <mc:AlternateContent xmlns:mc="http://schemas.openxmlformats.org/markup-compatibility/2006">
+    <mc:Choice xmlns:p14="http://schemas.microsoft.com/office/powerpoint/2010/main" Requires="p14">
+      <p:transition p14:dur="400">
+        <p:fade/>
+      </p:transition>
+    </mc:Choice>
+    <mc:Fallback>
+      <p:transition>
+        <p:fade/>
+      </p:transition>
+    </mc:Fallback>
+  </mc:AlternateContent>
 </p:sld>
 </file>
 
@@ -5228,7 +5341,7 @@
           <p:nvPr/>
         </p:nvPicPr>
         <p:blipFill>
-          <a:blip r:embed="rId2"/>
+          <a:blip r:embed="rId3"/>
           <a:stretch>
             <a:fillRect/>
           </a:stretch>
@@ -5320,6 +5433,13 @@
               <a:noFill/>
             </a:ln>
           </p:spPr>
+          <p:txBody>
+            <a:bodyPr/>
+            <a:lstStyle/>
+            <a:p>
+              <a:endParaRPr lang="en-US"/>
+            </a:p>
+          </p:txBody>
         </p:sp>
         <p:sp>
           <p:nvSpPr>
@@ -5399,6 +5519,13 @@
               <a:noFill/>
             </a:ln>
           </p:spPr>
+          <p:txBody>
+            <a:bodyPr/>
+            <a:lstStyle/>
+            <a:p>
+              <a:endParaRPr lang="en-US"/>
+            </a:p>
+          </p:txBody>
         </p:sp>
         <p:sp>
           <p:nvSpPr>
@@ -5650,6 +5777,13 @@
               </a:solidFill>
             </a:ln>
           </p:spPr>
+          <p:txBody>
+            <a:bodyPr/>
+            <a:lstStyle/>
+            <a:p>
+              <a:endParaRPr lang="en-US"/>
+            </a:p>
+          </p:txBody>
         </p:sp>
       </p:grpSp>
       <p:grpSp>
@@ -5821,6 +5955,13 @@
               </a:solidFill>
             </a:ln>
           </p:spPr>
+          <p:txBody>
+            <a:bodyPr/>
+            <a:lstStyle/>
+            <a:p>
+              <a:endParaRPr lang="en-US"/>
+            </a:p>
+          </p:txBody>
         </p:sp>
       </p:grpSp>
       <p:grpSp>
@@ -5992,6 +6133,13 @@
               </a:solidFill>
             </a:ln>
           </p:spPr>
+          <p:txBody>
+            <a:bodyPr/>
+            <a:lstStyle/>
+            <a:p>
+              <a:endParaRPr lang="en-US"/>
+            </a:p>
+          </p:txBody>
         </p:sp>
       </p:grpSp>
       <p:grpSp>
@@ -6163,6 +6311,13 @@
               </a:solidFill>
             </a:ln>
           </p:spPr>
+          <p:txBody>
+            <a:bodyPr/>
+            <a:lstStyle/>
+            <a:p>
+              <a:endParaRPr lang="en-US"/>
+            </a:p>
+          </p:txBody>
         </p:sp>
       </p:grpSp>
       <p:grpSp>
@@ -6202,6 +6357,13 @@
               <a:noFill/>
             </a:ln>
           </p:spPr>
+          <p:txBody>
+            <a:bodyPr/>
+            <a:lstStyle/>
+            <a:p>
+              <a:endParaRPr lang="en-US"/>
+            </a:p>
+          </p:txBody>
         </p:sp>
         <p:sp>
           <p:nvSpPr>
@@ -6504,6 +6666,13 @@
               <a:noFill/>
             </a:ln>
           </p:spPr>
+          <p:txBody>
+            <a:bodyPr/>
+            <a:lstStyle/>
+            <a:p>
+              <a:endParaRPr lang="en-US"/>
+            </a:p>
+          </p:txBody>
         </p:sp>
       </p:grpSp>
       <p:grpSp>
@@ -6646,9 +6815,18 @@
   <p:clrMapOvr>
     <a:masterClrMapping/>
   </p:clrMapOvr>
-  <p:transition xmlns:p14="http://schemas.microsoft.com/office/powerpoint/2010/main" p14:dur="400">
-    <p:fade/>
-  </p:transition>
+  <mc:AlternateContent xmlns:mc="http://schemas.openxmlformats.org/markup-compatibility/2006">
+    <mc:Choice xmlns:p14="http://schemas.microsoft.com/office/powerpoint/2010/main" Requires="p14">
+      <p:transition p14:dur="400">
+        <p:fade/>
+      </p:transition>
+    </mc:Choice>
+    <mc:Fallback>
+      <p:transition>
+        <p:fade/>
+      </p:transition>
+    </mc:Fallback>
+  </mc:AlternateContent>
 </p:sld>
 </file>
 
@@ -6686,7 +6864,7 @@
           <p:nvPr/>
         </p:nvPicPr>
         <p:blipFill>
-          <a:blip r:embed="rId2"/>
+          <a:blip r:embed="rId3"/>
           <a:stretch>
             <a:fillRect/>
           </a:stretch>
@@ -6764,6 +6942,13 @@
             <a:noFill/>
           </a:ln>
         </p:spPr>
+        <p:txBody>
+          <a:bodyPr/>
+          <a:lstStyle/>
+          <a:p>
+            <a:endParaRPr lang="en-US"/>
+          </a:p>
+        </p:txBody>
       </p:sp>
       <p:sp>
         <p:nvSpPr>
@@ -6844,6 +7029,13 @@
               </a:solidFill>
             </a:ln>
           </p:spPr>
+          <p:txBody>
+            <a:bodyPr/>
+            <a:lstStyle/>
+            <a:p>
+              <a:endParaRPr lang="en-US"/>
+            </a:p>
+          </p:txBody>
         </p:sp>
         <p:pic>
           <p:nvPicPr>
@@ -6854,7 +7046,7 @@
             <p:nvPr/>
           </p:nvPicPr>
           <p:blipFill>
-            <a:blip r:embed="rId3"/>
+            <a:blip r:embed="rId4"/>
             <a:stretch>
               <a:fillRect/>
             </a:stretch>
@@ -6892,6 +7084,13 @@
               <a:noFill/>
             </a:ln>
           </p:spPr>
+          <p:txBody>
+            <a:bodyPr/>
+            <a:lstStyle/>
+            <a:p>
+              <a:endParaRPr lang="en-US"/>
+            </a:p>
+          </p:txBody>
         </p:sp>
         <p:sp>
           <p:nvSpPr>
@@ -7019,9 +7218,18 @@
   <p:clrMapOvr>
     <a:masterClrMapping/>
   </p:clrMapOvr>
-  <p:transition xmlns:p14="http://schemas.microsoft.com/office/powerpoint/2010/main" p14:dur="400">
-    <p:fade/>
-  </p:transition>
+  <mc:AlternateContent xmlns:mc="http://schemas.openxmlformats.org/markup-compatibility/2006">
+    <mc:Choice xmlns:p14="http://schemas.microsoft.com/office/powerpoint/2010/main" Requires="p14">
+      <p:transition p14:dur="400">
+        <p:fade/>
+      </p:transition>
+    </mc:Choice>
+    <mc:Fallback>
+      <p:transition>
+        <p:fade/>
+      </p:transition>
+    </mc:Fallback>
+  </mc:AlternateContent>
 </p:sld>
 </file>
 
@@ -7059,7 +7267,7 @@
           <p:nvPr/>
         </p:nvPicPr>
         <p:blipFill>
-          <a:blip r:embed="rId2"/>
+          <a:blip r:embed="rId3"/>
           <a:stretch>
             <a:fillRect/>
           </a:stretch>
@@ -7151,6 +7359,13 @@
               <a:noFill/>
             </a:ln>
           </p:spPr>
+          <p:txBody>
+            <a:bodyPr/>
+            <a:lstStyle/>
+            <a:p>
+              <a:endParaRPr lang="en-US"/>
+            </a:p>
+          </p:txBody>
         </p:sp>
         <p:sp>
           <p:nvSpPr>
@@ -7230,6 +7445,13 @@
               <a:noFill/>
             </a:ln>
           </p:spPr>
+          <p:txBody>
+            <a:bodyPr/>
+            <a:lstStyle/>
+            <a:p>
+              <a:endParaRPr lang="en-US"/>
+            </a:p>
+          </p:txBody>
         </p:sp>
         <p:sp>
           <p:nvSpPr>
@@ -7252,6 +7474,13 @@
               <a:noFill/>
             </a:ln>
           </p:spPr>
+          <p:txBody>
+            <a:bodyPr/>
+            <a:lstStyle/>
+            <a:p>
+              <a:endParaRPr lang="en-US"/>
+            </a:p>
+          </p:txBody>
         </p:sp>
         <p:sp>
           <p:nvSpPr>
@@ -7358,7 +7587,7 @@
             </a:bodyPr>
             <a:lstStyle/>
             <a:p>
-              <a:pPr algn="l" marL="153289" indent="-153289">
+              <a:pPr marL="153289" indent="-153289" algn="l">
                 <a:buClr>
                   <a:schemeClr val="dk1"/>
                 </a:buClr>
@@ -7405,7 +7634,7 @@
             </a:bodyPr>
             <a:lstStyle/>
             <a:p>
-              <a:pPr algn="l" marL="153289" indent="-153289">
+              <a:pPr marL="153289" indent="-153289" algn="l">
                 <a:buClr>
                   <a:schemeClr val="dk1"/>
                 </a:buClr>
@@ -7452,7 +7681,7 @@
             </a:bodyPr>
             <a:lstStyle/>
             <a:p>
-              <a:pPr algn="l" marL="153289" indent="-153289">
+              <a:pPr marL="153289" indent="-153289" algn="l">
                 <a:buClr>
                   <a:schemeClr val="dk1"/>
                 </a:buClr>
@@ -7509,6 +7738,13 @@
               </a:solidFill>
             </a:ln>
           </p:spPr>
+          <p:txBody>
+            <a:bodyPr/>
+            <a:lstStyle/>
+            <a:p>
+              <a:endParaRPr lang="en-US"/>
+            </a:p>
+          </p:txBody>
         </p:sp>
         <p:sp>
           <p:nvSpPr>
@@ -7628,6 +7864,13 @@
               <a:noFill/>
             </a:ln>
           </p:spPr>
+          <p:txBody>
+            <a:bodyPr/>
+            <a:lstStyle/>
+            <a:p>
+              <a:endParaRPr lang="en-US"/>
+            </a:p>
+          </p:txBody>
         </p:sp>
         <p:sp>
           <p:nvSpPr>
@@ -7650,6 +7893,13 @@
               <a:noFill/>
             </a:ln>
           </p:spPr>
+          <p:txBody>
+            <a:bodyPr/>
+            <a:lstStyle/>
+            <a:p>
+              <a:endParaRPr lang="en-US"/>
+            </a:p>
+          </p:txBody>
         </p:sp>
         <p:sp>
           <p:nvSpPr>
@@ -7756,7 +8006,7 @@
             </a:bodyPr>
             <a:lstStyle/>
             <a:p>
-              <a:pPr algn="l" marL="153289" indent="-153289">
+              <a:pPr marL="153289" indent="-153289" algn="l">
                 <a:buClr>
                   <a:schemeClr val="dk1"/>
                 </a:buClr>
@@ -7803,7 +8053,7 @@
             </a:bodyPr>
             <a:lstStyle/>
             <a:p>
-              <a:pPr algn="l" marL="153289" indent="-153289">
+              <a:pPr marL="153289" indent="-153289" algn="l">
                 <a:buClr>
                   <a:schemeClr val="dk1"/>
                 </a:buClr>
@@ -7850,7 +8100,7 @@
             </a:bodyPr>
             <a:lstStyle/>
             <a:p>
-              <a:pPr algn="l" marL="153289" indent="-153289">
+              <a:pPr marL="153289" indent="-153289" algn="l">
                 <a:buClr>
                   <a:schemeClr val="dk1"/>
                 </a:buClr>
@@ -7907,6 +8157,13 @@
               </a:solidFill>
             </a:ln>
           </p:spPr>
+          <p:txBody>
+            <a:bodyPr/>
+            <a:lstStyle/>
+            <a:p>
+              <a:endParaRPr lang="en-US"/>
+            </a:p>
+          </p:txBody>
         </p:sp>
         <p:sp>
           <p:nvSpPr>
@@ -8078,6 +8335,13 @@
               </a:solidFill>
             </a:ln>
           </p:spPr>
+          <p:txBody>
+            <a:bodyPr/>
+            <a:lstStyle/>
+            <a:p>
+              <a:endParaRPr lang="en-US"/>
+            </a:p>
+          </p:txBody>
         </p:sp>
         <p:sp>
           <p:nvSpPr>
@@ -8100,6 +8364,13 @@
               <a:noFill/>
             </a:ln>
           </p:spPr>
+          <p:txBody>
+            <a:bodyPr/>
+            <a:lstStyle/>
+            <a:p>
+              <a:endParaRPr lang="en-US"/>
+            </a:p>
+          </p:txBody>
         </p:sp>
         <p:sp>
           <p:nvSpPr>
@@ -8202,6 +8473,13 @@
               <a:noFill/>
             </a:ln>
           </p:spPr>
+          <p:txBody>
+            <a:bodyPr/>
+            <a:lstStyle/>
+            <a:p>
+              <a:endParaRPr lang="en-US"/>
+            </a:p>
+          </p:txBody>
         </p:sp>
         <p:sp>
           <p:nvSpPr>
@@ -8304,6 +8582,13 @@
               <a:noFill/>
             </a:ln>
           </p:spPr>
+          <p:txBody>
+            <a:bodyPr/>
+            <a:lstStyle/>
+            <a:p>
+              <a:endParaRPr lang="en-US"/>
+            </a:p>
+          </p:txBody>
         </p:sp>
         <p:sp>
           <p:nvSpPr>
@@ -8406,6 +8691,13 @@
               <a:noFill/>
             </a:ln>
           </p:spPr>
+          <p:txBody>
+            <a:bodyPr/>
+            <a:lstStyle/>
+            <a:p>
+              <a:endParaRPr lang="en-US"/>
+            </a:p>
+          </p:txBody>
         </p:sp>
         <p:sp>
           <p:nvSpPr>
@@ -8628,9 +8920,18 @@
   <p:clrMapOvr>
     <a:masterClrMapping/>
   </p:clrMapOvr>
-  <p:transition xmlns:p14="http://schemas.microsoft.com/office/powerpoint/2010/main" p14:dur="400">
-    <p:fade/>
-  </p:transition>
+  <mc:AlternateContent xmlns:mc="http://schemas.openxmlformats.org/markup-compatibility/2006">
+    <mc:Choice xmlns:p14="http://schemas.microsoft.com/office/powerpoint/2010/main" Requires="p14">
+      <p:transition p14:dur="400">
+        <p:fade/>
+      </p:transition>
+    </mc:Choice>
+    <mc:Fallback>
+      <p:transition>
+        <p:fade/>
+      </p:transition>
+    </mc:Fallback>
+  </mc:AlternateContent>
 </p:sld>
 </file>
 
@@ -8668,7 +8969,7 @@
           <p:nvPr/>
         </p:nvPicPr>
         <p:blipFill>
-          <a:blip r:embed="rId2"/>
+          <a:blip r:embed="rId3"/>
           <a:stretch>
             <a:fillRect/>
           </a:stretch>
@@ -8760,6 +9061,13 @@
               <a:noFill/>
             </a:ln>
           </p:spPr>
+          <p:txBody>
+            <a:bodyPr/>
+            <a:lstStyle/>
+            <a:p>
+              <a:endParaRPr lang="en-US"/>
+            </a:p>
+          </p:txBody>
         </p:sp>
         <p:sp>
           <p:nvSpPr>
@@ -8839,6 +9147,13 @@
               <a:noFill/>
             </a:ln>
           </p:spPr>
+          <p:txBody>
+            <a:bodyPr/>
+            <a:lstStyle/>
+            <a:p>
+              <a:endParaRPr lang="en-US"/>
+            </a:p>
+          </p:txBody>
         </p:sp>
         <p:sp>
           <p:nvSpPr>
@@ -8998,6 +9313,13 @@
               <a:noFill/>
             </a:ln>
           </p:spPr>
+          <p:txBody>
+            <a:bodyPr/>
+            <a:lstStyle/>
+            <a:p>
+              <a:endParaRPr lang="en-US"/>
+            </a:p>
+          </p:txBody>
         </p:sp>
         <p:pic>
           <p:nvPicPr>
@@ -9008,7 +9330,7 @@
             <p:nvPr/>
           </p:nvPicPr>
           <p:blipFill>
-            <a:blip r:embed="rId3"/>
+            <a:blip r:embed="rId4"/>
             <a:stretch>
               <a:fillRect/>
             </a:stretch>
@@ -9058,6 +9380,13 @@
               </a:solidFill>
             </a:ln>
           </p:spPr>
+          <p:txBody>
+            <a:bodyPr/>
+            <a:lstStyle/>
+            <a:p>
+              <a:endParaRPr lang="en-US"/>
+            </a:p>
+          </p:txBody>
         </p:sp>
         <p:sp>
           <p:nvSpPr>
@@ -9259,7 +9588,7 @@
             </a:bodyPr>
             <a:lstStyle/>
             <a:p>
-              <a:pPr algn="l" marL="153289" indent="-153289">
+              <a:pPr marL="153289" indent="-153289" algn="l">
                 <a:buClr>
                   <a:schemeClr val="dk1"/>
                 </a:buClr>
@@ -9306,7 +9635,7 @@
             </a:bodyPr>
             <a:lstStyle/>
             <a:p>
-              <a:pPr algn="l" marL="153289" indent="-153289">
+              <a:pPr marL="153289" indent="-153289" algn="l">
                 <a:buClr>
                   <a:schemeClr val="dk1"/>
                 </a:buClr>
@@ -9353,7 +9682,7 @@
             </a:bodyPr>
             <a:lstStyle/>
             <a:p>
-              <a:pPr algn="l" marL="153289" indent="-153289">
+              <a:pPr marL="153289" indent="-153289" algn="l">
                 <a:buClr>
                   <a:schemeClr val="dk1"/>
                 </a:buClr>
@@ -9455,7 +9784,7 @@
             </a:bodyPr>
             <a:lstStyle/>
             <a:p>
-              <a:pPr algn="l" marL="153289" indent="-153289">
+              <a:pPr marL="153289" indent="-153289" algn="l">
                 <a:buClr>
                   <a:schemeClr val="dk1"/>
                 </a:buClr>
@@ -9502,7 +9831,7 @@
             </a:bodyPr>
             <a:lstStyle/>
             <a:p>
-              <a:pPr algn="l" marL="153289" indent="-153289">
+              <a:pPr marL="153289" indent="-153289" algn="l">
                 <a:buClr>
                   <a:schemeClr val="dk1"/>
                 </a:buClr>
@@ -9549,7 +9878,7 @@
             </a:bodyPr>
             <a:lstStyle/>
             <a:p>
-              <a:pPr algn="l" marL="153289" indent="-153289">
+              <a:pPr marL="153289" indent="-153289" algn="l">
                 <a:buClr>
                   <a:schemeClr val="dk1"/>
                 </a:buClr>
@@ -9651,7 +9980,7 @@
             </a:bodyPr>
             <a:lstStyle/>
             <a:p>
-              <a:pPr algn="l" marL="153289" indent="-153289">
+              <a:pPr marL="153289" indent="-153289" algn="l">
                 <a:buClr>
                   <a:schemeClr val="dk1"/>
                 </a:buClr>
@@ -9698,7 +10027,7 @@
             </a:bodyPr>
             <a:lstStyle/>
             <a:p>
-              <a:pPr algn="l" marL="153289" indent="-153289">
+              <a:pPr marL="153289" indent="-153289" algn="l">
                 <a:buClr>
                   <a:schemeClr val="dk1"/>
                 </a:buClr>
@@ -9745,7 +10074,7 @@
             </a:bodyPr>
             <a:lstStyle/>
             <a:p>
-              <a:pPr algn="l" marL="153289" indent="-153289">
+              <a:pPr marL="153289" indent="-153289" algn="l">
                 <a:buClr>
                   <a:schemeClr val="dk1"/>
                 </a:buClr>
@@ -9847,7 +10176,7 @@
             </a:bodyPr>
             <a:lstStyle/>
             <a:p>
-              <a:pPr algn="l" marL="153289" indent="-153289">
+              <a:pPr marL="153289" indent="-153289" algn="l">
                 <a:buClr>
                   <a:schemeClr val="dk1"/>
                 </a:buClr>
@@ -9894,7 +10223,7 @@
             </a:bodyPr>
             <a:lstStyle/>
             <a:p>
-              <a:pPr algn="l" marL="153289" indent="-153289">
+              <a:pPr marL="153289" indent="-153289" algn="l">
                 <a:buClr>
                   <a:schemeClr val="dk1"/>
                 </a:buClr>
@@ -9941,7 +10270,7 @@
             </a:bodyPr>
             <a:lstStyle/>
             <a:p>
-              <a:pPr algn="l" marL="153289" indent="-153289">
+              <a:pPr marL="153289" indent="-153289" algn="l">
                 <a:buClr>
                   <a:schemeClr val="dk1"/>
                 </a:buClr>
@@ -10104,9 +10433,18 @@
   <p:clrMapOvr>
     <a:masterClrMapping/>
   </p:clrMapOvr>
-  <p:transition xmlns:p14="http://schemas.microsoft.com/office/powerpoint/2010/main" p14:dur="400">
-    <p:fade/>
-  </p:transition>
+  <mc:AlternateContent xmlns:mc="http://schemas.openxmlformats.org/markup-compatibility/2006">
+    <mc:Choice xmlns:p14="http://schemas.microsoft.com/office/powerpoint/2010/main" Requires="p14">
+      <p:transition p14:dur="400">
+        <p:fade/>
+      </p:transition>
+    </mc:Choice>
+    <mc:Fallback>
+      <p:transition>
+        <p:fade/>
+      </p:transition>
+    </mc:Fallback>
+  </mc:AlternateContent>
 </p:sld>
 </file>
 
@@ -10144,1405 +10482,7 @@
           <p:nvPr/>
         </p:nvPicPr>
         <p:blipFill>
-          <a:blip r:embed="rId2"/>
-          <a:stretch>
-            <a:fillRect/>
-          </a:stretch>
-        </p:blipFill>
-        <p:spPr>
-          <a:xfrm>
-            <a:off x="486276" y="266700"/>
-            <a:ext cx="1313447" cy="381000"/>
-          </a:xfrm>
-          <a:prstGeom prst="rect">
-            <a:avLst/>
-          </a:prstGeom>
-        </p:spPr>
-      </p:pic>
-      <p:sp>
-        <p:nvSpPr>
-          <p:cNvPr id="3" name="TextBox 3"/>
-          <p:cNvSpPr txBox="1"/>
-          <p:nvPr/>
-        </p:nvSpPr>
-        <p:spPr>
-          <a:xfrm>
-            <a:off x="2462784" y="356235"/>
-            <a:ext cx="3771014" cy="528066"/>
-          </a:xfrm>
-          <a:prstGeom prst="rect">
-            <a:avLst/>
-          </a:prstGeom>
-          <a:noFill/>
-          <a:ln>
-            <a:noFill/>
-          </a:ln>
-        </p:spPr>
-        <p:txBody>
-          <a:bodyPr wrap="none" lIns="0" tIns="0" rIns="0" bIns="0" anchor="t" anchorCtr="0">
-            <a:spAutoFit/>
-          </a:bodyPr>
-          <a:lstStyle/>
-          <a:p>
-            <a:pPr algn="l"/>
-            <a:r>
-              <a:rPr lang="en-US" sz="2700" b="1" dirty="0">
-                <a:solidFill>
-                  <a:schemeClr val="accent1"/>
-                </a:solidFill>
-                <a:latin typeface="+mn-lt"/>
-                <a:ea typeface="+mn-ea"/>
-                <a:cs typeface="+mn-cs"/>
-              </a:rPr>
-              <a:t>4. Dự án MSB Office</a:t>
-            </a:r>
-          </a:p>
-        </p:txBody>
-      </p:sp>
-      <p:sp>
-        <p:nvSpPr>
-          <p:cNvPr id="4" name="Rectangle 4"/>
-          <p:cNvSpPr/>
-          <p:nvPr/>
-        </p:nvSpPr>
-        <p:spPr>
-          <a:xfrm>
-            <a:off x="9239250" y="285750"/>
-            <a:ext cx="2381250" cy="400050"/>
-          </a:xfrm>
-          <a:prstGeom prst="roundRect">
-            <a:avLst>
-              <a:gd name="adj" fmla="val 50000"/>
-            </a:avLst>
-          </a:prstGeom>
-          <a:solidFill>
-            <a:srgbClr val="EAF6F0"/>
-          </a:solidFill>
-          <a:ln>
-            <a:noFill/>
-          </a:ln>
-        </p:spPr>
-      </p:sp>
-      <p:sp>
-        <p:nvSpPr>
-          <p:cNvPr id="5" name="TextBox 5"/>
-          <p:cNvSpPr txBox="1"/>
-          <p:nvPr/>
-        </p:nvSpPr>
-        <p:spPr>
-          <a:xfrm>
-            <a:off x="9627309" y="405289"/>
-            <a:ext cx="1605132" cy="249364"/>
-          </a:xfrm>
-          <a:prstGeom prst="rect">
-            <a:avLst/>
-          </a:prstGeom>
-          <a:noFill/>
-          <a:ln>
-            <a:noFill/>
-          </a:ln>
-        </p:spPr>
-        <p:txBody>
-          <a:bodyPr wrap="none" lIns="0" tIns="0" rIns="0" bIns="0" anchor="t" anchorCtr="0">
-            <a:spAutoFit/>
-          </a:bodyPr>
-          <a:lstStyle/>
-          <a:p>
-            <a:pPr algn="ctr"/>
-            <a:r>
-              <a:rPr lang="en-US" sz="1280" b="1" dirty="0">
-                <a:solidFill>
-                  <a:schemeClr val="accent1"/>
-                </a:solidFill>
-                <a:latin typeface="+mn-lt"/>
-                <a:ea typeface="+mn-ea"/>
-                <a:cs typeface="+mn-cs"/>
-              </a:rPr>
-              <a:t>07/04–10/04/2026</a:t>
-            </a:r>
-          </a:p>
-        </p:txBody>
-      </p:sp>
-      <p:grpSp>
-        <p:nvGrpSpPr>
-          <p:cNvPr id="42" name="Group 42"/>
-          <p:cNvGrpSpPr/>
-          <p:nvPr/>
-        </p:nvGrpSpPr>
-        <p:grpSpPr>
-          <a:xfrm>
-            <a:off x="533400" y="1066800"/>
-            <a:ext cx="11125200" cy="4533900"/>
-            <a:chOff x="533400" y="1066800"/>
-            <a:chExt cx="11125200" cy="4533900"/>
-          </a:xfrm>
-        </p:grpSpPr>
-        <p:grpSp>
-          <p:nvGrpSpPr>
-            <p:cNvPr id="11" name="Group 11"/>
-            <p:cNvGrpSpPr/>
-            <p:nvPr/>
-          </p:nvGrpSpPr>
-          <p:grpSpPr>
-            <a:xfrm>
-              <a:off x="533400" y="1066800"/>
-              <a:ext cx="3429000" cy="2143125"/>
-              <a:chOff x="533400" y="1066800"/>
-              <a:chExt cx="3429000" cy="2143125"/>
-            </a:xfrm>
-          </p:grpSpPr>
-          <p:sp>
-            <p:nvSpPr>
-              <p:cNvPr id="6" name="Rectangle 6"/>
-              <p:cNvSpPr/>
-              <p:nvPr/>
-            </p:nvSpPr>
-            <p:spPr>
-              <a:xfrm>
-                <a:off x="533400" y="1066800"/>
-                <a:ext cx="3429000" cy="2143125"/>
-              </a:xfrm>
-              <a:prstGeom prst="roundRect">
-                <a:avLst>
-                  <a:gd name="adj" fmla="val 7111"/>
-                </a:avLst>
-              </a:prstGeom>
-              <a:solidFill>
-                <a:schemeClr val="lt2"/>
-              </a:solidFill>
-              <a:ln>
-                <a:noFill/>
-              </a:ln>
-            </p:spPr>
-          </p:sp>
-          <p:sp>
-            <p:nvSpPr>
-              <p:cNvPr id="7" name="TextBox 7"/>
-              <p:cNvSpPr txBox="1"/>
-              <p:nvPr/>
-            </p:nvSpPr>
-            <p:spPr>
-              <a:xfrm>
-                <a:off x="773811" y="1284446"/>
-                <a:ext cx="1605077" cy="278702"/>
-              </a:xfrm>
-              <a:prstGeom prst="rect">
-                <a:avLst/>
-              </a:prstGeom>
-              <a:noFill/>
-              <a:ln>
-                <a:noFill/>
-              </a:ln>
-            </p:spPr>
-            <p:txBody>
-              <a:bodyPr wrap="none" lIns="0" tIns="0" rIns="0" bIns="0" anchor="t" anchorCtr="0">
-                <a:spAutoFit/>
-              </a:bodyPr>
-              <a:lstStyle/>
-              <a:p>
-                <a:pPr algn="l"/>
-                <a:r>
-                  <a:rPr lang="en-US" sz="1420" b="1" dirty="0">
-                    <a:solidFill>
-                      <a:schemeClr val="accent1"/>
-                    </a:solidFill>
-                    <a:latin typeface="+mn-lt"/>
-                    <a:ea typeface="+mn-ea"/>
-                    <a:cs typeface="+mn-cs"/>
-                  </a:rPr>
-                  <a:t>CÔNG VIỆC CHÍNH</a:t>
-                </a:r>
-              </a:p>
-            </p:txBody>
-          </p:sp>
-          <p:sp>
-            <p:nvSpPr>
-              <p:cNvPr id="8" name="TextBox 8"/>
-              <p:cNvSpPr txBox="1"/>
-              <p:nvPr/>
-            </p:nvSpPr>
-            <p:spPr>
-              <a:xfrm>
-                <a:off x="774192" y="1664018"/>
-                <a:ext cx="2064044" cy="264033"/>
-              </a:xfrm>
-              <a:prstGeom prst="rect">
-                <a:avLst/>
-              </a:prstGeom>
-              <a:noFill/>
-              <a:ln>
-                <a:noFill/>
-              </a:ln>
-            </p:spPr>
-            <p:txBody>
-              <a:bodyPr wrap="none" lIns="0" tIns="0" rIns="0" bIns="0" anchor="t" anchorCtr="0">
-                <a:spAutoFit/>
-              </a:bodyPr>
-              <a:lstStyle/>
-              <a:p>
-                <a:pPr algn="l"/>
-                <a:r>
-                  <a:rPr lang="en-US" sz="1350" dirty="0">
-                    <a:solidFill>
-                      <a:schemeClr val="dk1"/>
-                    </a:solidFill>
-                    <a:latin typeface="+mn-lt"/>
-                    <a:ea typeface="+mn-ea"/>
-                    <a:cs typeface="+mn-cs"/>
-                  </a:rPr>
-                  <a:t>Fix lỗi đo sai năng lượng</a:t>
-                </a:r>
-              </a:p>
-            </p:txBody>
-          </p:sp>
-          <p:sp>
-            <p:nvSpPr>
-              <p:cNvPr id="9" name="TextBox 9"/>
-              <p:cNvSpPr txBox="1"/>
-              <p:nvPr/>
-            </p:nvSpPr>
-            <p:spPr>
-              <a:xfrm>
-                <a:off x="774192" y="1959292"/>
-                <a:ext cx="2134426" cy="264033"/>
-              </a:xfrm>
-              <a:prstGeom prst="rect">
-                <a:avLst/>
-              </a:prstGeom>
-              <a:noFill/>
-              <a:ln>
-                <a:noFill/>
-              </a:ln>
-            </p:spPr>
-            <p:txBody>
-              <a:bodyPr wrap="none" lIns="0" tIns="0" rIns="0" bIns="0" anchor="t" anchorCtr="0">
-                <a:spAutoFit/>
-              </a:bodyPr>
-              <a:lstStyle/>
-              <a:p>
-                <a:pPr algn="l"/>
-                <a:r>
-                  <a:rPr lang="en-US" sz="1350" dirty="0">
-                    <a:solidFill>
-                      <a:schemeClr val="dk1"/>
-                    </a:solidFill>
-                    <a:latin typeface="+mn-lt"/>
-                    <a:ea typeface="+mn-ea"/>
-                    <a:cs typeface="+mn-cs"/>
-                  </a:rPr>
-                  <a:t>Kiểm tra Jig tại nhà máy</a:t>
-                </a:r>
-              </a:p>
-            </p:txBody>
-          </p:sp>
-          <p:sp>
-            <p:nvSpPr>
-              <p:cNvPr id="10" name="TextBox 10"/>
-              <p:cNvSpPr txBox="1"/>
-              <p:nvPr/>
-            </p:nvSpPr>
-            <p:spPr>
-              <a:xfrm>
-                <a:off x="774192" y="2254568"/>
-                <a:ext cx="2364155" cy="264033"/>
-              </a:xfrm>
-              <a:prstGeom prst="rect">
-                <a:avLst/>
-              </a:prstGeom>
-              <a:noFill/>
-              <a:ln>
-                <a:noFill/>
-              </a:ln>
-            </p:spPr>
-            <p:txBody>
-              <a:bodyPr wrap="none" lIns="0" tIns="0" rIns="0" bIns="0" anchor="t" anchorCtr="0">
-                <a:spAutoFit/>
-              </a:bodyPr>
-              <a:lstStyle/>
-              <a:p>
-                <a:pPr algn="l"/>
-                <a:r>
-                  <a:rPr lang="en-US" sz="1350" dirty="0">
-                    <a:solidFill>
-                      <a:schemeClr val="dk1"/>
-                    </a:solidFill>
-                    <a:latin typeface="+mn-lt"/>
-                    <a:ea typeface="+mn-ea"/>
-                    <a:cs typeface="+mn-cs"/>
-                  </a:rPr>
-                  <a:t>Đối chiếu dữ liệu đo thực tế</a:t>
-                </a:r>
-              </a:p>
-            </p:txBody>
-          </p:sp>
-        </p:grpSp>
-        <p:grpSp>
-          <p:nvGrpSpPr>
-            <p:cNvPr id="17" name="Group 17"/>
-            <p:cNvGrpSpPr/>
-            <p:nvPr/>
-          </p:nvGrpSpPr>
-          <p:grpSpPr>
-            <a:xfrm>
-              <a:off x="4210050" y="1066800"/>
-              <a:ext cx="3429000" cy="2143125"/>
-              <a:chOff x="4210050" y="1066800"/>
-              <a:chExt cx="3429000" cy="2143125"/>
-            </a:xfrm>
-          </p:grpSpPr>
-          <p:sp>
-            <p:nvSpPr>
-              <p:cNvPr id="12" name="Rectangle 12"/>
-              <p:cNvSpPr/>
-              <p:nvPr/>
-            </p:nvSpPr>
-            <p:spPr>
-              <a:xfrm>
-                <a:off x="4210050" y="1066800"/>
-                <a:ext cx="3429000" cy="2143125"/>
-              </a:xfrm>
-              <a:prstGeom prst="roundRect">
-                <a:avLst>
-                  <a:gd name="adj" fmla="val 7111"/>
-                </a:avLst>
-              </a:prstGeom>
-              <a:solidFill>
-                <a:srgbClr val="EAF6F0"/>
-              </a:solidFill>
-              <a:ln>
-                <a:noFill/>
-              </a:ln>
-            </p:spPr>
-          </p:sp>
-          <p:sp>
-            <p:nvSpPr>
-              <p:cNvPr id="13" name="TextBox 13"/>
-              <p:cNvSpPr txBox="1"/>
-              <p:nvPr/>
-            </p:nvSpPr>
-            <p:spPr>
-              <a:xfrm>
-                <a:off x="4450461" y="1284446"/>
-                <a:ext cx="820381" cy="278702"/>
-              </a:xfrm>
-              <a:prstGeom prst="rect">
-                <a:avLst/>
-              </a:prstGeom>
-              <a:noFill/>
-              <a:ln>
-                <a:noFill/>
-              </a:ln>
-            </p:spPr>
-            <p:txBody>
-              <a:bodyPr wrap="none" lIns="0" tIns="0" rIns="0" bIns="0" anchor="t" anchorCtr="0">
-                <a:spAutoFit/>
-              </a:bodyPr>
-              <a:lstStyle/>
-              <a:p>
-                <a:pPr algn="l"/>
-                <a:r>
-                  <a:rPr lang="en-US" sz="1420" b="1" dirty="0">
-                    <a:solidFill>
-                      <a:schemeClr val="accent1"/>
-                    </a:solidFill>
-                    <a:latin typeface="+mn-lt"/>
-                    <a:ea typeface="+mn-ea"/>
-                    <a:cs typeface="+mn-cs"/>
-                  </a:rPr>
-                  <a:t>KẾT QUẢ</a:t>
-                </a:r>
-              </a:p>
-            </p:txBody>
-          </p:sp>
-          <p:sp>
-            <p:nvSpPr>
-              <p:cNvPr id="14" name="TextBox 14"/>
-              <p:cNvSpPr txBox="1"/>
-              <p:nvPr/>
-            </p:nvSpPr>
-            <p:spPr>
-              <a:xfrm>
-                <a:off x="4450842" y="1664018"/>
-                <a:ext cx="2009994" cy="264033"/>
-              </a:xfrm>
-              <a:prstGeom prst="rect">
-                <a:avLst/>
-              </a:prstGeom>
-              <a:noFill/>
-              <a:ln>
-                <a:noFill/>
-              </a:ln>
-            </p:spPr>
-            <p:txBody>
-              <a:bodyPr wrap="none" lIns="0" tIns="0" rIns="0" bIns="0" anchor="t" anchorCtr="0">
-                <a:spAutoFit/>
-              </a:bodyPr>
-              <a:lstStyle/>
-              <a:p>
-                <a:pPr algn="l"/>
-                <a:r>
-                  <a:rPr lang="en-US" sz="1350" dirty="0">
-                    <a:solidFill>
-                      <a:schemeClr val="dk1"/>
-                    </a:solidFill>
-                    <a:latin typeface="+mn-lt"/>
-                    <a:ea typeface="+mn-ea"/>
-                    <a:cs typeface="+mn-cs"/>
-                  </a:rPr>
-                  <a:t>Lỗi đo sai đã được xử lý</a:t>
-                </a:r>
-              </a:p>
-            </p:txBody>
-          </p:sp>
-          <p:sp>
-            <p:nvSpPr>
-              <p:cNvPr id="15" name="TextBox 15"/>
-              <p:cNvSpPr txBox="1"/>
-              <p:nvPr/>
-            </p:nvSpPr>
-            <p:spPr>
-              <a:xfrm>
-                <a:off x="4450842" y="1959292"/>
-                <a:ext cx="1029493" cy="264033"/>
-              </a:xfrm>
-              <a:prstGeom prst="rect">
-                <a:avLst/>
-              </a:prstGeom>
-              <a:noFill/>
-              <a:ln>
-                <a:noFill/>
-              </a:ln>
-            </p:spPr>
-            <p:txBody>
-              <a:bodyPr wrap="none" lIns="0" tIns="0" rIns="0" bIns="0" anchor="t" anchorCtr="0">
-                <a:spAutoFit/>
-              </a:bodyPr>
-              <a:lstStyle/>
-              <a:p>
-                <a:pPr algn="l"/>
-                <a:r>
-                  <a:rPr lang="en-US" sz="1350" dirty="0">
-                    <a:solidFill>
-                      <a:schemeClr val="dk1"/>
-                    </a:solidFill>
-                    <a:latin typeface="+mn-lt"/>
-                    <a:ea typeface="+mn-ea"/>
-                    <a:cs typeface="+mn-cs"/>
-                  </a:rPr>
-                  <a:t>1 task Done</a:t>
-                </a:r>
-              </a:p>
-            </p:txBody>
-          </p:sp>
-          <p:sp>
-            <p:nvSpPr>
-              <p:cNvPr id="16" name="TextBox 16"/>
-              <p:cNvSpPr txBox="1"/>
-              <p:nvPr/>
-            </p:nvSpPr>
-            <p:spPr>
-              <a:xfrm>
-                <a:off x="4450842" y="2254568"/>
-                <a:ext cx="3091510" cy="264033"/>
-              </a:xfrm>
-              <a:prstGeom prst="rect">
-                <a:avLst/>
-              </a:prstGeom>
-              <a:noFill/>
-              <a:ln>
-                <a:noFill/>
-              </a:ln>
-            </p:spPr>
-            <p:txBody>
-              <a:bodyPr wrap="none" lIns="0" tIns="0" rIns="0" bIns="0" anchor="t" anchorCtr="0">
-                <a:spAutoFit/>
-              </a:bodyPr>
-              <a:lstStyle/>
-              <a:p>
-                <a:pPr algn="l"/>
-                <a:r>
-                  <a:rPr lang="en-US" sz="1350" dirty="0">
-                    <a:solidFill>
-                      <a:schemeClr val="dk1"/>
-                    </a:solidFill>
-                    <a:latin typeface="+mn-lt"/>
-                    <a:ea typeface="+mn-ea"/>
-                    <a:cs typeface="+mn-cs"/>
-                  </a:rPr>
-                  <a:t>1 task Ongoing cần đóng trạng thái</a:t>
-                </a:r>
-              </a:p>
-            </p:txBody>
-          </p:sp>
-        </p:grpSp>
-        <p:grpSp>
-          <p:nvGrpSpPr>
-            <p:cNvPr id="23" name="Group 23"/>
-            <p:cNvGrpSpPr/>
-            <p:nvPr/>
-          </p:nvGrpSpPr>
-          <p:grpSpPr>
-            <a:xfrm>
-              <a:off x="7886700" y="1066800"/>
-              <a:ext cx="3771900" cy="2143125"/>
-              <a:chOff x="7886700" y="1066800"/>
-              <a:chExt cx="3771900" cy="2143125"/>
-            </a:xfrm>
-          </p:grpSpPr>
-          <p:sp>
-            <p:nvSpPr>
-              <p:cNvPr id="18" name="Rectangle 18"/>
-              <p:cNvSpPr/>
-              <p:nvPr/>
-            </p:nvSpPr>
-            <p:spPr>
-              <a:xfrm>
-                <a:off x="7886700" y="1066800"/>
-                <a:ext cx="3771900" cy="2143125"/>
-              </a:xfrm>
-              <a:prstGeom prst="roundRect">
-                <a:avLst>
-                  <a:gd name="adj" fmla="val 7111"/>
-                </a:avLst>
-              </a:prstGeom>
-              <a:solidFill>
-                <a:schemeClr val="lt2"/>
-              </a:solidFill>
-              <a:ln>
-                <a:noFill/>
-              </a:ln>
-            </p:spPr>
-          </p:sp>
-          <p:sp>
-            <p:nvSpPr>
-              <p:cNvPr id="19" name="TextBox 19"/>
-              <p:cNvSpPr txBox="1"/>
-              <p:nvPr/>
-            </p:nvSpPr>
-            <p:spPr>
-              <a:xfrm>
-                <a:off x="8127111" y="1284446"/>
-                <a:ext cx="777965" cy="278702"/>
-              </a:xfrm>
-              <a:prstGeom prst="rect">
-                <a:avLst/>
-              </a:prstGeom>
-              <a:noFill/>
-              <a:ln>
-                <a:noFill/>
-              </a:ln>
-            </p:spPr>
-            <p:txBody>
-              <a:bodyPr wrap="none" lIns="0" tIns="0" rIns="0" bIns="0" anchor="t" anchorCtr="0">
-                <a:spAutoFit/>
-              </a:bodyPr>
-              <a:lstStyle/>
-              <a:p>
-                <a:pPr algn="l"/>
-                <a:r>
-                  <a:rPr lang="en-US" sz="1420" b="1" dirty="0">
-                    <a:solidFill>
-                      <a:schemeClr val="accent1"/>
-                    </a:solidFill>
-                    <a:latin typeface="+mn-lt"/>
-                    <a:ea typeface="+mn-ea"/>
-                    <a:cs typeface="+mn-cs"/>
-                  </a:rPr>
-                  <a:t>KỸ NĂNG</a:t>
-                </a:r>
-              </a:p>
-            </p:txBody>
-          </p:sp>
-          <p:sp>
-            <p:nvSpPr>
-              <p:cNvPr id="20" name="TextBox 20"/>
-              <p:cNvSpPr txBox="1"/>
-              <p:nvPr/>
-            </p:nvSpPr>
-            <p:spPr>
-              <a:xfrm>
-                <a:off x="8127492" y="1664018"/>
-                <a:ext cx="1946186" cy="264033"/>
-              </a:xfrm>
-              <a:prstGeom prst="rect">
-                <a:avLst/>
-              </a:prstGeom>
-              <a:noFill/>
-              <a:ln>
-                <a:noFill/>
-              </a:ln>
-            </p:spPr>
-            <p:txBody>
-              <a:bodyPr wrap="none" lIns="0" tIns="0" rIns="0" bIns="0" anchor="t" anchorCtr="0">
-                <a:spAutoFit/>
-              </a:bodyPr>
-              <a:lstStyle/>
-              <a:p>
-                <a:pPr algn="l"/>
-                <a:r>
-                  <a:rPr lang="en-US" sz="1350" dirty="0">
-                    <a:solidFill>
-                      <a:schemeClr val="dk1"/>
-                    </a:solidFill>
-                    <a:latin typeface="+mn-lt"/>
-                    <a:ea typeface="+mn-ea"/>
-                    <a:cs typeface="+mn-cs"/>
-                  </a:rPr>
-                  <a:t>Đo lường và hiệu chuẩn</a:t>
-                </a:r>
-              </a:p>
-            </p:txBody>
-          </p:sp>
-          <p:sp>
-            <p:nvSpPr>
-              <p:cNvPr id="21" name="TextBox 21"/>
-              <p:cNvSpPr txBox="1"/>
-              <p:nvPr/>
-            </p:nvSpPr>
-            <p:spPr>
-              <a:xfrm>
-                <a:off x="8127492" y="1959292"/>
-                <a:ext cx="1952244" cy="264033"/>
-              </a:xfrm>
-              <a:prstGeom prst="rect">
-                <a:avLst/>
-              </a:prstGeom>
-              <a:noFill/>
-              <a:ln>
-                <a:noFill/>
-              </a:ln>
-            </p:spPr>
-            <p:txBody>
-              <a:bodyPr wrap="none" lIns="0" tIns="0" rIns="0" bIns="0" anchor="t" anchorCtr="0">
-                <a:spAutoFit/>
-              </a:bodyPr>
-              <a:lstStyle/>
-              <a:p>
-                <a:pPr algn="l"/>
-                <a:r>
-                  <a:rPr lang="en-US" sz="1350" dirty="0">
-                    <a:solidFill>
-                      <a:schemeClr val="dk1"/>
-                    </a:solidFill>
-                    <a:latin typeface="+mn-lt"/>
-                    <a:ea typeface="+mn-ea"/>
-                    <a:cs typeface="+mn-cs"/>
-                  </a:rPr>
-                  <a:t>Debug Jig tại thực địa</a:t>
-                </a:r>
-              </a:p>
-            </p:txBody>
-          </p:sp>
-          <p:sp>
-            <p:nvSpPr>
-              <p:cNvPr id="22" name="TextBox 22"/>
-              <p:cNvSpPr txBox="1"/>
-              <p:nvPr/>
-            </p:nvSpPr>
-            <p:spPr>
-              <a:xfrm>
-                <a:off x="8127492" y="2254568"/>
-                <a:ext cx="2209550" cy="264033"/>
-              </a:xfrm>
-              <a:prstGeom prst="rect">
-                <a:avLst/>
-              </a:prstGeom>
-              <a:noFill/>
-              <a:ln>
-                <a:noFill/>
-              </a:ln>
-            </p:spPr>
-            <p:txBody>
-              <a:bodyPr wrap="none" lIns="0" tIns="0" rIns="0" bIns="0" anchor="t" anchorCtr="0">
-                <a:spAutoFit/>
-              </a:bodyPr>
-              <a:lstStyle/>
-              <a:p>
-                <a:pPr algn="l"/>
-                <a:r>
-                  <a:rPr lang="en-US" sz="1350" dirty="0">
-                    <a:solidFill>
-                      <a:schemeClr val="dk1"/>
-                    </a:solidFill>
-                    <a:latin typeface="+mn-lt"/>
-                    <a:ea typeface="+mn-ea"/>
-                    <a:cs typeface="+mn-cs"/>
-                  </a:rPr>
-                  <a:t>Phân tích sai lệch dữ liệu</a:t>
-                </a:r>
-              </a:p>
-            </p:txBody>
-          </p:sp>
-        </p:grpSp>
-        <p:grpSp>
-          <p:nvGrpSpPr>
-            <p:cNvPr id="29" name="Group 29"/>
-            <p:cNvGrpSpPr/>
-            <p:nvPr/>
-          </p:nvGrpSpPr>
-          <p:grpSpPr>
-            <a:xfrm>
-              <a:off x="533400" y="3457575"/>
-              <a:ext cx="3429000" cy="2143125"/>
-              <a:chOff x="533400" y="3457575"/>
-              <a:chExt cx="3429000" cy="2143125"/>
-            </a:xfrm>
-          </p:grpSpPr>
-          <p:sp>
-            <p:nvSpPr>
-              <p:cNvPr id="24" name="Rectangle 24"/>
-              <p:cNvSpPr/>
-              <p:nvPr/>
-            </p:nvSpPr>
-            <p:spPr>
-              <a:xfrm>
-                <a:off x="533400" y="3457575"/>
-                <a:ext cx="3429000" cy="2143125"/>
-              </a:xfrm>
-              <a:prstGeom prst="roundRect">
-                <a:avLst>
-                  <a:gd name="adj" fmla="val 7111"/>
-                </a:avLst>
-              </a:prstGeom>
-              <a:solidFill>
-                <a:srgbClr val="EEF3FF"/>
-              </a:solidFill>
-              <a:ln>
-                <a:noFill/>
-              </a:ln>
-            </p:spPr>
-          </p:sp>
-          <p:sp>
-            <p:nvSpPr>
-              <p:cNvPr id="25" name="TextBox 25"/>
-              <p:cNvSpPr txBox="1"/>
-              <p:nvPr/>
-            </p:nvSpPr>
-            <p:spPr>
-              <a:xfrm>
-                <a:off x="773811" y="3675221"/>
-                <a:ext cx="661322" cy="278702"/>
-              </a:xfrm>
-              <a:prstGeom prst="rect">
-                <a:avLst/>
-              </a:prstGeom>
-              <a:noFill/>
-              <a:ln>
-                <a:noFill/>
-              </a:ln>
-            </p:spPr>
-            <p:txBody>
-              <a:bodyPr wrap="none" lIns="0" tIns="0" rIns="0" bIns="0" anchor="t" anchorCtr="0">
-                <a:spAutoFit/>
-              </a:bodyPr>
-              <a:lstStyle/>
-              <a:p>
-                <a:pPr algn="l"/>
-                <a:r>
-                  <a:rPr lang="en-US" sz="1420" b="1" dirty="0">
-                    <a:solidFill>
-                      <a:schemeClr val="accent2"/>
-                    </a:solidFill>
-                    <a:latin typeface="+mn-lt"/>
-                    <a:ea typeface="+mn-ea"/>
-                    <a:cs typeface="+mn-cs"/>
-                  </a:rPr>
-                  <a:t>TƯ DUY</a:t>
-                </a:r>
-              </a:p>
-            </p:txBody>
-          </p:sp>
-          <p:sp>
-            <p:nvSpPr>
-              <p:cNvPr id="26" name="TextBox 26"/>
-              <p:cNvSpPr txBox="1"/>
-              <p:nvPr/>
-            </p:nvSpPr>
-            <p:spPr>
-              <a:xfrm>
-                <a:off x="774192" y="4054792"/>
-                <a:ext cx="3109491" cy="264033"/>
-              </a:xfrm>
-              <a:prstGeom prst="rect">
-                <a:avLst/>
-              </a:prstGeom>
-              <a:noFill/>
-              <a:ln>
-                <a:noFill/>
-              </a:ln>
-            </p:spPr>
-            <p:txBody>
-              <a:bodyPr wrap="none" lIns="0" tIns="0" rIns="0" bIns="0" anchor="t" anchorCtr="0">
-                <a:spAutoFit/>
-              </a:bodyPr>
-              <a:lstStyle/>
-              <a:p>
-                <a:pPr algn="l"/>
-                <a:r>
-                  <a:rPr lang="en-US" sz="1350" dirty="0">
-                    <a:solidFill>
-                      <a:schemeClr val="dk1"/>
-                    </a:solidFill>
-                    <a:latin typeface="+mn-lt"/>
-                    <a:ea typeface="+mn-ea"/>
-                    <a:cs typeface="+mn-cs"/>
-                  </a:rPr>
-                  <a:t>Dựa trên dữ liệu thay vì phỏng đoán</a:t>
-                </a:r>
-              </a:p>
-            </p:txBody>
-          </p:sp>
-          <p:sp>
-            <p:nvSpPr>
-              <p:cNvPr id="27" name="TextBox 27"/>
-              <p:cNvSpPr txBox="1"/>
-              <p:nvPr/>
-            </p:nvSpPr>
-            <p:spPr>
-              <a:xfrm>
-                <a:off x="774192" y="4350068"/>
-                <a:ext cx="2291858" cy="264033"/>
-              </a:xfrm>
-              <a:prstGeom prst="rect">
-                <a:avLst/>
-              </a:prstGeom>
-              <a:noFill/>
-              <a:ln>
-                <a:noFill/>
-              </a:ln>
-            </p:spPr>
-            <p:txBody>
-              <a:bodyPr wrap="none" lIns="0" tIns="0" rIns="0" bIns="0" anchor="t" anchorCtr="0">
-                <a:spAutoFit/>
-              </a:bodyPr>
-              <a:lstStyle/>
-              <a:p>
-                <a:pPr algn="l"/>
-                <a:r>
-                  <a:rPr lang="en-US" sz="1350" dirty="0">
-                    <a:solidFill>
-                      <a:schemeClr val="dk1"/>
-                    </a:solidFill>
-                    <a:latin typeface="+mn-lt"/>
-                    <a:ea typeface="+mn-ea"/>
-                    <a:cs typeface="+mn-cs"/>
-                  </a:rPr>
-                  <a:t>So sánh chuẩn–đo–sai lệch</a:t>
-                </a:r>
-              </a:p>
-            </p:txBody>
-          </p:sp>
-          <p:sp>
-            <p:nvSpPr>
-              <p:cNvPr id="28" name="TextBox 28"/>
-              <p:cNvSpPr txBox="1"/>
-              <p:nvPr/>
-            </p:nvSpPr>
-            <p:spPr>
-              <a:xfrm>
-                <a:off x="774192" y="4645342"/>
-                <a:ext cx="2536968" cy="264033"/>
-              </a:xfrm>
-              <a:prstGeom prst="rect">
-                <a:avLst/>
-              </a:prstGeom>
-              <a:noFill/>
-              <a:ln>
-                <a:noFill/>
-              </a:ln>
-            </p:spPr>
-            <p:txBody>
-              <a:bodyPr wrap="none" lIns="0" tIns="0" rIns="0" bIns="0" anchor="t" anchorCtr="0">
-                <a:spAutoFit/>
-              </a:bodyPr>
-              <a:lstStyle/>
-              <a:p>
-                <a:pPr algn="l"/>
-                <a:r>
-                  <a:rPr lang="en-US" sz="1350" dirty="0">
-                    <a:solidFill>
-                      <a:schemeClr val="dk1"/>
-                    </a:solidFill>
-                    <a:latin typeface="+mn-lt"/>
-                    <a:ea typeface="+mn-ea"/>
-                    <a:cs typeface="+mn-cs"/>
-                  </a:rPr>
-                  <a:t>Xác nhận tại môi trường thật</a:t>
-                </a:r>
-              </a:p>
-            </p:txBody>
-          </p:sp>
-        </p:grpSp>
-        <p:grpSp>
-          <p:nvGrpSpPr>
-            <p:cNvPr id="35" name="Group 35"/>
-            <p:cNvGrpSpPr/>
-            <p:nvPr/>
-          </p:nvGrpSpPr>
-          <p:grpSpPr>
-            <a:xfrm>
-              <a:off x="4210050" y="3457575"/>
-              <a:ext cx="3429000" cy="2143125"/>
-              <a:chOff x="4210050" y="3457575"/>
-              <a:chExt cx="3429000" cy="2143125"/>
-            </a:xfrm>
-          </p:grpSpPr>
-          <p:sp>
-            <p:nvSpPr>
-              <p:cNvPr id="30" name="Rectangle 30"/>
-              <p:cNvSpPr/>
-              <p:nvPr/>
-            </p:nvSpPr>
-            <p:spPr>
-              <a:xfrm>
-                <a:off x="4210050" y="3457575"/>
-                <a:ext cx="3429000" cy="2143125"/>
-              </a:xfrm>
-              <a:prstGeom prst="roundRect">
-                <a:avLst>
-                  <a:gd name="adj" fmla="val 7111"/>
-                </a:avLst>
-              </a:prstGeom>
-              <a:solidFill>
-                <a:srgbClr val="FFF7E8"/>
-              </a:solidFill>
-              <a:ln>
-                <a:noFill/>
-              </a:ln>
-            </p:spPr>
-          </p:sp>
-          <p:sp>
-            <p:nvSpPr>
-              <p:cNvPr id="31" name="TextBox 31"/>
-              <p:cNvSpPr txBox="1"/>
-              <p:nvPr/>
-            </p:nvSpPr>
-            <p:spPr>
-              <a:xfrm>
-                <a:off x="4450461" y="3675221"/>
-                <a:ext cx="1848969" cy="278702"/>
-              </a:xfrm>
-              <a:prstGeom prst="rect">
-                <a:avLst/>
-              </a:prstGeom>
-              <a:noFill/>
-              <a:ln>
-                <a:noFill/>
-              </a:ln>
-            </p:spPr>
-            <p:txBody>
-              <a:bodyPr wrap="none" lIns="0" tIns="0" rIns="0" bIns="0" anchor="t" anchorCtr="0">
-                <a:spAutoFit/>
-              </a:bodyPr>
-              <a:lstStyle/>
-              <a:p>
-                <a:pPr algn="l"/>
-                <a:r>
-                  <a:rPr lang="en-US" sz="1420" b="1" dirty="0">
-                    <a:solidFill>
-                      <a:srgbClr val="B56A00"/>
-                    </a:solidFill>
-                    <a:latin typeface="+mn-lt"/>
-                    <a:ea typeface="+mn-ea"/>
-                    <a:cs typeface="+mn-cs"/>
-                  </a:rPr>
-                  <a:t>BÀI HỌC &amp; KHÓ KHĂN</a:t>
-                </a:r>
-              </a:p>
-            </p:txBody>
-          </p:sp>
-          <p:sp>
-            <p:nvSpPr>
-              <p:cNvPr id="32" name="TextBox 32"/>
-              <p:cNvSpPr txBox="1"/>
-              <p:nvPr/>
-            </p:nvSpPr>
-            <p:spPr>
-              <a:xfrm>
-                <a:off x="4450842" y="4054792"/>
-                <a:ext cx="3018438" cy="264033"/>
-              </a:xfrm>
-              <a:prstGeom prst="rect">
-                <a:avLst/>
-              </a:prstGeom>
-              <a:noFill/>
-              <a:ln>
-                <a:noFill/>
-              </a:ln>
-            </p:spPr>
-            <p:txBody>
-              <a:bodyPr wrap="none" lIns="0" tIns="0" rIns="0" bIns="0" anchor="t" anchorCtr="0">
-                <a:spAutoFit/>
-              </a:bodyPr>
-              <a:lstStyle/>
-              <a:p>
-                <a:pPr algn="l"/>
-                <a:r>
-                  <a:rPr lang="en-US" sz="1350" dirty="0">
-                    <a:solidFill>
-                      <a:schemeClr val="dk1"/>
-                    </a:solidFill>
-                    <a:latin typeface="+mn-lt"/>
-                    <a:ea typeface="+mn-ea"/>
-                    <a:cs typeface="+mn-cs"/>
-                  </a:rPr>
-                  <a:t>Lỗi thực địa khó tái hiện trong lab</a:t>
-                </a:r>
-              </a:p>
-            </p:txBody>
-          </p:sp>
-          <p:sp>
-            <p:nvSpPr>
-              <p:cNvPr id="33" name="TextBox 33"/>
-              <p:cNvSpPr txBox="1"/>
-              <p:nvPr/>
-            </p:nvSpPr>
-            <p:spPr>
-              <a:xfrm>
-                <a:off x="4450842" y="4350068"/>
-                <a:ext cx="3145694" cy="264033"/>
-              </a:xfrm>
-              <a:prstGeom prst="rect">
-                <a:avLst/>
-              </a:prstGeom>
-              <a:noFill/>
-              <a:ln>
-                <a:noFill/>
-              </a:ln>
-            </p:spPr>
-            <p:txBody>
-              <a:bodyPr wrap="none" lIns="0" tIns="0" rIns="0" bIns="0" anchor="t" anchorCtr="0">
-                <a:spAutoFit/>
-              </a:bodyPr>
-              <a:lstStyle/>
-              <a:p>
-                <a:pPr algn="l"/>
-                <a:r>
-                  <a:rPr lang="en-US" sz="1350" dirty="0">
-                    <a:solidFill>
-                      <a:schemeClr val="dk1"/>
-                    </a:solidFill>
-                    <a:latin typeface="+mn-lt"/>
-                    <a:ea typeface="+mn-ea"/>
-                    <a:cs typeface="+mn-cs"/>
-                  </a:rPr>
-                  <a:t>Hiệu chuẩn phải có chuẩn tham chiếu</a:t>
-                </a:r>
-              </a:p>
-            </p:txBody>
-          </p:sp>
-          <p:sp>
-            <p:nvSpPr>
-              <p:cNvPr id="34" name="TextBox 34"/>
-              <p:cNvSpPr txBox="1"/>
-              <p:nvPr/>
-            </p:nvSpPr>
-            <p:spPr>
-              <a:xfrm>
-                <a:off x="4450842" y="4645342"/>
-                <a:ext cx="2700659" cy="264033"/>
-              </a:xfrm>
-              <a:prstGeom prst="rect">
-                <a:avLst/>
-              </a:prstGeom>
-              <a:noFill/>
-              <a:ln>
-                <a:noFill/>
-              </a:ln>
-            </p:spPr>
-            <p:txBody>
-              <a:bodyPr wrap="none" lIns="0" tIns="0" rIns="0" bIns="0" anchor="t" anchorCtr="0">
-                <a:spAutoFit/>
-              </a:bodyPr>
-              <a:lstStyle/>
-              <a:p>
-                <a:pPr algn="l"/>
-                <a:r>
-                  <a:rPr lang="en-US" sz="1350" dirty="0">
-                    <a:solidFill>
-                      <a:schemeClr val="dk1"/>
-                    </a:solidFill>
-                    <a:latin typeface="+mn-lt"/>
-                    <a:ea typeface="+mn-ea"/>
-                    <a:cs typeface="+mn-cs"/>
-                  </a:rPr>
-                  <a:t>Cần đóng trạng thái sau hỗ trợ</a:t>
-                </a:r>
-              </a:p>
-            </p:txBody>
-          </p:sp>
-        </p:grpSp>
-        <p:grpSp>
-          <p:nvGrpSpPr>
-            <p:cNvPr id="41" name="Group 41"/>
-            <p:cNvGrpSpPr/>
-            <p:nvPr/>
-          </p:nvGrpSpPr>
-          <p:grpSpPr>
-            <a:xfrm>
-              <a:off x="7886700" y="3457575"/>
-              <a:ext cx="3771900" cy="2143125"/>
-              <a:chOff x="7886700" y="3457575"/>
-              <a:chExt cx="3771900" cy="2143125"/>
-            </a:xfrm>
-          </p:grpSpPr>
-          <p:sp>
-            <p:nvSpPr>
-              <p:cNvPr id="36" name="Rectangle 36"/>
-              <p:cNvSpPr/>
-              <p:nvPr/>
-            </p:nvSpPr>
-            <p:spPr>
-              <a:xfrm>
-                <a:off x="7886700" y="3457575"/>
-                <a:ext cx="3771900" cy="2143125"/>
-              </a:xfrm>
-              <a:prstGeom prst="roundRect">
-                <a:avLst>
-                  <a:gd name="adj" fmla="val 7111"/>
-                </a:avLst>
-              </a:prstGeom>
-              <a:solidFill>
-                <a:schemeClr val="accent1"/>
-              </a:solidFill>
-              <a:ln>
-                <a:noFill/>
-              </a:ln>
-            </p:spPr>
-          </p:sp>
-          <p:sp>
-            <p:nvSpPr>
-              <p:cNvPr id="37" name="TextBox 37"/>
-              <p:cNvSpPr txBox="1"/>
-              <p:nvPr/>
-            </p:nvSpPr>
-            <p:spPr>
-              <a:xfrm>
-                <a:off x="8127111" y="3675221"/>
-                <a:ext cx="1901989" cy="278702"/>
-              </a:xfrm>
-              <a:prstGeom prst="rect">
-                <a:avLst/>
-              </a:prstGeom>
-              <a:noFill/>
-              <a:ln>
-                <a:noFill/>
-              </a:ln>
-            </p:spPr>
-            <p:txBody>
-              <a:bodyPr wrap="none" lIns="0" tIns="0" rIns="0" bIns="0" anchor="t" anchorCtr="0">
-                <a:spAutoFit/>
-              </a:bodyPr>
-              <a:lstStyle/>
-              <a:p>
-                <a:pPr algn="l"/>
-                <a:r>
-                  <a:rPr lang="en-US" sz="1420" b="1" dirty="0">
-                    <a:solidFill>
-                      <a:srgbClr val="FFFFFF"/>
-                    </a:solidFill>
-                    <a:latin typeface="+mn-lt"/>
-                    <a:ea typeface="+mn-ea"/>
-                    <a:cs typeface="+mn-cs"/>
-                  </a:rPr>
-                  <a:t>THÀNH TÍCH NỔI BẬT</a:t>
-                </a:r>
-              </a:p>
-            </p:txBody>
-          </p:sp>
-          <p:sp>
-            <p:nvSpPr>
-              <p:cNvPr id="38" name="TextBox 38"/>
-              <p:cNvSpPr txBox="1"/>
-              <p:nvPr/>
-            </p:nvSpPr>
-            <p:spPr>
-              <a:xfrm>
-                <a:off x="8125206" y="4168140"/>
-                <a:ext cx="1738823" cy="352044"/>
-              </a:xfrm>
-              <a:prstGeom prst="rect">
-                <a:avLst/>
-              </a:prstGeom>
-              <a:noFill/>
-              <a:ln>
-                <a:noFill/>
-              </a:ln>
-            </p:spPr>
-            <p:txBody>
-              <a:bodyPr wrap="none" lIns="0" tIns="0" rIns="0" bIns="0" anchor="t" anchorCtr="0">
-                <a:spAutoFit/>
-              </a:bodyPr>
-              <a:lstStyle/>
-              <a:p>
-                <a:pPr algn="l"/>
-                <a:r>
-                  <a:rPr lang="en-US" sz="1800" b="1" dirty="0">
-                    <a:solidFill>
-                      <a:srgbClr val="FFFFFF"/>
-                    </a:solidFill>
-                    <a:latin typeface="+mn-lt"/>
-                    <a:ea typeface="+mn-ea"/>
-                    <a:cs typeface="+mn-cs"/>
-                  </a:rPr>
-                  <a:t>FIX LỖI ĐO SAI</a:t>
-                </a:r>
-              </a:p>
-            </p:txBody>
-          </p:sp>
-          <p:sp>
-            <p:nvSpPr>
-              <p:cNvPr id="39" name="TextBox 39"/>
-              <p:cNvSpPr txBox="1"/>
-              <p:nvPr/>
-            </p:nvSpPr>
-            <p:spPr>
-              <a:xfrm>
-                <a:off x="8127492" y="4559618"/>
-                <a:ext cx="2107157" cy="264033"/>
-              </a:xfrm>
-              <a:prstGeom prst="rect">
-                <a:avLst/>
-              </a:prstGeom>
-              <a:noFill/>
-              <a:ln>
-                <a:noFill/>
-              </a:ln>
-            </p:spPr>
-            <p:txBody>
-              <a:bodyPr wrap="none" lIns="0" tIns="0" rIns="0" bIns="0" anchor="t" anchorCtr="0">
-                <a:spAutoFit/>
-              </a:bodyPr>
-              <a:lstStyle/>
-              <a:p>
-                <a:pPr algn="l"/>
-                <a:r>
-                  <a:rPr lang="en-US" sz="1350" dirty="0">
-                    <a:solidFill>
-                      <a:srgbClr val="FFFFFF"/>
-                    </a:solidFill>
-                    <a:latin typeface="+mn-lt"/>
-                    <a:ea typeface="+mn-ea"/>
-                    <a:cs typeface="+mn-cs"/>
-                  </a:rPr>
-                  <a:t>Năng lượng trên Jig MSB</a:t>
-                </a:r>
-              </a:p>
-            </p:txBody>
-          </p:sp>
-          <p:pic>
-            <p:nvPicPr>
-              <p:cNvPr id="40" name="Image 40"/>
-              <p:cNvPicPr>
-                <a:picLocks noChangeAspect="1"/>
-              </p:cNvPicPr>
-              <p:nvPr/>
-            </p:nvPicPr>
-            <p:blipFill>
-              <a:blip r:embed="rId3"/>
-              <a:srcRect l="23047" t="0" r="23047" b="0"/>
-              <a:stretch>
-                <a:fillRect/>
-              </a:stretch>
-            </p:blipFill>
-            <p:spPr>
-              <a:xfrm>
-                <a:off x="10287000" y="4171950"/>
-                <a:ext cx="1095375" cy="1143000"/>
-              </a:xfrm>
-              <a:prstGeom prst="rect">
-                <a:avLst/>
-              </a:prstGeom>
-            </p:spPr>
-          </p:pic>
-        </p:grpSp>
-      </p:grpSp>
-      <p:sp>
-        <p:nvSpPr>
-          <p:cNvPr id="43" name="TextBox 43"/>
-          <p:cNvSpPr txBox="1"/>
-          <p:nvPr/>
-        </p:nvSpPr>
-        <p:spPr>
-          <a:xfrm>
-            <a:off x="11141640" y="6630352"/>
-            <a:ext cx="484194" cy="205359"/>
-          </a:xfrm>
-          <a:prstGeom prst="rect">
-            <a:avLst/>
-          </a:prstGeom>
-          <a:noFill/>
-          <a:ln>
-            <a:noFill/>
-          </a:ln>
-        </p:spPr>
-        <p:txBody>
-          <a:bodyPr wrap="none" lIns="0" tIns="0" rIns="0" bIns="0" anchor="t" anchorCtr="0">
-            <a:spAutoFit/>
-          </a:bodyPr>
-          <a:lstStyle/>
-          <a:p>
-            <a:pPr algn="r"/>
-            <a:r>
-              <a:rPr lang="en-US" sz="1050" dirty="0">
-                <a:solidFill>
-                  <a:srgbClr val="66706A"/>
-                </a:solidFill>
-                <a:latin typeface="+mn-lt"/>
-                <a:ea typeface="+mn-ea"/>
-                <a:cs typeface="+mn-cs"/>
-              </a:rPr>
-              <a:t>17 / 23</a:t>
-            </a:r>
-          </a:p>
-        </p:txBody>
-      </p:sp>
-    </p:spTree>
-  </p:cSld>
-  <p:clrMapOvr>
-    <a:masterClrMapping/>
-  </p:clrMapOvr>
-  <p:transition xmlns:p14="http://schemas.microsoft.com/office/powerpoint/2010/main" p14:dur="400">
-    <p:fade/>
-  </p:transition>
-</p:sld>
-</file>
-
-<file path=ppt/slides/slide18.xml><?xml version="1.0" encoding="utf-8"?>
-<p:sld xmlns:a="http://schemas.openxmlformats.org/drawingml/2006/main" xmlns:r="http://schemas.openxmlformats.org/officeDocument/2006/relationships" xmlns:p="http://schemas.openxmlformats.org/presentationml/2006/main">
-  <p:cSld>
-    <p:bg>
-      <p:bgPr>
-        <a:solidFill>
-          <a:schemeClr val="lt1"/>
-        </a:solidFill>
-        <a:effectLst/>
-      </p:bgPr>
-    </p:bg>
-    <p:spTree>
-      <p:nvGrpSpPr>
-        <p:cNvPr id="1" name=""/>
-        <p:cNvGrpSpPr/>
-        <p:nvPr/>
-      </p:nvGrpSpPr>
-      <p:grpSpPr>
-        <a:xfrm>
-          <a:off x="0" y="0"/>
-          <a:ext cx="0" cy="0"/>
-          <a:chOff x="0" y="0"/>
-          <a:chExt cx="0" cy="0"/>
-        </a:xfrm>
-      </p:grpSpPr>
-      <p:pic>
-        <p:nvPicPr>
-          <p:cNvPr id="2" name="Image 2"/>
-          <p:cNvPicPr>
-            <a:picLocks noChangeAspect="1"/>
-          </p:cNvPicPr>
-          <p:nvPr/>
-        </p:nvPicPr>
-        <p:blipFill>
-          <a:blip r:embed="rId2"/>
+          <a:blip r:embed="rId3"/>
           <a:stretch>
             <a:fillRect/>
           </a:stretch>
@@ -11634,6 +10574,13 @@
               <a:noFill/>
             </a:ln>
           </p:spPr>
+          <p:txBody>
+            <a:bodyPr/>
+            <a:lstStyle/>
+            <a:p>
+              <a:endParaRPr lang="en-US"/>
+            </a:p>
+          </p:txBody>
         </p:sp>
         <p:sp>
           <p:nvSpPr>
@@ -11713,6 +10660,13 @@
               <a:noFill/>
             </a:ln>
           </p:spPr>
+          <p:txBody>
+            <a:bodyPr/>
+            <a:lstStyle/>
+            <a:p>
+              <a:endParaRPr lang="en-US"/>
+            </a:p>
+          </p:txBody>
         </p:sp>
         <p:sp>
           <p:nvSpPr>
@@ -11914,7 +10868,7 @@
             </a:bodyPr>
             <a:lstStyle/>
             <a:p>
-              <a:pPr algn="l" marL="153289" indent="-153289">
+              <a:pPr marL="153289" indent="-153289" algn="l">
                 <a:buClr>
                   <a:schemeClr val="dk1"/>
                 </a:buClr>
@@ -11961,7 +10915,7 @@
             </a:bodyPr>
             <a:lstStyle/>
             <a:p>
-              <a:pPr algn="l" marL="153289" indent="-153289">
+              <a:pPr marL="153289" indent="-153289" algn="l">
                 <a:buClr>
                   <a:schemeClr val="dk1"/>
                 </a:buClr>
@@ -12008,7 +10962,7 @@
             </a:bodyPr>
             <a:lstStyle/>
             <a:p>
-              <a:pPr algn="l" marL="153289" indent="-153289">
+              <a:pPr marL="153289" indent="-153289" algn="l">
                 <a:buClr>
                   <a:schemeClr val="dk1"/>
                 </a:buClr>
@@ -12065,6 +11019,13 @@
               </a:solidFill>
             </a:ln>
           </p:spPr>
+          <p:txBody>
+            <a:bodyPr/>
+            <a:lstStyle/>
+            <a:p>
+              <a:endParaRPr lang="en-US"/>
+            </a:p>
+          </p:txBody>
         </p:sp>
       </p:grpSp>
       <p:grpSp>
@@ -12146,7 +11107,7 @@
             </a:bodyPr>
             <a:lstStyle/>
             <a:p>
-              <a:pPr algn="l" marL="153289" indent="-153289">
+              <a:pPr marL="153289" indent="-153289" algn="l">
                 <a:buClr>
                   <a:schemeClr val="dk1"/>
                 </a:buClr>
@@ -12193,7 +11154,7 @@
             </a:bodyPr>
             <a:lstStyle/>
             <a:p>
-              <a:pPr algn="l" marL="153289" indent="-153289">
+              <a:pPr marL="153289" indent="-153289" algn="l">
                 <a:buClr>
                   <a:schemeClr val="dk1"/>
                 </a:buClr>
@@ -12240,7 +11201,7 @@
             </a:bodyPr>
             <a:lstStyle/>
             <a:p>
-              <a:pPr algn="l" marL="153289" indent="-153289">
+              <a:pPr marL="153289" indent="-153289" algn="l">
                 <a:buClr>
                   <a:schemeClr val="dk1"/>
                 </a:buClr>
@@ -12297,6 +11258,13 @@
               </a:solidFill>
             </a:ln>
           </p:spPr>
+          <p:txBody>
+            <a:bodyPr/>
+            <a:lstStyle/>
+            <a:p>
+              <a:endParaRPr lang="en-US"/>
+            </a:p>
+          </p:txBody>
         </p:sp>
       </p:grpSp>
       <p:grpSp>
@@ -12336,6 +11304,13 @@
               <a:noFill/>
             </a:ln>
           </p:spPr>
+          <p:txBody>
+            <a:bodyPr/>
+            <a:lstStyle/>
+            <a:p>
+              <a:endParaRPr lang="en-US"/>
+            </a:p>
+          </p:txBody>
         </p:sp>
         <p:sp>
           <p:nvSpPr>
@@ -12452,6 +11427,13 @@
               </a:solidFill>
             </a:ln>
           </p:spPr>
+          <p:txBody>
+            <a:bodyPr/>
+            <a:lstStyle/>
+            <a:p>
+              <a:endParaRPr lang="en-US"/>
+            </a:p>
+          </p:txBody>
         </p:sp>
         <p:sp>
           <p:nvSpPr>
@@ -12528,6 +11510,13 @@
               </a:solidFill>
             </a:ln>
           </p:spPr>
+          <p:txBody>
+            <a:bodyPr/>
+            <a:lstStyle/>
+            <a:p>
+              <a:endParaRPr lang="en-US"/>
+            </a:p>
+          </p:txBody>
         </p:sp>
         <p:sp>
           <p:nvSpPr>
@@ -12592,6 +11581,13 @@
               <a:noFill/>
             </a:ln>
           </p:spPr>
+          <p:txBody>
+            <a:bodyPr/>
+            <a:lstStyle/>
+            <a:p>
+              <a:endParaRPr lang="en-US"/>
+            </a:p>
+          </p:txBody>
         </p:sp>
         <p:sp>
           <p:nvSpPr>
@@ -12814,13 +11810,22 @@
   <p:clrMapOvr>
     <a:masterClrMapping/>
   </p:clrMapOvr>
-  <p:transition xmlns:p14="http://schemas.microsoft.com/office/powerpoint/2010/main" p14:dur="400">
-    <p:fade/>
-  </p:transition>
+  <mc:AlternateContent xmlns:mc="http://schemas.openxmlformats.org/markup-compatibility/2006">
+    <mc:Choice xmlns:p14="http://schemas.microsoft.com/office/powerpoint/2010/main" Requires="p14">
+      <p:transition p14:dur="400">
+        <p:fade/>
+      </p:transition>
+    </mc:Choice>
+    <mc:Fallback>
+      <p:transition>
+        <p:fade/>
+      </p:transition>
+    </mc:Fallback>
+  </mc:AlternateContent>
 </p:sld>
 </file>
 
-<file path=ppt/slides/slide19.xml><?xml version="1.0" encoding="utf-8"?>
+<file path=ppt/slides/slide18.xml><?xml version="1.0" encoding="utf-8"?>
 <p:sld xmlns:a="http://schemas.openxmlformats.org/drawingml/2006/main" xmlns:r="http://schemas.openxmlformats.org/officeDocument/2006/relationships" xmlns:p="http://schemas.openxmlformats.org/presentationml/2006/main">
   <p:cSld>
     <p:bg>
@@ -12854,7 +11859,7 @@
           <p:nvPr/>
         </p:nvPicPr>
         <p:blipFill>
-          <a:blip r:embed="rId2"/>
+          <a:blip r:embed="rId3"/>
           <a:stretch>
             <a:fillRect/>
           </a:stretch>
@@ -12960,6 +11965,13 @@
                 <a:noFill/>
               </a:ln>
             </p:spPr>
+            <p:txBody>
+              <a:bodyPr/>
+              <a:lstStyle/>
+              <a:p>
+                <a:endParaRPr lang="en-US"/>
+              </a:p>
+            </p:txBody>
           </p:sp>
           <p:sp>
             <p:nvSpPr>
@@ -12982,6 +11994,13 @@
                 <a:noFill/>
               </a:ln>
             </p:spPr>
+            <p:txBody>
+              <a:bodyPr/>
+              <a:lstStyle/>
+              <a:p>
+                <a:endParaRPr lang="en-US"/>
+              </a:p>
+            </p:txBody>
           </p:sp>
           <p:sp>
             <p:nvSpPr>
@@ -13261,6 +12280,13 @@
                 <a:noFill/>
               </a:ln>
             </p:spPr>
+            <p:txBody>
+              <a:bodyPr/>
+              <a:lstStyle/>
+              <a:p>
+                <a:endParaRPr lang="en-US"/>
+              </a:p>
+            </p:txBody>
           </p:sp>
           <p:sp>
             <p:nvSpPr>
@@ -13283,6 +12309,13 @@
                 <a:noFill/>
               </a:ln>
             </p:spPr>
+            <p:txBody>
+              <a:bodyPr/>
+              <a:lstStyle/>
+              <a:p>
+                <a:endParaRPr lang="en-US"/>
+              </a:p>
+            </p:txBody>
           </p:sp>
           <p:sp>
             <p:nvSpPr>
@@ -13562,6 +12595,13 @@
                 <a:noFill/>
               </a:ln>
             </p:spPr>
+            <p:txBody>
+              <a:bodyPr/>
+              <a:lstStyle/>
+              <a:p>
+                <a:endParaRPr lang="en-US"/>
+              </a:p>
+            </p:txBody>
           </p:sp>
           <p:sp>
             <p:nvSpPr>
@@ -13584,6 +12624,13 @@
                 <a:noFill/>
               </a:ln>
             </p:spPr>
+            <p:txBody>
+              <a:bodyPr/>
+              <a:lstStyle/>
+              <a:p>
+                <a:endParaRPr lang="en-US"/>
+              </a:p>
+            </p:txBody>
           </p:sp>
           <p:sp>
             <p:nvSpPr>
@@ -13864,6 +12911,13 @@
               <a:noFill/>
             </a:ln>
           </p:spPr>
+          <p:txBody>
+            <a:bodyPr/>
+            <a:lstStyle/>
+            <a:p>
+              <a:endParaRPr lang="en-US"/>
+            </a:p>
+          </p:txBody>
         </p:sp>
         <p:sp>
           <p:nvSpPr>
@@ -13991,13 +13045,22 @@
   <p:clrMapOvr>
     <a:masterClrMapping/>
   </p:clrMapOvr>
-  <p:transition xmlns:p14="http://schemas.microsoft.com/office/powerpoint/2010/main" p14:dur="400">
-    <p:fade/>
-  </p:transition>
+  <mc:AlternateContent xmlns:mc="http://schemas.openxmlformats.org/markup-compatibility/2006">
+    <mc:Choice xmlns:p14="http://schemas.microsoft.com/office/powerpoint/2010/main" Requires="p14">
+      <p:transition p14:dur="400">
+        <p:fade/>
+      </p:transition>
+    </mc:Choice>
+    <mc:Fallback>
+      <p:transition>
+        <p:fade/>
+      </p:transition>
+    </mc:Fallback>
+  </mc:AlternateContent>
 </p:sld>
 </file>
 
-<file path=ppt/slides/slide2.xml><?xml version="1.0" encoding="utf-8"?>
+<file path=ppt/slides/slide19.xml><?xml version="1.0" encoding="utf-8"?>
 <p:sld xmlns:a="http://schemas.openxmlformats.org/drawingml/2006/main" xmlns:r="http://schemas.openxmlformats.org/officeDocument/2006/relationships" xmlns:p="http://schemas.openxmlformats.org/presentationml/2006/main">
   <p:cSld>
     <p:bg>
@@ -14031,1301 +13094,7 @@
           <p:nvPr/>
         </p:nvPicPr>
         <p:blipFill>
-          <a:blip r:embed="rId2"/>
-          <a:stretch>
-            <a:fillRect/>
-          </a:stretch>
-        </p:blipFill>
-        <p:spPr>
-          <a:xfrm>
-            <a:off x="377741" y="285750"/>
-            <a:ext cx="1444792" cy="419100"/>
-          </a:xfrm>
-          <a:prstGeom prst="rect">
-            <a:avLst/>
-          </a:prstGeom>
-        </p:spPr>
-      </p:pic>
-      <p:grpSp>
-        <p:nvGrpSpPr>
-          <p:cNvPr id="5" name="Group 5"/>
-          <p:cNvGrpSpPr/>
-          <p:nvPr/>
-        </p:nvGrpSpPr>
-        <p:grpSpPr>
-          <a:xfrm>
-            <a:off x="709026" y="952500"/>
-            <a:ext cx="2487198" cy="4953000"/>
-            <a:chOff x="709026" y="952500"/>
-            <a:chExt cx="2487198" cy="4953000"/>
-          </a:xfrm>
-        </p:grpSpPr>
-        <p:pic>
-          <p:nvPicPr>
-            <p:cNvPr id="3" name="Image 3"/>
-            <p:cNvPicPr>
-              <a:picLocks noChangeAspect="1"/>
-            </p:cNvPicPr>
-            <p:nvPr/>
-          </p:nvPicPr>
-          <p:blipFill>
-            <a:blip r:embed="rId3"/>
-            <a:stretch>
-              <a:fillRect/>
-            </a:stretch>
-          </p:blipFill>
-          <p:spPr>
-            <a:xfrm>
-              <a:off x="709026" y="952500"/>
-              <a:ext cx="2487198" cy="4953000"/>
-            </a:xfrm>
-            <a:prstGeom prst="rect">
-              <a:avLst/>
-            </a:prstGeom>
-          </p:spPr>
-        </p:pic>
-        <p:sp>
-          <p:nvSpPr>
-            <p:cNvPr id="4" name="TextBox 4"/>
-            <p:cNvSpPr txBox="1"/>
-            <p:nvPr/>
-          </p:nvSpPr>
-          <p:spPr>
-            <a:xfrm>
-              <a:off x="1330361" y="3202305"/>
-              <a:ext cx="1244529" cy="410718"/>
-            </a:xfrm>
-            <a:prstGeom prst="rect">
-              <a:avLst/>
-            </a:prstGeom>
-            <a:noFill/>
-            <a:ln>
-              <a:noFill/>
-            </a:ln>
-          </p:spPr>
-          <p:txBody>
-            <a:bodyPr wrap="none" lIns="0" tIns="0" rIns="0" bIns="0" anchor="t" anchorCtr="0">
-              <a:spAutoFit/>
-            </a:bodyPr>
-            <a:lstStyle/>
-            <a:p>
-              <a:pPr algn="ctr"/>
-              <a:r>
-                <a:rPr lang="en-US" sz="2100" b="1" dirty="0">
-                  <a:solidFill>
-                    <a:schemeClr val="accent1"/>
-                  </a:solidFill>
-                  <a:latin typeface="+mn-lt"/>
-                  <a:ea typeface="+mn-ea"/>
-                  <a:cs typeface="+mn-cs"/>
-                </a:rPr>
-                <a:t>NỘI DUNG</a:t>
-              </a:r>
-            </a:p>
-          </p:txBody>
-        </p:sp>
-      </p:grpSp>
-      <p:grpSp>
-        <p:nvGrpSpPr>
-          <p:cNvPr id="34" name="Group 34"/>
-          <p:cNvGrpSpPr/>
-          <p:nvPr/>
-        </p:nvGrpSpPr>
-        <p:grpSpPr>
-          <a:xfrm>
-            <a:off x="3743325" y="1371600"/>
-            <a:ext cx="5849993" cy="3489198"/>
-            <a:chOff x="3743325" y="1371600"/>
-            <a:chExt cx="5849993" cy="3489198"/>
-          </a:xfrm>
-        </p:grpSpPr>
-        <p:grpSp>
-          <p:nvGrpSpPr>
-            <p:cNvPr id="12" name="Group 12"/>
-            <p:cNvGrpSpPr/>
-            <p:nvPr/>
-          </p:nvGrpSpPr>
-          <p:grpSpPr>
-            <a:xfrm>
-              <a:off x="3743325" y="1371600"/>
-              <a:ext cx="5849993" cy="488823"/>
-              <a:chOff x="3743325" y="1371600"/>
-              <a:chExt cx="5849993" cy="488823"/>
-            </a:xfrm>
-          </p:grpSpPr>
-          <p:sp>
-            <p:nvSpPr>
-              <p:cNvPr id="6" name="Ellipse 6"/>
-              <p:cNvSpPr/>
-              <p:nvPr/>
-            </p:nvSpPr>
-            <p:spPr>
-              <a:xfrm>
-                <a:off x="3743325" y="1552575"/>
-                <a:ext cx="76200" cy="76200"/>
-              </a:xfrm>
-              <a:prstGeom prst="ellipse">
-                <a:avLst/>
-              </a:prstGeom>
-              <a:solidFill>
-                <a:schemeClr val="accent1"/>
-              </a:solidFill>
-              <a:ln>
-                <a:noFill/>
-              </a:ln>
-            </p:spPr>
-          </p:sp>
-          <p:sp>
-            <p:nvSpPr>
-              <p:cNvPr id="7" name="Line 7"/>
-              <p:cNvSpPr/>
-              <p:nvPr/>
-            </p:nvSpPr>
-            <p:spPr>
-              <a:xfrm>
-                <a:off x="3819525" y="1590675"/>
-                <a:ext cx="180975" cy="9525"/>
-              </a:xfrm>
-              <a:custGeom>
-                <a:avLst/>
-                <a:gdLst/>
-                <a:ahLst/>
-                <a:cxnLst/>
-                <a:rect l="l" t="t" r="r" b="b"/>
-                <a:pathLst>
-                  <a:path w="180975" h="9525">
-                    <a:moveTo>
-                      <a:pt x="0" y="0"/>
-                    </a:moveTo>
-                    <a:lnTo>
-                      <a:pt x="180975" y="0"/>
-                    </a:lnTo>
-                  </a:path>
-                </a:pathLst>
-              </a:custGeom>
-              <a:noFill/>
-              <a:ln w="19050">
-                <a:solidFill>
-                  <a:schemeClr val="accent1"/>
-                </a:solidFill>
-              </a:ln>
-            </p:spPr>
-          </p:sp>
-          <p:sp>
-            <p:nvSpPr>
-              <p:cNvPr id="8" name="Freeform 8"/>
-              <p:cNvSpPr/>
-              <p:nvPr/>
-            </p:nvSpPr>
-            <p:spPr>
-              <a:xfrm>
-                <a:off x="4000500" y="1371600"/>
-                <a:ext cx="1238250" cy="438150"/>
-              </a:xfrm>
-              <a:custGeom>
-                <a:avLst/>
-                <a:gdLst/>
-                <a:ahLst/>
-                <a:cxnLst/>
-                <a:rect l="l" t="t" r="r" b="b"/>
-                <a:pathLst>
-                  <a:path w="1238250" h="438150">
-                    <a:moveTo>
-                      <a:pt x="95250" y="0"/>
-                    </a:moveTo>
-                    <a:lnTo>
-                      <a:pt x="1143000" y="0"/>
-                    </a:lnTo>
-                    <a:lnTo>
-                      <a:pt x="1238250" y="95250"/>
-                    </a:lnTo>
-                    <a:lnTo>
-                      <a:pt x="1238250" y="342900"/>
-                    </a:lnTo>
-                    <a:lnTo>
-                      <a:pt x="1143000" y="438150"/>
-                    </a:lnTo>
-                    <a:lnTo>
-                      <a:pt x="95250" y="438150"/>
-                    </a:lnTo>
-                    <a:lnTo>
-                      <a:pt x="0" y="342900"/>
-                    </a:lnTo>
-                    <a:lnTo>
-                      <a:pt x="0" y="95250"/>
-                    </a:lnTo>
-                    <a:close/>
-                  </a:path>
-                </a:pathLst>
-              </a:custGeom>
-              <a:solidFill>
-                <a:schemeClr val="lt1"/>
-              </a:solidFill>
-              <a:ln w="19050">
-                <a:solidFill>
-                  <a:schemeClr val="accent3"/>
-                </a:solidFill>
-              </a:ln>
-            </p:spPr>
-          </p:sp>
-          <p:sp>
-            <p:nvSpPr>
-              <p:cNvPr id="9" name="Freeform 9"/>
-              <p:cNvSpPr/>
-              <p:nvPr/>
-            </p:nvSpPr>
-            <p:spPr>
-              <a:xfrm>
-                <a:off x="5000625" y="1371600"/>
-                <a:ext cx="161925" cy="438150"/>
-              </a:xfrm>
-              <a:custGeom>
-                <a:avLst/>
-                <a:gdLst/>
-                <a:ahLst/>
-                <a:cxnLst/>
-                <a:rect l="l" t="t" r="r" b="b"/>
-                <a:pathLst>
-                  <a:path w="161925" h="438150">
-                    <a:moveTo>
-                      <a:pt x="0" y="0"/>
-                    </a:moveTo>
-                    <a:lnTo>
-                      <a:pt x="76200" y="76200"/>
-                    </a:lnTo>
-                    <a:moveTo>
-                      <a:pt x="85725" y="0"/>
-                    </a:moveTo>
-                    <a:lnTo>
-                      <a:pt x="161925" y="76200"/>
-                    </a:lnTo>
-                    <a:moveTo>
-                      <a:pt x="0" y="438150"/>
-                    </a:moveTo>
-                    <a:lnTo>
-                      <a:pt x="76200" y="361950"/>
-                    </a:lnTo>
-                    <a:moveTo>
-                      <a:pt x="85725" y="438150"/>
-                    </a:moveTo>
-                    <a:lnTo>
-                      <a:pt x="161925" y="361950"/>
-                    </a:lnTo>
-                  </a:path>
-                </a:pathLst>
-              </a:custGeom>
-              <a:solidFill>
-                <a:schemeClr val="accent1"/>
-              </a:solidFill>
-              <a:ln w="19050">
-                <a:solidFill>
-                  <a:schemeClr val="accent1"/>
-                </a:solidFill>
-              </a:ln>
-            </p:spPr>
-          </p:sp>
-          <p:sp>
-            <p:nvSpPr>
-              <p:cNvPr id="10" name="TextBox 10"/>
-              <p:cNvSpPr txBox="1"/>
-              <p:nvPr/>
-            </p:nvSpPr>
-            <p:spPr>
-              <a:xfrm>
-                <a:off x="4410570" y="1463040"/>
-                <a:ext cx="418109" cy="352044"/>
-              </a:xfrm>
-              <a:prstGeom prst="rect">
-                <a:avLst/>
-              </a:prstGeom>
-              <a:noFill/>
-              <a:ln>
-                <a:noFill/>
-              </a:ln>
-            </p:spPr>
-            <p:txBody>
-              <a:bodyPr wrap="none" lIns="0" tIns="0" rIns="0" bIns="0" anchor="t" anchorCtr="0">
-                <a:spAutoFit/>
-              </a:bodyPr>
-              <a:lstStyle/>
-              <a:p>
-                <a:pPr algn="ctr"/>
-                <a:r>
-                  <a:rPr lang="en-US" sz="1800" dirty="0">
-                    <a:solidFill>
-                      <a:schemeClr val="accent1"/>
-                    </a:solidFill>
-                    <a:latin typeface="+mn-lt"/>
-                    <a:ea typeface="+mn-ea"/>
-                    <a:cs typeface="+mn-cs"/>
-                  </a:rPr>
-                  <a:t>01.</a:t>
-                </a:r>
-              </a:p>
-            </p:txBody>
-          </p:sp>
-          <p:sp>
-            <p:nvSpPr>
-              <p:cNvPr id="11" name="TextBox 11"/>
-              <p:cNvSpPr txBox="1"/>
-              <p:nvPr/>
-            </p:nvSpPr>
-            <p:spPr>
-              <a:xfrm>
-                <a:off x="5561457" y="1449705"/>
-                <a:ext cx="4031861" cy="410718"/>
-              </a:xfrm>
-              <a:prstGeom prst="rect">
-                <a:avLst/>
-              </a:prstGeom>
-              <a:noFill/>
-              <a:ln>
-                <a:noFill/>
-              </a:ln>
-            </p:spPr>
-            <p:txBody>
-              <a:bodyPr wrap="none" lIns="0" tIns="0" rIns="0" bIns="0" anchor="t" anchorCtr="0">
-                <a:spAutoFit/>
-              </a:bodyPr>
-              <a:lstStyle/>
-              <a:p>
-                <a:pPr algn="l"/>
-                <a:r>
-                  <a:rPr lang="en-US" sz="2100" dirty="0">
-                    <a:solidFill>
-                      <a:schemeClr val="accent1"/>
-                    </a:solidFill>
-                    <a:latin typeface="+mn-lt"/>
-                    <a:ea typeface="+mn-ea"/>
-                    <a:cs typeface="+mn-cs"/>
-                  </a:rPr>
-                  <a:t>Các dự án tham gia và kết quả</a:t>
-                </a:r>
-              </a:p>
-            </p:txBody>
-          </p:sp>
-        </p:grpSp>
-        <p:grpSp>
-          <p:nvGrpSpPr>
-            <p:cNvPr id="19" name="Group 19"/>
-            <p:cNvGrpSpPr/>
-            <p:nvPr/>
-          </p:nvGrpSpPr>
-          <p:grpSpPr>
-            <a:xfrm>
-              <a:off x="3743325" y="2371725"/>
-              <a:ext cx="5416067" cy="488823"/>
-              <a:chOff x="3743325" y="2371725"/>
-              <a:chExt cx="5416067" cy="488823"/>
-            </a:xfrm>
-          </p:grpSpPr>
-          <p:sp>
-            <p:nvSpPr>
-              <p:cNvPr id="13" name="Ellipse 13"/>
-              <p:cNvSpPr/>
-              <p:nvPr/>
-            </p:nvSpPr>
-            <p:spPr>
-              <a:xfrm>
-                <a:off x="3743325" y="2552700"/>
-                <a:ext cx="76200" cy="76200"/>
-              </a:xfrm>
-              <a:prstGeom prst="ellipse">
-                <a:avLst/>
-              </a:prstGeom>
-              <a:solidFill>
-                <a:schemeClr val="accent1"/>
-              </a:solidFill>
-              <a:ln>
-                <a:noFill/>
-              </a:ln>
-            </p:spPr>
-          </p:sp>
-          <p:sp>
-            <p:nvSpPr>
-              <p:cNvPr id="14" name="Line 14"/>
-              <p:cNvSpPr/>
-              <p:nvPr/>
-            </p:nvSpPr>
-            <p:spPr>
-              <a:xfrm>
-                <a:off x="3819525" y="2590800"/>
-                <a:ext cx="180975" cy="9525"/>
-              </a:xfrm>
-              <a:custGeom>
-                <a:avLst/>
-                <a:gdLst/>
-                <a:ahLst/>
-                <a:cxnLst/>
-                <a:rect l="l" t="t" r="r" b="b"/>
-                <a:pathLst>
-                  <a:path w="180975" h="9525">
-                    <a:moveTo>
-                      <a:pt x="0" y="0"/>
-                    </a:moveTo>
-                    <a:lnTo>
-                      <a:pt x="180975" y="0"/>
-                    </a:lnTo>
-                  </a:path>
-                </a:pathLst>
-              </a:custGeom>
-              <a:noFill/>
-              <a:ln w="19050">
-                <a:solidFill>
-                  <a:schemeClr val="accent1"/>
-                </a:solidFill>
-              </a:ln>
-            </p:spPr>
-          </p:sp>
-          <p:sp>
-            <p:nvSpPr>
-              <p:cNvPr id="15" name="Freeform 15"/>
-              <p:cNvSpPr/>
-              <p:nvPr/>
-            </p:nvSpPr>
-            <p:spPr>
-              <a:xfrm>
-                <a:off x="4000500" y="2371725"/>
-                <a:ext cx="1238250" cy="438150"/>
-              </a:xfrm>
-              <a:custGeom>
-                <a:avLst/>
-                <a:gdLst/>
-                <a:ahLst/>
-                <a:cxnLst/>
-                <a:rect l="l" t="t" r="r" b="b"/>
-                <a:pathLst>
-                  <a:path w="1238250" h="438150">
-                    <a:moveTo>
-                      <a:pt x="95250" y="0"/>
-                    </a:moveTo>
-                    <a:lnTo>
-                      <a:pt x="1143000" y="0"/>
-                    </a:lnTo>
-                    <a:lnTo>
-                      <a:pt x="1238250" y="95250"/>
-                    </a:lnTo>
-                    <a:lnTo>
-                      <a:pt x="1238250" y="342900"/>
-                    </a:lnTo>
-                    <a:lnTo>
-                      <a:pt x="1143000" y="438150"/>
-                    </a:lnTo>
-                    <a:lnTo>
-                      <a:pt x="95250" y="438150"/>
-                    </a:lnTo>
-                    <a:lnTo>
-                      <a:pt x="0" y="342900"/>
-                    </a:lnTo>
-                    <a:lnTo>
-                      <a:pt x="0" y="95250"/>
-                    </a:lnTo>
-                    <a:close/>
-                  </a:path>
-                </a:pathLst>
-              </a:custGeom>
-              <a:solidFill>
-                <a:schemeClr val="lt1"/>
-              </a:solidFill>
-              <a:ln w="19050">
-                <a:solidFill>
-                  <a:schemeClr val="accent3"/>
-                </a:solidFill>
-              </a:ln>
-            </p:spPr>
-          </p:sp>
-          <p:sp>
-            <p:nvSpPr>
-              <p:cNvPr id="16" name="Freeform 16"/>
-              <p:cNvSpPr/>
-              <p:nvPr/>
-            </p:nvSpPr>
-            <p:spPr>
-              <a:xfrm>
-                <a:off x="5000625" y="2371725"/>
-                <a:ext cx="161925" cy="438150"/>
-              </a:xfrm>
-              <a:custGeom>
-                <a:avLst/>
-                <a:gdLst/>
-                <a:ahLst/>
-                <a:cxnLst/>
-                <a:rect l="l" t="t" r="r" b="b"/>
-                <a:pathLst>
-                  <a:path w="161925" h="438150">
-                    <a:moveTo>
-                      <a:pt x="0" y="0"/>
-                    </a:moveTo>
-                    <a:lnTo>
-                      <a:pt x="76200" y="76200"/>
-                    </a:lnTo>
-                    <a:moveTo>
-                      <a:pt x="85725" y="0"/>
-                    </a:moveTo>
-                    <a:lnTo>
-                      <a:pt x="161925" y="76200"/>
-                    </a:lnTo>
-                    <a:moveTo>
-                      <a:pt x="0" y="438150"/>
-                    </a:moveTo>
-                    <a:lnTo>
-                      <a:pt x="76200" y="361950"/>
-                    </a:lnTo>
-                    <a:moveTo>
-                      <a:pt x="85725" y="438150"/>
-                    </a:moveTo>
-                    <a:lnTo>
-                      <a:pt x="161925" y="361950"/>
-                    </a:lnTo>
-                  </a:path>
-                </a:pathLst>
-              </a:custGeom>
-              <a:solidFill>
-                <a:schemeClr val="accent1"/>
-              </a:solidFill>
-              <a:ln w="19050">
-                <a:solidFill>
-                  <a:schemeClr val="accent1"/>
-                </a:solidFill>
-              </a:ln>
-            </p:spPr>
-          </p:sp>
-          <p:sp>
-            <p:nvSpPr>
-              <p:cNvPr id="17" name="TextBox 17"/>
-              <p:cNvSpPr txBox="1"/>
-              <p:nvPr/>
-            </p:nvSpPr>
-            <p:spPr>
-              <a:xfrm>
-                <a:off x="4410570" y="2463165"/>
-                <a:ext cx="418109" cy="352044"/>
-              </a:xfrm>
-              <a:prstGeom prst="rect">
-                <a:avLst/>
-              </a:prstGeom>
-              <a:noFill/>
-              <a:ln>
-                <a:noFill/>
-              </a:ln>
-            </p:spPr>
-            <p:txBody>
-              <a:bodyPr wrap="none" lIns="0" tIns="0" rIns="0" bIns="0" anchor="t" anchorCtr="0">
-                <a:spAutoFit/>
-              </a:bodyPr>
-              <a:lstStyle/>
-              <a:p>
-                <a:pPr algn="ctr"/>
-                <a:r>
-                  <a:rPr lang="en-US" sz="1800" dirty="0">
-                    <a:solidFill>
-                      <a:schemeClr val="accent1"/>
-                    </a:solidFill>
-                    <a:latin typeface="+mn-lt"/>
-                    <a:ea typeface="+mn-ea"/>
-                    <a:cs typeface="+mn-cs"/>
-                  </a:rPr>
-                  <a:t>02.</a:t>
-                </a:r>
-              </a:p>
-            </p:txBody>
-          </p:sp>
-          <p:sp>
-            <p:nvSpPr>
-              <p:cNvPr id="18" name="TextBox 18"/>
-              <p:cNvSpPr txBox="1"/>
-              <p:nvPr/>
-            </p:nvSpPr>
-            <p:spPr>
-              <a:xfrm>
-                <a:off x="5561457" y="2449830"/>
-                <a:ext cx="3597935" cy="410718"/>
-              </a:xfrm>
-              <a:prstGeom prst="rect">
-                <a:avLst/>
-              </a:prstGeom>
-              <a:noFill/>
-              <a:ln>
-                <a:noFill/>
-              </a:ln>
-            </p:spPr>
-            <p:txBody>
-              <a:bodyPr wrap="none" lIns="0" tIns="0" rIns="0" bIns="0" anchor="t" anchorCtr="0">
-                <a:spAutoFit/>
-              </a:bodyPr>
-              <a:lstStyle/>
-              <a:p>
-                <a:pPr algn="l"/>
-                <a:r>
-                  <a:rPr lang="en-US" sz="2100" dirty="0">
-                    <a:solidFill>
-                      <a:schemeClr val="accent1"/>
-                    </a:solidFill>
-                    <a:latin typeface="+mn-lt"/>
-                    <a:ea typeface="+mn-ea"/>
-                    <a:cs typeface="+mn-cs"/>
-                  </a:rPr>
-                  <a:t>Sử dụng AI trong công việc</a:t>
-                </a:r>
-              </a:p>
-            </p:txBody>
-          </p:sp>
-        </p:grpSp>
-        <p:grpSp>
-          <p:nvGrpSpPr>
-            <p:cNvPr id="26" name="Group 26"/>
-            <p:cNvGrpSpPr/>
-            <p:nvPr/>
-          </p:nvGrpSpPr>
-          <p:grpSpPr>
-            <a:xfrm>
-              <a:off x="3743325" y="3371850"/>
-              <a:ext cx="5454120" cy="488823"/>
-              <a:chOff x="3743325" y="3371850"/>
-              <a:chExt cx="5454120" cy="488823"/>
-            </a:xfrm>
-          </p:grpSpPr>
-          <p:sp>
-            <p:nvSpPr>
-              <p:cNvPr id="20" name="Ellipse 20"/>
-              <p:cNvSpPr/>
-              <p:nvPr/>
-            </p:nvSpPr>
-            <p:spPr>
-              <a:xfrm>
-                <a:off x="3743325" y="3552825"/>
-                <a:ext cx="76200" cy="76200"/>
-              </a:xfrm>
-              <a:prstGeom prst="ellipse">
-                <a:avLst/>
-              </a:prstGeom>
-              <a:solidFill>
-                <a:schemeClr val="accent1"/>
-              </a:solidFill>
-              <a:ln>
-                <a:noFill/>
-              </a:ln>
-            </p:spPr>
-          </p:sp>
-          <p:sp>
-            <p:nvSpPr>
-              <p:cNvPr id="21" name="Line 21"/>
-              <p:cNvSpPr/>
-              <p:nvPr/>
-            </p:nvSpPr>
-            <p:spPr>
-              <a:xfrm>
-                <a:off x="3819525" y="3590925"/>
-                <a:ext cx="180975" cy="9525"/>
-              </a:xfrm>
-              <a:custGeom>
-                <a:avLst/>
-                <a:gdLst/>
-                <a:ahLst/>
-                <a:cxnLst/>
-                <a:rect l="l" t="t" r="r" b="b"/>
-                <a:pathLst>
-                  <a:path w="180975" h="9525">
-                    <a:moveTo>
-                      <a:pt x="0" y="0"/>
-                    </a:moveTo>
-                    <a:lnTo>
-                      <a:pt x="180975" y="0"/>
-                    </a:lnTo>
-                  </a:path>
-                </a:pathLst>
-              </a:custGeom>
-              <a:noFill/>
-              <a:ln w="19050">
-                <a:solidFill>
-                  <a:schemeClr val="accent1"/>
-                </a:solidFill>
-              </a:ln>
-            </p:spPr>
-          </p:sp>
-          <p:sp>
-            <p:nvSpPr>
-              <p:cNvPr id="22" name="Freeform 22"/>
-              <p:cNvSpPr/>
-              <p:nvPr/>
-            </p:nvSpPr>
-            <p:spPr>
-              <a:xfrm>
-                <a:off x="4000500" y="3371850"/>
-                <a:ext cx="1238250" cy="438150"/>
-              </a:xfrm>
-              <a:custGeom>
-                <a:avLst/>
-                <a:gdLst/>
-                <a:ahLst/>
-                <a:cxnLst/>
-                <a:rect l="l" t="t" r="r" b="b"/>
-                <a:pathLst>
-                  <a:path w="1238250" h="438150">
-                    <a:moveTo>
-                      <a:pt x="95250" y="0"/>
-                    </a:moveTo>
-                    <a:lnTo>
-                      <a:pt x="1143000" y="0"/>
-                    </a:lnTo>
-                    <a:lnTo>
-                      <a:pt x="1238250" y="95250"/>
-                    </a:lnTo>
-                    <a:lnTo>
-                      <a:pt x="1238250" y="342900"/>
-                    </a:lnTo>
-                    <a:lnTo>
-                      <a:pt x="1143000" y="438150"/>
-                    </a:lnTo>
-                    <a:lnTo>
-                      <a:pt x="95250" y="438150"/>
-                    </a:lnTo>
-                    <a:lnTo>
-                      <a:pt x="0" y="342900"/>
-                    </a:lnTo>
-                    <a:lnTo>
-                      <a:pt x="0" y="95250"/>
-                    </a:lnTo>
-                    <a:close/>
-                  </a:path>
-                </a:pathLst>
-              </a:custGeom>
-              <a:solidFill>
-                <a:schemeClr val="lt1"/>
-              </a:solidFill>
-              <a:ln w="19050">
-                <a:solidFill>
-                  <a:schemeClr val="accent3"/>
-                </a:solidFill>
-              </a:ln>
-            </p:spPr>
-          </p:sp>
-          <p:sp>
-            <p:nvSpPr>
-              <p:cNvPr id="23" name="Freeform 23"/>
-              <p:cNvSpPr/>
-              <p:nvPr/>
-            </p:nvSpPr>
-            <p:spPr>
-              <a:xfrm>
-                <a:off x="5000625" y="3371850"/>
-                <a:ext cx="161925" cy="438150"/>
-              </a:xfrm>
-              <a:custGeom>
-                <a:avLst/>
-                <a:gdLst/>
-                <a:ahLst/>
-                <a:cxnLst/>
-                <a:rect l="l" t="t" r="r" b="b"/>
-                <a:pathLst>
-                  <a:path w="161925" h="438150">
-                    <a:moveTo>
-                      <a:pt x="0" y="0"/>
-                    </a:moveTo>
-                    <a:lnTo>
-                      <a:pt x="76200" y="76200"/>
-                    </a:lnTo>
-                    <a:moveTo>
-                      <a:pt x="85725" y="0"/>
-                    </a:moveTo>
-                    <a:lnTo>
-                      <a:pt x="161925" y="76200"/>
-                    </a:lnTo>
-                    <a:moveTo>
-                      <a:pt x="0" y="438150"/>
-                    </a:moveTo>
-                    <a:lnTo>
-                      <a:pt x="76200" y="361950"/>
-                    </a:lnTo>
-                    <a:moveTo>
-                      <a:pt x="85725" y="438150"/>
-                    </a:moveTo>
-                    <a:lnTo>
-                      <a:pt x="161925" y="361950"/>
-                    </a:lnTo>
-                  </a:path>
-                </a:pathLst>
-              </a:custGeom>
-              <a:solidFill>
-                <a:schemeClr val="accent1"/>
-              </a:solidFill>
-              <a:ln w="19050">
-                <a:solidFill>
-                  <a:schemeClr val="accent1"/>
-                </a:solidFill>
-              </a:ln>
-            </p:spPr>
-          </p:sp>
-          <p:sp>
-            <p:nvSpPr>
-              <p:cNvPr id="24" name="TextBox 24"/>
-              <p:cNvSpPr txBox="1"/>
-              <p:nvPr/>
-            </p:nvSpPr>
-            <p:spPr>
-              <a:xfrm>
-                <a:off x="4410570" y="3463290"/>
-                <a:ext cx="418109" cy="352044"/>
-              </a:xfrm>
-              <a:prstGeom prst="rect">
-                <a:avLst/>
-              </a:prstGeom>
-              <a:noFill/>
-              <a:ln>
-                <a:noFill/>
-              </a:ln>
-            </p:spPr>
-            <p:txBody>
-              <a:bodyPr wrap="none" lIns="0" tIns="0" rIns="0" bIns="0" anchor="t" anchorCtr="0">
-                <a:spAutoFit/>
-              </a:bodyPr>
-              <a:lstStyle/>
-              <a:p>
-                <a:pPr algn="ctr"/>
-                <a:r>
-                  <a:rPr lang="en-US" sz="1800" dirty="0">
-                    <a:solidFill>
-                      <a:schemeClr val="accent1"/>
-                    </a:solidFill>
-                    <a:latin typeface="+mn-lt"/>
-                    <a:ea typeface="+mn-ea"/>
-                    <a:cs typeface="+mn-cs"/>
-                  </a:rPr>
-                  <a:t>03.</a:t>
-                </a:r>
-              </a:p>
-            </p:txBody>
-          </p:sp>
-          <p:sp>
-            <p:nvSpPr>
-              <p:cNvPr id="25" name="TextBox 25"/>
-              <p:cNvSpPr txBox="1"/>
-              <p:nvPr/>
-            </p:nvSpPr>
-            <p:spPr>
-              <a:xfrm>
-                <a:off x="5561457" y="3449955"/>
-                <a:ext cx="3635988" cy="410718"/>
-              </a:xfrm>
-              <a:prstGeom prst="rect">
-                <a:avLst/>
-              </a:prstGeom>
-              <a:noFill/>
-              <a:ln>
-                <a:noFill/>
-              </a:ln>
-            </p:spPr>
-            <p:txBody>
-              <a:bodyPr wrap="none" lIns="0" tIns="0" rIns="0" bIns="0" anchor="t" anchorCtr="0">
-                <a:spAutoFit/>
-              </a:bodyPr>
-              <a:lstStyle/>
-              <a:p>
-                <a:pPr algn="l"/>
-                <a:r>
-                  <a:rPr lang="en-US" sz="2100" dirty="0">
-                    <a:solidFill>
-                      <a:schemeClr val="accent1"/>
-                    </a:solidFill>
-                    <a:latin typeface="+mn-lt"/>
-                    <a:ea typeface="+mn-ea"/>
-                    <a:cs typeface="+mn-cs"/>
-                  </a:rPr>
-                  <a:t>Tự đánh giá ưu, nhược điểm</a:t>
-                </a:r>
-              </a:p>
-            </p:txBody>
-          </p:sp>
-        </p:grpSp>
-        <p:grpSp>
-          <p:nvGrpSpPr>
-            <p:cNvPr id="33" name="Group 33"/>
-            <p:cNvGrpSpPr/>
-            <p:nvPr/>
-          </p:nvGrpSpPr>
-          <p:grpSpPr>
-            <a:xfrm>
-              <a:off x="3743325" y="4371975"/>
-              <a:ext cx="4039948" cy="488823"/>
-              <a:chOff x="3743325" y="4371975"/>
-              <a:chExt cx="4039948" cy="488823"/>
-            </a:xfrm>
-          </p:grpSpPr>
-          <p:sp>
-            <p:nvSpPr>
-              <p:cNvPr id="27" name="Ellipse 27"/>
-              <p:cNvSpPr/>
-              <p:nvPr/>
-            </p:nvSpPr>
-            <p:spPr>
-              <a:xfrm>
-                <a:off x="3743325" y="4552950"/>
-                <a:ext cx="76200" cy="76200"/>
-              </a:xfrm>
-              <a:prstGeom prst="ellipse">
-                <a:avLst/>
-              </a:prstGeom>
-              <a:solidFill>
-                <a:schemeClr val="accent1"/>
-              </a:solidFill>
-              <a:ln>
-                <a:noFill/>
-              </a:ln>
-            </p:spPr>
-          </p:sp>
-          <p:sp>
-            <p:nvSpPr>
-              <p:cNvPr id="28" name="Line 28"/>
-              <p:cNvSpPr/>
-              <p:nvPr/>
-            </p:nvSpPr>
-            <p:spPr>
-              <a:xfrm>
-                <a:off x="3819525" y="4591050"/>
-                <a:ext cx="180975" cy="9525"/>
-              </a:xfrm>
-              <a:custGeom>
-                <a:avLst/>
-                <a:gdLst/>
-                <a:ahLst/>
-                <a:cxnLst/>
-                <a:rect l="l" t="t" r="r" b="b"/>
-                <a:pathLst>
-                  <a:path w="180975" h="9525">
-                    <a:moveTo>
-                      <a:pt x="0" y="0"/>
-                    </a:moveTo>
-                    <a:lnTo>
-                      <a:pt x="180975" y="0"/>
-                    </a:lnTo>
-                  </a:path>
-                </a:pathLst>
-              </a:custGeom>
-              <a:noFill/>
-              <a:ln w="19050">
-                <a:solidFill>
-                  <a:schemeClr val="accent1"/>
-                </a:solidFill>
-              </a:ln>
-            </p:spPr>
-          </p:sp>
-          <p:sp>
-            <p:nvSpPr>
-              <p:cNvPr id="29" name="Freeform 29"/>
-              <p:cNvSpPr/>
-              <p:nvPr/>
-            </p:nvSpPr>
-            <p:spPr>
-              <a:xfrm>
-                <a:off x="4000500" y="4371975"/>
-                <a:ext cx="1238250" cy="438150"/>
-              </a:xfrm>
-              <a:custGeom>
-                <a:avLst/>
-                <a:gdLst/>
-                <a:ahLst/>
-                <a:cxnLst/>
-                <a:rect l="l" t="t" r="r" b="b"/>
-                <a:pathLst>
-                  <a:path w="1238250" h="438150">
-                    <a:moveTo>
-                      <a:pt x="95250" y="0"/>
-                    </a:moveTo>
-                    <a:lnTo>
-                      <a:pt x="1143000" y="0"/>
-                    </a:lnTo>
-                    <a:lnTo>
-                      <a:pt x="1238250" y="95250"/>
-                    </a:lnTo>
-                    <a:lnTo>
-                      <a:pt x="1238250" y="342900"/>
-                    </a:lnTo>
-                    <a:lnTo>
-                      <a:pt x="1143000" y="438150"/>
-                    </a:lnTo>
-                    <a:lnTo>
-                      <a:pt x="95250" y="438150"/>
-                    </a:lnTo>
-                    <a:lnTo>
-                      <a:pt x="0" y="342900"/>
-                    </a:lnTo>
-                    <a:lnTo>
-                      <a:pt x="0" y="95250"/>
-                    </a:lnTo>
-                    <a:close/>
-                  </a:path>
-                </a:pathLst>
-              </a:custGeom>
-              <a:solidFill>
-                <a:schemeClr val="lt1"/>
-              </a:solidFill>
-              <a:ln w="19050">
-                <a:solidFill>
-                  <a:schemeClr val="accent3"/>
-                </a:solidFill>
-              </a:ln>
-            </p:spPr>
-          </p:sp>
-          <p:sp>
-            <p:nvSpPr>
-              <p:cNvPr id="30" name="Freeform 30"/>
-              <p:cNvSpPr/>
-              <p:nvPr/>
-            </p:nvSpPr>
-            <p:spPr>
-              <a:xfrm>
-                <a:off x="5000625" y="4371975"/>
-                <a:ext cx="161925" cy="438150"/>
-              </a:xfrm>
-              <a:custGeom>
-                <a:avLst/>
-                <a:gdLst/>
-                <a:ahLst/>
-                <a:cxnLst/>
-                <a:rect l="l" t="t" r="r" b="b"/>
-                <a:pathLst>
-                  <a:path w="161925" h="438150">
-                    <a:moveTo>
-                      <a:pt x="0" y="0"/>
-                    </a:moveTo>
-                    <a:lnTo>
-                      <a:pt x="76200" y="76200"/>
-                    </a:lnTo>
-                    <a:moveTo>
-                      <a:pt x="85725" y="0"/>
-                    </a:moveTo>
-                    <a:lnTo>
-                      <a:pt x="161925" y="76200"/>
-                    </a:lnTo>
-                    <a:moveTo>
-                      <a:pt x="0" y="438150"/>
-                    </a:moveTo>
-                    <a:lnTo>
-                      <a:pt x="76200" y="361950"/>
-                    </a:lnTo>
-                    <a:moveTo>
-                      <a:pt x="85725" y="438150"/>
-                    </a:moveTo>
-                    <a:lnTo>
-                      <a:pt x="161925" y="361950"/>
-                    </a:lnTo>
-                  </a:path>
-                </a:pathLst>
-              </a:custGeom>
-              <a:solidFill>
-                <a:schemeClr val="accent1"/>
-              </a:solidFill>
-              <a:ln w="19050">
-                <a:solidFill>
-                  <a:schemeClr val="accent1"/>
-                </a:solidFill>
-              </a:ln>
-            </p:spPr>
-          </p:sp>
-          <p:sp>
-            <p:nvSpPr>
-              <p:cNvPr id="31" name="TextBox 31"/>
-              <p:cNvSpPr txBox="1"/>
-              <p:nvPr/>
-            </p:nvSpPr>
-            <p:spPr>
-              <a:xfrm>
-                <a:off x="4410570" y="4463415"/>
-                <a:ext cx="418109" cy="352044"/>
-              </a:xfrm>
-              <a:prstGeom prst="rect">
-                <a:avLst/>
-              </a:prstGeom>
-              <a:noFill/>
-              <a:ln>
-                <a:noFill/>
-              </a:ln>
-            </p:spPr>
-            <p:txBody>
-              <a:bodyPr wrap="none" lIns="0" tIns="0" rIns="0" bIns="0" anchor="t" anchorCtr="0">
-                <a:spAutoFit/>
-              </a:bodyPr>
-              <a:lstStyle/>
-              <a:p>
-                <a:pPr algn="ctr"/>
-                <a:r>
-                  <a:rPr lang="en-US" sz="1800" dirty="0">
-                    <a:solidFill>
-                      <a:schemeClr val="accent1"/>
-                    </a:solidFill>
-                    <a:latin typeface="+mn-lt"/>
-                    <a:ea typeface="+mn-ea"/>
-                    <a:cs typeface="+mn-cs"/>
-                  </a:rPr>
-                  <a:t>04.</a:t>
-                </a:r>
-              </a:p>
-            </p:txBody>
-          </p:sp>
-          <p:sp>
-            <p:nvSpPr>
-              <p:cNvPr id="32" name="TextBox 32"/>
-              <p:cNvSpPr txBox="1"/>
-              <p:nvPr/>
-            </p:nvSpPr>
-            <p:spPr>
-              <a:xfrm>
-                <a:off x="5561457" y="4450080"/>
-                <a:ext cx="2221816" cy="410718"/>
-              </a:xfrm>
-              <a:prstGeom prst="rect">
-                <a:avLst/>
-              </a:prstGeom>
-              <a:noFill/>
-              <a:ln>
-                <a:noFill/>
-              </a:ln>
-            </p:spPr>
-            <p:txBody>
-              <a:bodyPr wrap="none" lIns="0" tIns="0" rIns="0" bIns="0" anchor="t" anchorCtr="0">
-                <a:spAutoFit/>
-              </a:bodyPr>
-              <a:lstStyle/>
-              <a:p>
-                <a:pPr algn="l"/>
-                <a:r>
-                  <a:rPr lang="en-US" sz="2100" dirty="0">
-                    <a:solidFill>
-                      <a:schemeClr val="accent1"/>
-                    </a:solidFill>
-                    <a:latin typeface="+mn-lt"/>
-                    <a:ea typeface="+mn-ea"/>
-                    <a:cs typeface="+mn-cs"/>
-                  </a:rPr>
-                  <a:t>Mục tiêu sắp tới</a:t>
-                </a:r>
-              </a:p>
-            </p:txBody>
-          </p:sp>
-        </p:grpSp>
-      </p:grpSp>
-      <p:sp>
-        <p:nvSpPr>
-          <p:cNvPr id="35" name="Line 35"/>
-          <p:cNvSpPr/>
-          <p:nvPr/>
-        </p:nvSpPr>
-        <p:spPr>
-          <a:xfrm>
-            <a:off x="0" y="6515100"/>
-            <a:ext cx="12192000" cy="9525"/>
-          </a:xfrm>
-          <a:custGeom>
-            <a:avLst/>
-            <a:gdLst/>
-            <a:ahLst/>
-            <a:cxnLst/>
-            <a:rect l="l" t="t" r="r" b="b"/>
-            <a:pathLst>
-              <a:path w="12192000" h="9525">
-                <a:moveTo>
-                  <a:pt x="0" y="0"/>
-                </a:moveTo>
-                <a:lnTo>
-                  <a:pt x="12192000" y="0"/>
-                </a:lnTo>
-              </a:path>
-            </a:pathLst>
-          </a:custGeom>
-          <a:noFill/>
-          <a:ln w="9525">
-            <a:solidFill>
-              <a:srgbClr val="DDE6E1"/>
-            </a:solidFill>
-          </a:ln>
-        </p:spPr>
-      </p:sp>
-      <p:sp>
-        <p:nvSpPr>
-          <p:cNvPr id="36" name="TextBox 36"/>
-          <p:cNvSpPr txBox="1"/>
-          <p:nvPr/>
-        </p:nvSpPr>
-        <p:spPr>
-          <a:xfrm>
-            <a:off x="11141640" y="6630352"/>
-            <a:ext cx="484194" cy="205359"/>
-          </a:xfrm>
-          <a:prstGeom prst="rect">
-            <a:avLst/>
-          </a:prstGeom>
-          <a:noFill/>
-          <a:ln>
-            <a:noFill/>
-          </a:ln>
-        </p:spPr>
-        <p:txBody>
-          <a:bodyPr wrap="none" lIns="0" tIns="0" rIns="0" bIns="0" anchor="t" anchorCtr="0">
-            <a:spAutoFit/>
-          </a:bodyPr>
-          <a:lstStyle/>
-          <a:p>
-            <a:pPr algn="r"/>
-            <a:r>
-              <a:rPr lang="en-US" sz="1050" dirty="0">
-                <a:solidFill>
-                  <a:srgbClr val="66706A"/>
-                </a:solidFill>
-                <a:latin typeface="+mn-lt"/>
-                <a:ea typeface="+mn-ea"/>
-                <a:cs typeface="+mn-cs"/>
-              </a:rPr>
-              <a:t>02 / 23</a:t>
-            </a:r>
-          </a:p>
-        </p:txBody>
-      </p:sp>
-    </p:spTree>
-  </p:cSld>
-  <p:clrMapOvr>
-    <a:masterClrMapping/>
-  </p:clrMapOvr>
-  <p:transition xmlns:p14="http://schemas.microsoft.com/office/powerpoint/2010/main" p14:dur="400">
-    <p:fade/>
-  </p:transition>
-</p:sld>
-</file>
-
-<file path=ppt/slides/slide20.xml><?xml version="1.0" encoding="utf-8"?>
-<p:sld xmlns:a="http://schemas.openxmlformats.org/drawingml/2006/main" xmlns:r="http://schemas.openxmlformats.org/officeDocument/2006/relationships" xmlns:p="http://schemas.openxmlformats.org/presentationml/2006/main">
-  <p:cSld>
-    <p:bg>
-      <p:bgPr>
-        <a:solidFill>
-          <a:schemeClr val="lt1"/>
-        </a:solidFill>
-        <a:effectLst/>
-      </p:bgPr>
-    </p:bg>
-    <p:spTree>
-      <p:nvGrpSpPr>
-        <p:cNvPr id="1" name=""/>
-        <p:cNvGrpSpPr/>
-        <p:nvPr/>
-      </p:nvGrpSpPr>
-      <p:grpSpPr>
-        <a:xfrm>
-          <a:off x="0" y="0"/>
-          <a:ext cx="0" cy="0"/>
-          <a:chOff x="0" y="0"/>
-          <a:chExt cx="0" cy="0"/>
-        </a:xfrm>
-      </p:grpSpPr>
-      <p:pic>
-        <p:nvPicPr>
-          <p:cNvPr id="2" name="Image 2"/>
-          <p:cNvPicPr>
-            <a:picLocks noChangeAspect="1"/>
-          </p:cNvPicPr>
-          <p:nvPr/>
-        </p:nvPicPr>
-        <p:blipFill>
-          <a:blip r:embed="rId2"/>
+          <a:blip r:embed="rId3"/>
           <a:stretch>
             <a:fillRect/>
           </a:stretch>
@@ -15431,6 +13200,13 @@
                 <a:noFill/>
               </a:ln>
             </p:spPr>
+            <p:txBody>
+              <a:bodyPr/>
+              <a:lstStyle/>
+              <a:p>
+                <a:endParaRPr lang="en-US"/>
+              </a:p>
+            </p:txBody>
           </p:sp>
           <p:sp>
             <p:nvSpPr>
@@ -15453,6 +13229,13 @@
                 <a:noFill/>
               </a:ln>
             </p:spPr>
+            <p:txBody>
+              <a:bodyPr/>
+              <a:lstStyle/>
+              <a:p>
+                <a:endParaRPr lang="en-US"/>
+              </a:p>
+            </p:txBody>
           </p:sp>
           <p:sp>
             <p:nvSpPr>
@@ -15492,6 +13275,13 @@
                 </a:solidFill>
               </a:ln>
             </p:spPr>
+            <p:txBody>
+              <a:bodyPr/>
+              <a:lstStyle/>
+              <a:p>
+                <a:endParaRPr lang="en-US"/>
+              </a:p>
+            </p:txBody>
           </p:sp>
           <p:sp>
             <p:nvSpPr>
@@ -15558,7 +13348,7 @@
               </a:bodyPr>
               <a:lstStyle/>
               <a:p>
-                <a:pPr algn="l" marL="161925" indent="-161925">
+                <a:pPr marL="161925" indent="-161925" algn="l">
                   <a:buClr>
                     <a:schemeClr val="dk1"/>
                   </a:buClr>
@@ -15605,7 +13395,7 @@
               </a:bodyPr>
               <a:lstStyle/>
               <a:p>
-                <a:pPr algn="l" marL="161925" indent="-161925">
+                <a:pPr marL="161925" indent="-161925" algn="l">
                   <a:buClr>
                     <a:schemeClr val="dk1"/>
                   </a:buClr>
@@ -15652,7 +13442,7 @@
               </a:bodyPr>
               <a:lstStyle/>
               <a:p>
-                <a:pPr algn="l" marL="161925" indent="-161925">
+                <a:pPr marL="161925" indent="-161925" algn="l">
                   <a:buClr>
                     <a:schemeClr val="dk1"/>
                   </a:buClr>
@@ -15699,7 +13489,7 @@
               </a:bodyPr>
               <a:lstStyle/>
               <a:p>
-                <a:pPr algn="l" marL="161925" indent="-161925">
+                <a:pPr marL="161925" indent="-161925" algn="l">
                   <a:buClr>
                     <a:schemeClr val="dk1"/>
                   </a:buClr>
@@ -15744,6 +13534,13 @@
                 <a:noFill/>
               </a:ln>
             </p:spPr>
+            <p:txBody>
+              <a:bodyPr/>
+              <a:lstStyle/>
+              <a:p>
+                <a:endParaRPr lang="en-US"/>
+              </a:p>
+            </p:txBody>
           </p:sp>
           <p:sp>
             <p:nvSpPr>
@@ -15823,6 +13620,13 @@
                 <a:noFill/>
               </a:ln>
             </p:spPr>
+            <p:txBody>
+              <a:bodyPr/>
+              <a:lstStyle/>
+              <a:p>
+                <a:endParaRPr lang="en-US"/>
+              </a:p>
+            </p:txBody>
           </p:sp>
           <p:sp>
             <p:nvSpPr>
@@ -15845,6 +13649,13 @@
                 <a:noFill/>
               </a:ln>
             </p:spPr>
+            <p:txBody>
+              <a:bodyPr/>
+              <a:lstStyle/>
+              <a:p>
+                <a:endParaRPr lang="en-US"/>
+              </a:p>
+            </p:txBody>
           </p:sp>
           <p:sp>
             <p:nvSpPr>
@@ -15951,7 +13762,7 @@
               </a:bodyPr>
               <a:lstStyle/>
               <a:p>
-                <a:pPr algn="l" marL="161925" indent="-161925">
+                <a:pPr marL="161925" indent="-161925" algn="l">
                   <a:buClr>
                     <a:schemeClr val="dk1"/>
                   </a:buClr>
@@ -15998,7 +13809,7 @@
               </a:bodyPr>
               <a:lstStyle/>
               <a:p>
-                <a:pPr algn="l" marL="161925" indent="-161925">
+                <a:pPr marL="161925" indent="-161925" algn="l">
                   <a:buClr>
                     <a:schemeClr val="dk1"/>
                   </a:buClr>
@@ -16045,7 +13856,7 @@
               </a:bodyPr>
               <a:lstStyle/>
               <a:p>
-                <a:pPr algn="l" marL="161925" indent="-161925">
+                <a:pPr marL="161925" indent="-161925" algn="l">
                   <a:buClr>
                     <a:schemeClr val="dk1"/>
                   </a:buClr>
@@ -16092,7 +13903,7 @@
               </a:bodyPr>
               <a:lstStyle/>
               <a:p>
-                <a:pPr algn="l" marL="161925" indent="-161925">
+                <a:pPr marL="161925" indent="-161925" algn="l">
                   <a:buClr>
                     <a:schemeClr val="dk1"/>
                   </a:buClr>
@@ -16137,6 +13948,13 @@
                 <a:noFill/>
               </a:ln>
             </p:spPr>
+            <p:txBody>
+              <a:bodyPr/>
+              <a:lstStyle/>
+              <a:p>
+                <a:endParaRPr lang="en-US"/>
+              </a:p>
+            </p:txBody>
           </p:sp>
           <p:sp>
             <p:nvSpPr>
@@ -16203,6 +14021,13 @@
             <a:noFill/>
           </a:ln>
         </p:spPr>
+        <p:txBody>
+          <a:bodyPr/>
+          <a:lstStyle/>
+          <a:p>
+            <a:endParaRPr lang="en-US"/>
+          </a:p>
+        </p:txBody>
       </p:sp>
       <p:sp>
         <p:nvSpPr>
@@ -16289,13 +14114,22 @@
   <p:clrMapOvr>
     <a:masterClrMapping/>
   </p:clrMapOvr>
-  <p:transition xmlns:p14="http://schemas.microsoft.com/office/powerpoint/2010/main" p14:dur="400">
-    <p:fade/>
-  </p:transition>
+  <mc:AlternateContent xmlns:mc="http://schemas.openxmlformats.org/markup-compatibility/2006">
+    <mc:Choice xmlns:p14="http://schemas.microsoft.com/office/powerpoint/2010/main" Requires="p14">
+      <p:transition p14:dur="400">
+        <p:fade/>
+      </p:transition>
+    </mc:Choice>
+    <mc:Fallback>
+      <p:transition>
+        <p:fade/>
+      </p:transition>
+    </mc:Fallback>
+  </mc:AlternateContent>
 </p:sld>
 </file>
 
-<file path=ppt/slides/slide21.xml><?xml version="1.0" encoding="utf-8"?>
+<file path=ppt/slides/slide2.xml><?xml version="1.0" encoding="utf-8"?>
 <p:sld xmlns:a="http://schemas.openxmlformats.org/drawingml/2006/main" xmlns:r="http://schemas.openxmlformats.org/officeDocument/2006/relationships" xmlns:p="http://schemas.openxmlformats.org/presentationml/2006/main">
   <p:cSld>
     <p:bg>
@@ -16329,7 +14163,1429 @@
           <p:nvPr/>
         </p:nvPicPr>
         <p:blipFill>
-          <a:blip r:embed="rId2"/>
+          <a:blip r:embed="rId3"/>
+          <a:stretch>
+            <a:fillRect/>
+          </a:stretch>
+        </p:blipFill>
+        <p:spPr>
+          <a:xfrm>
+            <a:off x="377741" y="285750"/>
+            <a:ext cx="1444792" cy="419100"/>
+          </a:xfrm>
+          <a:prstGeom prst="rect">
+            <a:avLst/>
+          </a:prstGeom>
+        </p:spPr>
+      </p:pic>
+      <p:grpSp>
+        <p:nvGrpSpPr>
+          <p:cNvPr id="5" name="Group 5"/>
+          <p:cNvGrpSpPr/>
+          <p:nvPr/>
+        </p:nvGrpSpPr>
+        <p:grpSpPr>
+          <a:xfrm>
+            <a:off x="709026" y="952500"/>
+            <a:ext cx="2487198" cy="4953000"/>
+            <a:chOff x="709026" y="952500"/>
+            <a:chExt cx="2487198" cy="4953000"/>
+          </a:xfrm>
+        </p:grpSpPr>
+        <p:pic>
+          <p:nvPicPr>
+            <p:cNvPr id="3" name="Image 3"/>
+            <p:cNvPicPr>
+              <a:picLocks noChangeAspect="1"/>
+            </p:cNvPicPr>
+            <p:nvPr/>
+          </p:nvPicPr>
+          <p:blipFill>
+            <a:blip r:embed="rId4"/>
+            <a:stretch>
+              <a:fillRect/>
+            </a:stretch>
+          </p:blipFill>
+          <p:spPr>
+            <a:xfrm>
+              <a:off x="709026" y="952500"/>
+              <a:ext cx="2487198" cy="4953000"/>
+            </a:xfrm>
+            <a:prstGeom prst="rect">
+              <a:avLst/>
+            </a:prstGeom>
+          </p:spPr>
+        </p:pic>
+        <p:sp>
+          <p:nvSpPr>
+            <p:cNvPr id="4" name="TextBox 4"/>
+            <p:cNvSpPr txBox="1"/>
+            <p:nvPr/>
+          </p:nvSpPr>
+          <p:spPr>
+            <a:xfrm>
+              <a:off x="1330361" y="3202305"/>
+              <a:ext cx="1244529" cy="410718"/>
+            </a:xfrm>
+            <a:prstGeom prst="rect">
+              <a:avLst/>
+            </a:prstGeom>
+            <a:noFill/>
+            <a:ln>
+              <a:noFill/>
+            </a:ln>
+          </p:spPr>
+          <p:txBody>
+            <a:bodyPr wrap="none" lIns="0" tIns="0" rIns="0" bIns="0" anchor="t" anchorCtr="0">
+              <a:spAutoFit/>
+            </a:bodyPr>
+            <a:lstStyle/>
+            <a:p>
+              <a:pPr algn="ctr"/>
+              <a:r>
+                <a:rPr lang="en-US" sz="2100" b="1" dirty="0">
+                  <a:solidFill>
+                    <a:schemeClr val="accent1"/>
+                  </a:solidFill>
+                  <a:latin typeface="+mn-lt"/>
+                  <a:ea typeface="+mn-ea"/>
+                  <a:cs typeface="+mn-cs"/>
+                </a:rPr>
+                <a:t>NỘI DUNG</a:t>
+              </a:r>
+            </a:p>
+          </p:txBody>
+        </p:sp>
+      </p:grpSp>
+      <p:grpSp>
+        <p:nvGrpSpPr>
+          <p:cNvPr id="34" name="Group 34"/>
+          <p:cNvGrpSpPr/>
+          <p:nvPr/>
+        </p:nvGrpSpPr>
+        <p:grpSpPr>
+          <a:xfrm>
+            <a:off x="3743325" y="1371600"/>
+            <a:ext cx="5849993" cy="3489198"/>
+            <a:chOff x="3743325" y="1371600"/>
+            <a:chExt cx="5849993" cy="3489198"/>
+          </a:xfrm>
+        </p:grpSpPr>
+        <p:grpSp>
+          <p:nvGrpSpPr>
+            <p:cNvPr id="12" name="Group 12"/>
+            <p:cNvGrpSpPr/>
+            <p:nvPr/>
+          </p:nvGrpSpPr>
+          <p:grpSpPr>
+            <a:xfrm>
+              <a:off x="3743325" y="1371600"/>
+              <a:ext cx="5849993" cy="488823"/>
+              <a:chOff x="3743325" y="1371600"/>
+              <a:chExt cx="5849993" cy="488823"/>
+            </a:xfrm>
+          </p:grpSpPr>
+          <p:sp>
+            <p:nvSpPr>
+              <p:cNvPr id="6" name="Ellipse 6"/>
+              <p:cNvSpPr/>
+              <p:nvPr/>
+            </p:nvSpPr>
+            <p:spPr>
+              <a:xfrm>
+                <a:off x="3743325" y="1552575"/>
+                <a:ext cx="76200" cy="76200"/>
+              </a:xfrm>
+              <a:prstGeom prst="ellipse">
+                <a:avLst/>
+              </a:prstGeom>
+              <a:solidFill>
+                <a:schemeClr val="accent1"/>
+              </a:solidFill>
+              <a:ln>
+                <a:noFill/>
+              </a:ln>
+            </p:spPr>
+            <p:txBody>
+              <a:bodyPr/>
+              <a:lstStyle/>
+              <a:p>
+                <a:endParaRPr lang="en-US"/>
+              </a:p>
+            </p:txBody>
+          </p:sp>
+          <p:sp>
+            <p:nvSpPr>
+              <p:cNvPr id="7" name="Line 7"/>
+              <p:cNvSpPr/>
+              <p:nvPr/>
+            </p:nvSpPr>
+            <p:spPr>
+              <a:xfrm>
+                <a:off x="3819525" y="1590675"/>
+                <a:ext cx="180975" cy="9525"/>
+              </a:xfrm>
+              <a:custGeom>
+                <a:avLst/>
+                <a:gdLst/>
+                <a:ahLst/>
+                <a:cxnLst/>
+                <a:rect l="l" t="t" r="r" b="b"/>
+                <a:pathLst>
+                  <a:path w="180975" h="9525">
+                    <a:moveTo>
+                      <a:pt x="0" y="0"/>
+                    </a:moveTo>
+                    <a:lnTo>
+                      <a:pt x="180975" y="0"/>
+                    </a:lnTo>
+                  </a:path>
+                </a:pathLst>
+              </a:custGeom>
+              <a:noFill/>
+              <a:ln w="19050">
+                <a:solidFill>
+                  <a:schemeClr val="accent1"/>
+                </a:solidFill>
+              </a:ln>
+            </p:spPr>
+            <p:txBody>
+              <a:bodyPr/>
+              <a:lstStyle/>
+              <a:p>
+                <a:endParaRPr lang="en-US"/>
+              </a:p>
+            </p:txBody>
+          </p:sp>
+          <p:sp>
+            <p:nvSpPr>
+              <p:cNvPr id="8" name="Freeform 8"/>
+              <p:cNvSpPr/>
+              <p:nvPr/>
+            </p:nvSpPr>
+            <p:spPr>
+              <a:xfrm>
+                <a:off x="4000500" y="1371600"/>
+                <a:ext cx="1238250" cy="438150"/>
+              </a:xfrm>
+              <a:custGeom>
+                <a:avLst/>
+                <a:gdLst/>
+                <a:ahLst/>
+                <a:cxnLst/>
+                <a:rect l="l" t="t" r="r" b="b"/>
+                <a:pathLst>
+                  <a:path w="1238250" h="438150">
+                    <a:moveTo>
+                      <a:pt x="95250" y="0"/>
+                    </a:moveTo>
+                    <a:lnTo>
+                      <a:pt x="1143000" y="0"/>
+                    </a:lnTo>
+                    <a:lnTo>
+                      <a:pt x="1238250" y="95250"/>
+                    </a:lnTo>
+                    <a:lnTo>
+                      <a:pt x="1238250" y="342900"/>
+                    </a:lnTo>
+                    <a:lnTo>
+                      <a:pt x="1143000" y="438150"/>
+                    </a:lnTo>
+                    <a:lnTo>
+                      <a:pt x="95250" y="438150"/>
+                    </a:lnTo>
+                    <a:lnTo>
+                      <a:pt x="0" y="342900"/>
+                    </a:lnTo>
+                    <a:lnTo>
+                      <a:pt x="0" y="95250"/>
+                    </a:lnTo>
+                    <a:close/>
+                  </a:path>
+                </a:pathLst>
+              </a:custGeom>
+              <a:solidFill>
+                <a:schemeClr val="lt1"/>
+              </a:solidFill>
+              <a:ln w="19050">
+                <a:solidFill>
+                  <a:schemeClr val="accent3"/>
+                </a:solidFill>
+              </a:ln>
+            </p:spPr>
+            <p:txBody>
+              <a:bodyPr/>
+              <a:lstStyle/>
+              <a:p>
+                <a:endParaRPr lang="en-US"/>
+              </a:p>
+            </p:txBody>
+          </p:sp>
+          <p:sp>
+            <p:nvSpPr>
+              <p:cNvPr id="9" name="Freeform 9"/>
+              <p:cNvSpPr/>
+              <p:nvPr/>
+            </p:nvSpPr>
+            <p:spPr>
+              <a:xfrm>
+                <a:off x="5000625" y="1371600"/>
+                <a:ext cx="161925" cy="438150"/>
+              </a:xfrm>
+              <a:custGeom>
+                <a:avLst/>
+                <a:gdLst/>
+                <a:ahLst/>
+                <a:cxnLst/>
+                <a:rect l="l" t="t" r="r" b="b"/>
+                <a:pathLst>
+                  <a:path w="161925" h="438150">
+                    <a:moveTo>
+                      <a:pt x="0" y="0"/>
+                    </a:moveTo>
+                    <a:lnTo>
+                      <a:pt x="76200" y="76200"/>
+                    </a:lnTo>
+                    <a:moveTo>
+                      <a:pt x="85725" y="0"/>
+                    </a:moveTo>
+                    <a:lnTo>
+                      <a:pt x="161925" y="76200"/>
+                    </a:lnTo>
+                    <a:moveTo>
+                      <a:pt x="0" y="438150"/>
+                    </a:moveTo>
+                    <a:lnTo>
+                      <a:pt x="76200" y="361950"/>
+                    </a:lnTo>
+                    <a:moveTo>
+                      <a:pt x="85725" y="438150"/>
+                    </a:moveTo>
+                    <a:lnTo>
+                      <a:pt x="161925" y="361950"/>
+                    </a:lnTo>
+                  </a:path>
+                </a:pathLst>
+              </a:custGeom>
+              <a:solidFill>
+                <a:schemeClr val="accent1"/>
+              </a:solidFill>
+              <a:ln w="19050">
+                <a:solidFill>
+                  <a:schemeClr val="accent1"/>
+                </a:solidFill>
+              </a:ln>
+            </p:spPr>
+            <p:txBody>
+              <a:bodyPr/>
+              <a:lstStyle/>
+              <a:p>
+                <a:endParaRPr lang="en-US"/>
+              </a:p>
+            </p:txBody>
+          </p:sp>
+          <p:sp>
+            <p:nvSpPr>
+              <p:cNvPr id="10" name="TextBox 10"/>
+              <p:cNvSpPr txBox="1"/>
+              <p:nvPr/>
+            </p:nvSpPr>
+            <p:spPr>
+              <a:xfrm>
+                <a:off x="4410570" y="1463040"/>
+                <a:ext cx="418109" cy="352044"/>
+              </a:xfrm>
+              <a:prstGeom prst="rect">
+                <a:avLst/>
+              </a:prstGeom>
+              <a:noFill/>
+              <a:ln>
+                <a:noFill/>
+              </a:ln>
+            </p:spPr>
+            <p:txBody>
+              <a:bodyPr wrap="none" lIns="0" tIns="0" rIns="0" bIns="0" anchor="t" anchorCtr="0">
+                <a:spAutoFit/>
+              </a:bodyPr>
+              <a:lstStyle/>
+              <a:p>
+                <a:pPr algn="ctr"/>
+                <a:r>
+                  <a:rPr lang="en-US" sz="1800" dirty="0">
+                    <a:solidFill>
+                      <a:schemeClr val="accent1"/>
+                    </a:solidFill>
+                    <a:latin typeface="+mn-lt"/>
+                    <a:ea typeface="+mn-ea"/>
+                    <a:cs typeface="+mn-cs"/>
+                  </a:rPr>
+                  <a:t>01.</a:t>
+                </a:r>
+              </a:p>
+            </p:txBody>
+          </p:sp>
+          <p:sp>
+            <p:nvSpPr>
+              <p:cNvPr id="11" name="TextBox 11"/>
+              <p:cNvSpPr txBox="1"/>
+              <p:nvPr/>
+            </p:nvSpPr>
+            <p:spPr>
+              <a:xfrm>
+                <a:off x="5561457" y="1449705"/>
+                <a:ext cx="4031861" cy="410718"/>
+              </a:xfrm>
+              <a:prstGeom prst="rect">
+                <a:avLst/>
+              </a:prstGeom>
+              <a:noFill/>
+              <a:ln>
+                <a:noFill/>
+              </a:ln>
+            </p:spPr>
+            <p:txBody>
+              <a:bodyPr wrap="none" lIns="0" tIns="0" rIns="0" bIns="0" anchor="t" anchorCtr="0">
+                <a:spAutoFit/>
+              </a:bodyPr>
+              <a:lstStyle/>
+              <a:p>
+                <a:pPr algn="l"/>
+                <a:r>
+                  <a:rPr lang="en-US" sz="2100" dirty="0">
+                    <a:solidFill>
+                      <a:schemeClr val="accent1"/>
+                    </a:solidFill>
+                    <a:latin typeface="+mn-lt"/>
+                    <a:ea typeface="+mn-ea"/>
+                    <a:cs typeface="+mn-cs"/>
+                  </a:rPr>
+                  <a:t>Các dự án tham gia và kết quả</a:t>
+                </a:r>
+              </a:p>
+            </p:txBody>
+          </p:sp>
+        </p:grpSp>
+        <p:grpSp>
+          <p:nvGrpSpPr>
+            <p:cNvPr id="19" name="Group 19"/>
+            <p:cNvGrpSpPr/>
+            <p:nvPr/>
+          </p:nvGrpSpPr>
+          <p:grpSpPr>
+            <a:xfrm>
+              <a:off x="3743325" y="2371725"/>
+              <a:ext cx="5416067" cy="488823"/>
+              <a:chOff x="3743325" y="2371725"/>
+              <a:chExt cx="5416067" cy="488823"/>
+            </a:xfrm>
+          </p:grpSpPr>
+          <p:sp>
+            <p:nvSpPr>
+              <p:cNvPr id="13" name="Ellipse 13"/>
+              <p:cNvSpPr/>
+              <p:nvPr/>
+            </p:nvSpPr>
+            <p:spPr>
+              <a:xfrm>
+                <a:off x="3743325" y="2552700"/>
+                <a:ext cx="76200" cy="76200"/>
+              </a:xfrm>
+              <a:prstGeom prst="ellipse">
+                <a:avLst/>
+              </a:prstGeom>
+              <a:solidFill>
+                <a:schemeClr val="accent1"/>
+              </a:solidFill>
+              <a:ln>
+                <a:noFill/>
+              </a:ln>
+            </p:spPr>
+            <p:txBody>
+              <a:bodyPr/>
+              <a:lstStyle/>
+              <a:p>
+                <a:endParaRPr lang="en-US"/>
+              </a:p>
+            </p:txBody>
+          </p:sp>
+          <p:sp>
+            <p:nvSpPr>
+              <p:cNvPr id="14" name="Line 14"/>
+              <p:cNvSpPr/>
+              <p:nvPr/>
+            </p:nvSpPr>
+            <p:spPr>
+              <a:xfrm>
+                <a:off x="3819525" y="2590800"/>
+                <a:ext cx="180975" cy="9525"/>
+              </a:xfrm>
+              <a:custGeom>
+                <a:avLst/>
+                <a:gdLst/>
+                <a:ahLst/>
+                <a:cxnLst/>
+                <a:rect l="l" t="t" r="r" b="b"/>
+                <a:pathLst>
+                  <a:path w="180975" h="9525">
+                    <a:moveTo>
+                      <a:pt x="0" y="0"/>
+                    </a:moveTo>
+                    <a:lnTo>
+                      <a:pt x="180975" y="0"/>
+                    </a:lnTo>
+                  </a:path>
+                </a:pathLst>
+              </a:custGeom>
+              <a:noFill/>
+              <a:ln w="19050">
+                <a:solidFill>
+                  <a:schemeClr val="accent1"/>
+                </a:solidFill>
+              </a:ln>
+            </p:spPr>
+            <p:txBody>
+              <a:bodyPr/>
+              <a:lstStyle/>
+              <a:p>
+                <a:endParaRPr lang="en-US"/>
+              </a:p>
+            </p:txBody>
+          </p:sp>
+          <p:sp>
+            <p:nvSpPr>
+              <p:cNvPr id="15" name="Freeform 15"/>
+              <p:cNvSpPr/>
+              <p:nvPr/>
+            </p:nvSpPr>
+            <p:spPr>
+              <a:xfrm>
+                <a:off x="4000500" y="2371725"/>
+                <a:ext cx="1238250" cy="438150"/>
+              </a:xfrm>
+              <a:custGeom>
+                <a:avLst/>
+                <a:gdLst/>
+                <a:ahLst/>
+                <a:cxnLst/>
+                <a:rect l="l" t="t" r="r" b="b"/>
+                <a:pathLst>
+                  <a:path w="1238250" h="438150">
+                    <a:moveTo>
+                      <a:pt x="95250" y="0"/>
+                    </a:moveTo>
+                    <a:lnTo>
+                      <a:pt x="1143000" y="0"/>
+                    </a:lnTo>
+                    <a:lnTo>
+                      <a:pt x="1238250" y="95250"/>
+                    </a:lnTo>
+                    <a:lnTo>
+                      <a:pt x="1238250" y="342900"/>
+                    </a:lnTo>
+                    <a:lnTo>
+                      <a:pt x="1143000" y="438150"/>
+                    </a:lnTo>
+                    <a:lnTo>
+                      <a:pt x="95250" y="438150"/>
+                    </a:lnTo>
+                    <a:lnTo>
+                      <a:pt x="0" y="342900"/>
+                    </a:lnTo>
+                    <a:lnTo>
+                      <a:pt x="0" y="95250"/>
+                    </a:lnTo>
+                    <a:close/>
+                  </a:path>
+                </a:pathLst>
+              </a:custGeom>
+              <a:solidFill>
+                <a:schemeClr val="lt1"/>
+              </a:solidFill>
+              <a:ln w="19050">
+                <a:solidFill>
+                  <a:schemeClr val="accent3"/>
+                </a:solidFill>
+              </a:ln>
+            </p:spPr>
+            <p:txBody>
+              <a:bodyPr/>
+              <a:lstStyle/>
+              <a:p>
+                <a:endParaRPr lang="en-US"/>
+              </a:p>
+            </p:txBody>
+          </p:sp>
+          <p:sp>
+            <p:nvSpPr>
+              <p:cNvPr id="16" name="Freeform 16"/>
+              <p:cNvSpPr/>
+              <p:nvPr/>
+            </p:nvSpPr>
+            <p:spPr>
+              <a:xfrm>
+                <a:off x="5000625" y="2371725"/>
+                <a:ext cx="161925" cy="438150"/>
+              </a:xfrm>
+              <a:custGeom>
+                <a:avLst/>
+                <a:gdLst/>
+                <a:ahLst/>
+                <a:cxnLst/>
+                <a:rect l="l" t="t" r="r" b="b"/>
+                <a:pathLst>
+                  <a:path w="161925" h="438150">
+                    <a:moveTo>
+                      <a:pt x="0" y="0"/>
+                    </a:moveTo>
+                    <a:lnTo>
+                      <a:pt x="76200" y="76200"/>
+                    </a:lnTo>
+                    <a:moveTo>
+                      <a:pt x="85725" y="0"/>
+                    </a:moveTo>
+                    <a:lnTo>
+                      <a:pt x="161925" y="76200"/>
+                    </a:lnTo>
+                    <a:moveTo>
+                      <a:pt x="0" y="438150"/>
+                    </a:moveTo>
+                    <a:lnTo>
+                      <a:pt x="76200" y="361950"/>
+                    </a:lnTo>
+                    <a:moveTo>
+                      <a:pt x="85725" y="438150"/>
+                    </a:moveTo>
+                    <a:lnTo>
+                      <a:pt x="161925" y="361950"/>
+                    </a:lnTo>
+                  </a:path>
+                </a:pathLst>
+              </a:custGeom>
+              <a:solidFill>
+                <a:schemeClr val="accent1"/>
+              </a:solidFill>
+              <a:ln w="19050">
+                <a:solidFill>
+                  <a:schemeClr val="accent1"/>
+                </a:solidFill>
+              </a:ln>
+            </p:spPr>
+            <p:txBody>
+              <a:bodyPr/>
+              <a:lstStyle/>
+              <a:p>
+                <a:endParaRPr lang="en-US"/>
+              </a:p>
+            </p:txBody>
+          </p:sp>
+          <p:sp>
+            <p:nvSpPr>
+              <p:cNvPr id="17" name="TextBox 17"/>
+              <p:cNvSpPr txBox="1"/>
+              <p:nvPr/>
+            </p:nvSpPr>
+            <p:spPr>
+              <a:xfrm>
+                <a:off x="4410570" y="2463165"/>
+                <a:ext cx="418109" cy="352044"/>
+              </a:xfrm>
+              <a:prstGeom prst="rect">
+                <a:avLst/>
+              </a:prstGeom>
+              <a:noFill/>
+              <a:ln>
+                <a:noFill/>
+              </a:ln>
+            </p:spPr>
+            <p:txBody>
+              <a:bodyPr wrap="none" lIns="0" tIns="0" rIns="0" bIns="0" anchor="t" anchorCtr="0">
+                <a:spAutoFit/>
+              </a:bodyPr>
+              <a:lstStyle/>
+              <a:p>
+                <a:pPr algn="ctr"/>
+                <a:r>
+                  <a:rPr lang="en-US" sz="1800" dirty="0">
+                    <a:solidFill>
+                      <a:schemeClr val="accent1"/>
+                    </a:solidFill>
+                    <a:latin typeface="+mn-lt"/>
+                    <a:ea typeface="+mn-ea"/>
+                    <a:cs typeface="+mn-cs"/>
+                  </a:rPr>
+                  <a:t>02.</a:t>
+                </a:r>
+              </a:p>
+            </p:txBody>
+          </p:sp>
+          <p:sp>
+            <p:nvSpPr>
+              <p:cNvPr id="18" name="TextBox 18"/>
+              <p:cNvSpPr txBox="1"/>
+              <p:nvPr/>
+            </p:nvSpPr>
+            <p:spPr>
+              <a:xfrm>
+                <a:off x="5561457" y="2449830"/>
+                <a:ext cx="3597935" cy="410718"/>
+              </a:xfrm>
+              <a:prstGeom prst="rect">
+                <a:avLst/>
+              </a:prstGeom>
+              <a:noFill/>
+              <a:ln>
+                <a:noFill/>
+              </a:ln>
+            </p:spPr>
+            <p:txBody>
+              <a:bodyPr wrap="none" lIns="0" tIns="0" rIns="0" bIns="0" anchor="t" anchorCtr="0">
+                <a:spAutoFit/>
+              </a:bodyPr>
+              <a:lstStyle/>
+              <a:p>
+                <a:pPr algn="l"/>
+                <a:r>
+                  <a:rPr lang="en-US" sz="2100" dirty="0">
+                    <a:solidFill>
+                      <a:schemeClr val="accent1"/>
+                    </a:solidFill>
+                    <a:latin typeface="+mn-lt"/>
+                    <a:ea typeface="+mn-ea"/>
+                    <a:cs typeface="+mn-cs"/>
+                  </a:rPr>
+                  <a:t>Sử dụng AI trong công việc</a:t>
+                </a:r>
+              </a:p>
+            </p:txBody>
+          </p:sp>
+        </p:grpSp>
+        <p:grpSp>
+          <p:nvGrpSpPr>
+            <p:cNvPr id="26" name="Group 26"/>
+            <p:cNvGrpSpPr/>
+            <p:nvPr/>
+          </p:nvGrpSpPr>
+          <p:grpSpPr>
+            <a:xfrm>
+              <a:off x="3743325" y="3371850"/>
+              <a:ext cx="5454120" cy="488823"/>
+              <a:chOff x="3743325" y="3371850"/>
+              <a:chExt cx="5454120" cy="488823"/>
+            </a:xfrm>
+          </p:grpSpPr>
+          <p:sp>
+            <p:nvSpPr>
+              <p:cNvPr id="20" name="Ellipse 20"/>
+              <p:cNvSpPr/>
+              <p:nvPr/>
+            </p:nvSpPr>
+            <p:spPr>
+              <a:xfrm>
+                <a:off x="3743325" y="3552825"/>
+                <a:ext cx="76200" cy="76200"/>
+              </a:xfrm>
+              <a:prstGeom prst="ellipse">
+                <a:avLst/>
+              </a:prstGeom>
+              <a:solidFill>
+                <a:schemeClr val="accent1"/>
+              </a:solidFill>
+              <a:ln>
+                <a:noFill/>
+              </a:ln>
+            </p:spPr>
+            <p:txBody>
+              <a:bodyPr/>
+              <a:lstStyle/>
+              <a:p>
+                <a:endParaRPr lang="en-US"/>
+              </a:p>
+            </p:txBody>
+          </p:sp>
+          <p:sp>
+            <p:nvSpPr>
+              <p:cNvPr id="21" name="Line 21"/>
+              <p:cNvSpPr/>
+              <p:nvPr/>
+            </p:nvSpPr>
+            <p:spPr>
+              <a:xfrm>
+                <a:off x="3819525" y="3590925"/>
+                <a:ext cx="180975" cy="9525"/>
+              </a:xfrm>
+              <a:custGeom>
+                <a:avLst/>
+                <a:gdLst/>
+                <a:ahLst/>
+                <a:cxnLst/>
+                <a:rect l="l" t="t" r="r" b="b"/>
+                <a:pathLst>
+                  <a:path w="180975" h="9525">
+                    <a:moveTo>
+                      <a:pt x="0" y="0"/>
+                    </a:moveTo>
+                    <a:lnTo>
+                      <a:pt x="180975" y="0"/>
+                    </a:lnTo>
+                  </a:path>
+                </a:pathLst>
+              </a:custGeom>
+              <a:noFill/>
+              <a:ln w="19050">
+                <a:solidFill>
+                  <a:schemeClr val="accent1"/>
+                </a:solidFill>
+              </a:ln>
+            </p:spPr>
+            <p:txBody>
+              <a:bodyPr/>
+              <a:lstStyle/>
+              <a:p>
+                <a:endParaRPr lang="en-US"/>
+              </a:p>
+            </p:txBody>
+          </p:sp>
+          <p:sp>
+            <p:nvSpPr>
+              <p:cNvPr id="22" name="Freeform 22"/>
+              <p:cNvSpPr/>
+              <p:nvPr/>
+            </p:nvSpPr>
+            <p:spPr>
+              <a:xfrm>
+                <a:off x="4000500" y="3371850"/>
+                <a:ext cx="1238250" cy="438150"/>
+              </a:xfrm>
+              <a:custGeom>
+                <a:avLst/>
+                <a:gdLst/>
+                <a:ahLst/>
+                <a:cxnLst/>
+                <a:rect l="l" t="t" r="r" b="b"/>
+                <a:pathLst>
+                  <a:path w="1238250" h="438150">
+                    <a:moveTo>
+                      <a:pt x="95250" y="0"/>
+                    </a:moveTo>
+                    <a:lnTo>
+                      <a:pt x="1143000" y="0"/>
+                    </a:lnTo>
+                    <a:lnTo>
+                      <a:pt x="1238250" y="95250"/>
+                    </a:lnTo>
+                    <a:lnTo>
+                      <a:pt x="1238250" y="342900"/>
+                    </a:lnTo>
+                    <a:lnTo>
+                      <a:pt x="1143000" y="438150"/>
+                    </a:lnTo>
+                    <a:lnTo>
+                      <a:pt x="95250" y="438150"/>
+                    </a:lnTo>
+                    <a:lnTo>
+                      <a:pt x="0" y="342900"/>
+                    </a:lnTo>
+                    <a:lnTo>
+                      <a:pt x="0" y="95250"/>
+                    </a:lnTo>
+                    <a:close/>
+                  </a:path>
+                </a:pathLst>
+              </a:custGeom>
+              <a:solidFill>
+                <a:schemeClr val="lt1"/>
+              </a:solidFill>
+              <a:ln w="19050">
+                <a:solidFill>
+                  <a:schemeClr val="accent3"/>
+                </a:solidFill>
+              </a:ln>
+            </p:spPr>
+            <p:txBody>
+              <a:bodyPr/>
+              <a:lstStyle/>
+              <a:p>
+                <a:endParaRPr lang="en-US"/>
+              </a:p>
+            </p:txBody>
+          </p:sp>
+          <p:sp>
+            <p:nvSpPr>
+              <p:cNvPr id="23" name="Freeform 23"/>
+              <p:cNvSpPr/>
+              <p:nvPr/>
+            </p:nvSpPr>
+            <p:spPr>
+              <a:xfrm>
+                <a:off x="5000625" y="3371850"/>
+                <a:ext cx="161925" cy="438150"/>
+              </a:xfrm>
+              <a:custGeom>
+                <a:avLst/>
+                <a:gdLst/>
+                <a:ahLst/>
+                <a:cxnLst/>
+                <a:rect l="l" t="t" r="r" b="b"/>
+                <a:pathLst>
+                  <a:path w="161925" h="438150">
+                    <a:moveTo>
+                      <a:pt x="0" y="0"/>
+                    </a:moveTo>
+                    <a:lnTo>
+                      <a:pt x="76200" y="76200"/>
+                    </a:lnTo>
+                    <a:moveTo>
+                      <a:pt x="85725" y="0"/>
+                    </a:moveTo>
+                    <a:lnTo>
+                      <a:pt x="161925" y="76200"/>
+                    </a:lnTo>
+                    <a:moveTo>
+                      <a:pt x="0" y="438150"/>
+                    </a:moveTo>
+                    <a:lnTo>
+                      <a:pt x="76200" y="361950"/>
+                    </a:lnTo>
+                    <a:moveTo>
+                      <a:pt x="85725" y="438150"/>
+                    </a:moveTo>
+                    <a:lnTo>
+                      <a:pt x="161925" y="361950"/>
+                    </a:lnTo>
+                  </a:path>
+                </a:pathLst>
+              </a:custGeom>
+              <a:solidFill>
+                <a:schemeClr val="accent1"/>
+              </a:solidFill>
+              <a:ln w="19050">
+                <a:solidFill>
+                  <a:schemeClr val="accent1"/>
+                </a:solidFill>
+              </a:ln>
+            </p:spPr>
+            <p:txBody>
+              <a:bodyPr/>
+              <a:lstStyle/>
+              <a:p>
+                <a:endParaRPr lang="en-US"/>
+              </a:p>
+            </p:txBody>
+          </p:sp>
+          <p:sp>
+            <p:nvSpPr>
+              <p:cNvPr id="24" name="TextBox 24"/>
+              <p:cNvSpPr txBox="1"/>
+              <p:nvPr/>
+            </p:nvSpPr>
+            <p:spPr>
+              <a:xfrm>
+                <a:off x="4410570" y="3463290"/>
+                <a:ext cx="418109" cy="352044"/>
+              </a:xfrm>
+              <a:prstGeom prst="rect">
+                <a:avLst/>
+              </a:prstGeom>
+              <a:noFill/>
+              <a:ln>
+                <a:noFill/>
+              </a:ln>
+            </p:spPr>
+            <p:txBody>
+              <a:bodyPr wrap="none" lIns="0" tIns="0" rIns="0" bIns="0" anchor="t" anchorCtr="0">
+                <a:spAutoFit/>
+              </a:bodyPr>
+              <a:lstStyle/>
+              <a:p>
+                <a:pPr algn="ctr"/>
+                <a:r>
+                  <a:rPr lang="en-US" sz="1800" dirty="0">
+                    <a:solidFill>
+                      <a:schemeClr val="accent1"/>
+                    </a:solidFill>
+                    <a:latin typeface="+mn-lt"/>
+                    <a:ea typeface="+mn-ea"/>
+                    <a:cs typeface="+mn-cs"/>
+                  </a:rPr>
+                  <a:t>03.</a:t>
+                </a:r>
+              </a:p>
+            </p:txBody>
+          </p:sp>
+          <p:sp>
+            <p:nvSpPr>
+              <p:cNvPr id="25" name="TextBox 25"/>
+              <p:cNvSpPr txBox="1"/>
+              <p:nvPr/>
+            </p:nvSpPr>
+            <p:spPr>
+              <a:xfrm>
+                <a:off x="5561457" y="3449955"/>
+                <a:ext cx="3635988" cy="410718"/>
+              </a:xfrm>
+              <a:prstGeom prst="rect">
+                <a:avLst/>
+              </a:prstGeom>
+              <a:noFill/>
+              <a:ln>
+                <a:noFill/>
+              </a:ln>
+            </p:spPr>
+            <p:txBody>
+              <a:bodyPr wrap="none" lIns="0" tIns="0" rIns="0" bIns="0" anchor="t" anchorCtr="0">
+                <a:spAutoFit/>
+              </a:bodyPr>
+              <a:lstStyle/>
+              <a:p>
+                <a:pPr algn="l"/>
+                <a:r>
+                  <a:rPr lang="en-US" sz="2100" dirty="0">
+                    <a:solidFill>
+                      <a:schemeClr val="accent1"/>
+                    </a:solidFill>
+                    <a:latin typeface="+mn-lt"/>
+                    <a:ea typeface="+mn-ea"/>
+                    <a:cs typeface="+mn-cs"/>
+                  </a:rPr>
+                  <a:t>Tự đánh giá ưu, nhược điểm</a:t>
+                </a:r>
+              </a:p>
+            </p:txBody>
+          </p:sp>
+        </p:grpSp>
+        <p:grpSp>
+          <p:nvGrpSpPr>
+            <p:cNvPr id="33" name="Group 33"/>
+            <p:cNvGrpSpPr/>
+            <p:nvPr/>
+          </p:nvGrpSpPr>
+          <p:grpSpPr>
+            <a:xfrm>
+              <a:off x="3743325" y="4371975"/>
+              <a:ext cx="4039948" cy="488823"/>
+              <a:chOff x="3743325" y="4371975"/>
+              <a:chExt cx="4039948" cy="488823"/>
+            </a:xfrm>
+          </p:grpSpPr>
+          <p:sp>
+            <p:nvSpPr>
+              <p:cNvPr id="27" name="Ellipse 27"/>
+              <p:cNvSpPr/>
+              <p:nvPr/>
+            </p:nvSpPr>
+            <p:spPr>
+              <a:xfrm>
+                <a:off x="3743325" y="4552950"/>
+                <a:ext cx="76200" cy="76200"/>
+              </a:xfrm>
+              <a:prstGeom prst="ellipse">
+                <a:avLst/>
+              </a:prstGeom>
+              <a:solidFill>
+                <a:schemeClr val="accent1"/>
+              </a:solidFill>
+              <a:ln>
+                <a:noFill/>
+              </a:ln>
+            </p:spPr>
+            <p:txBody>
+              <a:bodyPr/>
+              <a:lstStyle/>
+              <a:p>
+                <a:endParaRPr lang="en-US"/>
+              </a:p>
+            </p:txBody>
+          </p:sp>
+          <p:sp>
+            <p:nvSpPr>
+              <p:cNvPr id="28" name="Line 28"/>
+              <p:cNvSpPr/>
+              <p:nvPr/>
+            </p:nvSpPr>
+            <p:spPr>
+              <a:xfrm>
+                <a:off x="3819525" y="4591050"/>
+                <a:ext cx="180975" cy="9525"/>
+              </a:xfrm>
+              <a:custGeom>
+                <a:avLst/>
+                <a:gdLst/>
+                <a:ahLst/>
+                <a:cxnLst/>
+                <a:rect l="l" t="t" r="r" b="b"/>
+                <a:pathLst>
+                  <a:path w="180975" h="9525">
+                    <a:moveTo>
+                      <a:pt x="0" y="0"/>
+                    </a:moveTo>
+                    <a:lnTo>
+                      <a:pt x="180975" y="0"/>
+                    </a:lnTo>
+                  </a:path>
+                </a:pathLst>
+              </a:custGeom>
+              <a:noFill/>
+              <a:ln w="19050">
+                <a:solidFill>
+                  <a:schemeClr val="accent1"/>
+                </a:solidFill>
+              </a:ln>
+            </p:spPr>
+            <p:txBody>
+              <a:bodyPr/>
+              <a:lstStyle/>
+              <a:p>
+                <a:endParaRPr lang="en-US"/>
+              </a:p>
+            </p:txBody>
+          </p:sp>
+          <p:sp>
+            <p:nvSpPr>
+              <p:cNvPr id="29" name="Freeform 29"/>
+              <p:cNvSpPr/>
+              <p:nvPr/>
+            </p:nvSpPr>
+            <p:spPr>
+              <a:xfrm>
+                <a:off x="4000500" y="4371975"/>
+                <a:ext cx="1238250" cy="438150"/>
+              </a:xfrm>
+              <a:custGeom>
+                <a:avLst/>
+                <a:gdLst/>
+                <a:ahLst/>
+                <a:cxnLst/>
+                <a:rect l="l" t="t" r="r" b="b"/>
+                <a:pathLst>
+                  <a:path w="1238250" h="438150">
+                    <a:moveTo>
+                      <a:pt x="95250" y="0"/>
+                    </a:moveTo>
+                    <a:lnTo>
+                      <a:pt x="1143000" y="0"/>
+                    </a:lnTo>
+                    <a:lnTo>
+                      <a:pt x="1238250" y="95250"/>
+                    </a:lnTo>
+                    <a:lnTo>
+                      <a:pt x="1238250" y="342900"/>
+                    </a:lnTo>
+                    <a:lnTo>
+                      <a:pt x="1143000" y="438150"/>
+                    </a:lnTo>
+                    <a:lnTo>
+                      <a:pt x="95250" y="438150"/>
+                    </a:lnTo>
+                    <a:lnTo>
+                      <a:pt x="0" y="342900"/>
+                    </a:lnTo>
+                    <a:lnTo>
+                      <a:pt x="0" y="95250"/>
+                    </a:lnTo>
+                    <a:close/>
+                  </a:path>
+                </a:pathLst>
+              </a:custGeom>
+              <a:solidFill>
+                <a:schemeClr val="lt1"/>
+              </a:solidFill>
+              <a:ln w="19050">
+                <a:solidFill>
+                  <a:schemeClr val="accent3"/>
+                </a:solidFill>
+              </a:ln>
+            </p:spPr>
+            <p:txBody>
+              <a:bodyPr/>
+              <a:lstStyle/>
+              <a:p>
+                <a:endParaRPr lang="en-US"/>
+              </a:p>
+            </p:txBody>
+          </p:sp>
+          <p:sp>
+            <p:nvSpPr>
+              <p:cNvPr id="30" name="Freeform 30"/>
+              <p:cNvSpPr/>
+              <p:nvPr/>
+            </p:nvSpPr>
+            <p:spPr>
+              <a:xfrm>
+                <a:off x="5000625" y="4371975"/>
+                <a:ext cx="161925" cy="438150"/>
+              </a:xfrm>
+              <a:custGeom>
+                <a:avLst/>
+                <a:gdLst/>
+                <a:ahLst/>
+                <a:cxnLst/>
+                <a:rect l="l" t="t" r="r" b="b"/>
+                <a:pathLst>
+                  <a:path w="161925" h="438150">
+                    <a:moveTo>
+                      <a:pt x="0" y="0"/>
+                    </a:moveTo>
+                    <a:lnTo>
+                      <a:pt x="76200" y="76200"/>
+                    </a:lnTo>
+                    <a:moveTo>
+                      <a:pt x="85725" y="0"/>
+                    </a:moveTo>
+                    <a:lnTo>
+                      <a:pt x="161925" y="76200"/>
+                    </a:lnTo>
+                    <a:moveTo>
+                      <a:pt x="0" y="438150"/>
+                    </a:moveTo>
+                    <a:lnTo>
+                      <a:pt x="76200" y="361950"/>
+                    </a:lnTo>
+                    <a:moveTo>
+                      <a:pt x="85725" y="438150"/>
+                    </a:moveTo>
+                    <a:lnTo>
+                      <a:pt x="161925" y="361950"/>
+                    </a:lnTo>
+                  </a:path>
+                </a:pathLst>
+              </a:custGeom>
+              <a:solidFill>
+                <a:schemeClr val="accent1"/>
+              </a:solidFill>
+              <a:ln w="19050">
+                <a:solidFill>
+                  <a:schemeClr val="accent1"/>
+                </a:solidFill>
+              </a:ln>
+            </p:spPr>
+            <p:txBody>
+              <a:bodyPr/>
+              <a:lstStyle/>
+              <a:p>
+                <a:endParaRPr lang="en-US"/>
+              </a:p>
+            </p:txBody>
+          </p:sp>
+          <p:sp>
+            <p:nvSpPr>
+              <p:cNvPr id="31" name="TextBox 31"/>
+              <p:cNvSpPr txBox="1"/>
+              <p:nvPr/>
+            </p:nvSpPr>
+            <p:spPr>
+              <a:xfrm>
+                <a:off x="4410570" y="4463415"/>
+                <a:ext cx="418109" cy="352044"/>
+              </a:xfrm>
+              <a:prstGeom prst="rect">
+                <a:avLst/>
+              </a:prstGeom>
+              <a:noFill/>
+              <a:ln>
+                <a:noFill/>
+              </a:ln>
+            </p:spPr>
+            <p:txBody>
+              <a:bodyPr wrap="none" lIns="0" tIns="0" rIns="0" bIns="0" anchor="t" anchorCtr="0">
+                <a:spAutoFit/>
+              </a:bodyPr>
+              <a:lstStyle/>
+              <a:p>
+                <a:pPr algn="ctr"/>
+                <a:r>
+                  <a:rPr lang="en-US" sz="1800" dirty="0">
+                    <a:solidFill>
+                      <a:schemeClr val="accent1"/>
+                    </a:solidFill>
+                    <a:latin typeface="+mn-lt"/>
+                    <a:ea typeface="+mn-ea"/>
+                    <a:cs typeface="+mn-cs"/>
+                  </a:rPr>
+                  <a:t>04.</a:t>
+                </a:r>
+              </a:p>
+            </p:txBody>
+          </p:sp>
+          <p:sp>
+            <p:nvSpPr>
+              <p:cNvPr id="32" name="TextBox 32"/>
+              <p:cNvSpPr txBox="1"/>
+              <p:nvPr/>
+            </p:nvSpPr>
+            <p:spPr>
+              <a:xfrm>
+                <a:off x="5561457" y="4450080"/>
+                <a:ext cx="2221816" cy="410718"/>
+              </a:xfrm>
+              <a:prstGeom prst="rect">
+                <a:avLst/>
+              </a:prstGeom>
+              <a:noFill/>
+              <a:ln>
+                <a:noFill/>
+              </a:ln>
+            </p:spPr>
+            <p:txBody>
+              <a:bodyPr wrap="none" lIns="0" tIns="0" rIns="0" bIns="0" anchor="t" anchorCtr="0">
+                <a:spAutoFit/>
+              </a:bodyPr>
+              <a:lstStyle/>
+              <a:p>
+                <a:pPr algn="l"/>
+                <a:r>
+                  <a:rPr lang="en-US" sz="2100" dirty="0">
+                    <a:solidFill>
+                      <a:schemeClr val="accent1"/>
+                    </a:solidFill>
+                    <a:latin typeface="+mn-lt"/>
+                    <a:ea typeface="+mn-ea"/>
+                    <a:cs typeface="+mn-cs"/>
+                  </a:rPr>
+                  <a:t>Mục tiêu sắp tới</a:t>
+                </a:r>
+              </a:p>
+            </p:txBody>
+          </p:sp>
+        </p:grpSp>
+      </p:grpSp>
+      <p:sp>
+        <p:nvSpPr>
+          <p:cNvPr id="35" name="Line 35"/>
+          <p:cNvSpPr/>
+          <p:nvPr/>
+        </p:nvSpPr>
+        <p:spPr>
+          <a:xfrm>
+            <a:off x="0" y="6515100"/>
+            <a:ext cx="12192000" cy="9525"/>
+          </a:xfrm>
+          <a:custGeom>
+            <a:avLst/>
+            <a:gdLst/>
+            <a:ahLst/>
+            <a:cxnLst/>
+            <a:rect l="l" t="t" r="r" b="b"/>
+            <a:pathLst>
+              <a:path w="12192000" h="9525">
+                <a:moveTo>
+                  <a:pt x="0" y="0"/>
+                </a:moveTo>
+                <a:lnTo>
+                  <a:pt x="12192000" y="0"/>
+                </a:lnTo>
+              </a:path>
+            </a:pathLst>
+          </a:custGeom>
+          <a:noFill/>
+          <a:ln w="9525">
+            <a:solidFill>
+              <a:srgbClr val="DDE6E1"/>
+            </a:solidFill>
+          </a:ln>
+        </p:spPr>
+        <p:txBody>
+          <a:bodyPr/>
+          <a:lstStyle/>
+          <a:p>
+            <a:endParaRPr lang="en-US"/>
+          </a:p>
+        </p:txBody>
+      </p:sp>
+      <p:sp>
+        <p:nvSpPr>
+          <p:cNvPr id="36" name="TextBox 36"/>
+          <p:cNvSpPr txBox="1"/>
+          <p:nvPr/>
+        </p:nvSpPr>
+        <p:spPr>
+          <a:xfrm>
+            <a:off x="11141640" y="6630352"/>
+            <a:ext cx="484194" cy="205359"/>
+          </a:xfrm>
+          <a:prstGeom prst="rect">
+            <a:avLst/>
+          </a:prstGeom>
+          <a:noFill/>
+          <a:ln>
+            <a:noFill/>
+          </a:ln>
+        </p:spPr>
+        <p:txBody>
+          <a:bodyPr wrap="none" lIns="0" tIns="0" rIns="0" bIns="0" anchor="t" anchorCtr="0">
+            <a:spAutoFit/>
+          </a:bodyPr>
+          <a:lstStyle/>
+          <a:p>
+            <a:pPr algn="r"/>
+            <a:r>
+              <a:rPr lang="en-US" sz="1050" dirty="0">
+                <a:solidFill>
+                  <a:srgbClr val="66706A"/>
+                </a:solidFill>
+                <a:latin typeface="+mn-lt"/>
+                <a:ea typeface="+mn-ea"/>
+                <a:cs typeface="+mn-cs"/>
+              </a:rPr>
+              <a:t>02 / 23</a:t>
+            </a:r>
+          </a:p>
+        </p:txBody>
+      </p:sp>
+    </p:spTree>
+  </p:cSld>
+  <p:clrMapOvr>
+    <a:masterClrMapping/>
+  </p:clrMapOvr>
+  <mc:AlternateContent xmlns:mc="http://schemas.openxmlformats.org/markup-compatibility/2006">
+    <mc:Choice xmlns:p14="http://schemas.microsoft.com/office/powerpoint/2010/main" Requires="p14">
+      <p:transition p14:dur="400">
+        <p:fade/>
+      </p:transition>
+    </mc:Choice>
+    <mc:Fallback>
+      <p:transition>
+        <p:fade/>
+      </p:transition>
+    </mc:Fallback>
+  </mc:AlternateContent>
+</p:sld>
+</file>
+
+<file path=ppt/slides/slide20.xml><?xml version="1.0" encoding="utf-8"?>
+<p:sld xmlns:a="http://schemas.openxmlformats.org/drawingml/2006/main" xmlns:r="http://schemas.openxmlformats.org/officeDocument/2006/relationships" xmlns:p="http://schemas.openxmlformats.org/presentationml/2006/main">
+  <p:cSld>
+    <p:bg>
+      <p:bgPr>
+        <a:solidFill>
+          <a:schemeClr val="lt1"/>
+        </a:solidFill>
+        <a:effectLst/>
+      </p:bgPr>
+    </p:bg>
+    <p:spTree>
+      <p:nvGrpSpPr>
+        <p:cNvPr id="1" name=""/>
+        <p:cNvGrpSpPr/>
+        <p:nvPr/>
+      </p:nvGrpSpPr>
+      <p:grpSpPr>
+        <a:xfrm>
+          <a:off x="0" y="0"/>
+          <a:ext cx="0" cy="0"/>
+          <a:chOff x="0" y="0"/>
+          <a:chExt cx="0" cy="0"/>
+        </a:xfrm>
+      </p:grpSpPr>
+      <p:pic>
+        <p:nvPicPr>
+          <p:cNvPr id="2" name="Image 2"/>
+          <p:cNvPicPr>
+            <a:picLocks noChangeAspect="1"/>
+          </p:cNvPicPr>
+          <p:nvPr/>
+        </p:nvPicPr>
+        <p:blipFill>
+          <a:blip r:embed="rId3"/>
           <a:stretch>
             <a:fillRect/>
           </a:stretch>
@@ -16435,6 +15691,13 @@
                 <a:noFill/>
               </a:ln>
             </p:spPr>
+            <p:txBody>
+              <a:bodyPr/>
+              <a:lstStyle/>
+              <a:p>
+                <a:endParaRPr lang="en-US"/>
+              </a:p>
+            </p:txBody>
           </p:sp>
           <p:sp>
             <p:nvSpPr>
@@ -16553,6 +15816,13 @@
                 </a:solidFill>
               </a:ln>
             </p:spPr>
+            <p:txBody>
+              <a:bodyPr/>
+              <a:lstStyle/>
+              <a:p>
+                <a:endParaRPr lang="en-US"/>
+              </a:p>
+            </p:txBody>
           </p:sp>
           <p:sp>
             <p:nvSpPr>
@@ -16593,6 +15863,13 @@
                 <a:noFill/>
               </a:ln>
             </p:spPr>
+            <p:txBody>
+              <a:bodyPr/>
+              <a:lstStyle/>
+              <a:p>
+                <a:endParaRPr lang="en-US"/>
+              </a:p>
+            </p:txBody>
           </p:sp>
           <p:sp>
             <p:nvSpPr>
@@ -16617,6 +15894,13 @@
                 <a:noFill/>
               </a:ln>
             </p:spPr>
+            <p:txBody>
+              <a:bodyPr/>
+              <a:lstStyle/>
+              <a:p>
+                <a:endParaRPr lang="en-US"/>
+              </a:p>
+            </p:txBody>
           </p:sp>
           <p:sp>
             <p:nvSpPr>
@@ -16736,6 +16020,13 @@
                 <a:noFill/>
               </a:ln>
             </p:spPr>
+            <p:txBody>
+              <a:bodyPr/>
+              <a:lstStyle/>
+              <a:p>
+                <a:endParaRPr lang="en-US"/>
+              </a:p>
+            </p:txBody>
           </p:sp>
           <p:sp>
             <p:nvSpPr>
@@ -16854,6 +16145,13 @@
                 </a:solidFill>
               </a:ln>
             </p:spPr>
+            <p:txBody>
+              <a:bodyPr/>
+              <a:lstStyle/>
+              <a:p>
+                <a:endParaRPr lang="en-US"/>
+              </a:p>
+            </p:txBody>
           </p:sp>
           <p:sp>
             <p:nvSpPr>
@@ -16894,6 +16192,13 @@
                 <a:noFill/>
               </a:ln>
             </p:spPr>
+            <p:txBody>
+              <a:bodyPr/>
+              <a:lstStyle/>
+              <a:p>
+                <a:endParaRPr lang="en-US"/>
+              </a:p>
+            </p:txBody>
           </p:sp>
           <p:sp>
             <p:nvSpPr>
@@ -16918,6 +16223,13 @@
                 <a:noFill/>
               </a:ln>
             </p:spPr>
+            <p:txBody>
+              <a:bodyPr/>
+              <a:lstStyle/>
+              <a:p>
+                <a:endParaRPr lang="en-US"/>
+              </a:p>
+            </p:txBody>
           </p:sp>
           <p:sp>
             <p:nvSpPr>
@@ -17037,6 +16349,13 @@
                 <a:noFill/>
               </a:ln>
             </p:spPr>
+            <p:txBody>
+              <a:bodyPr/>
+              <a:lstStyle/>
+              <a:p>
+                <a:endParaRPr lang="en-US"/>
+              </a:p>
+            </p:txBody>
           </p:sp>
           <p:sp>
             <p:nvSpPr>
@@ -17155,6 +16474,13 @@
                 </a:solidFill>
               </a:ln>
             </p:spPr>
+            <p:txBody>
+              <a:bodyPr/>
+              <a:lstStyle/>
+              <a:p>
+                <a:endParaRPr lang="en-US"/>
+              </a:p>
+            </p:txBody>
           </p:sp>
           <p:sp>
             <p:nvSpPr>
@@ -17195,6 +16521,13 @@
                 <a:noFill/>
               </a:ln>
             </p:spPr>
+            <p:txBody>
+              <a:bodyPr/>
+              <a:lstStyle/>
+              <a:p>
+                <a:endParaRPr lang="en-US"/>
+              </a:p>
+            </p:txBody>
           </p:sp>
           <p:sp>
             <p:nvSpPr>
@@ -17219,6 +16552,13 @@
                 <a:noFill/>
               </a:ln>
             </p:spPr>
+            <p:txBody>
+              <a:bodyPr/>
+              <a:lstStyle/>
+              <a:p>
+                <a:endParaRPr lang="en-US"/>
+              </a:p>
+            </p:txBody>
           </p:sp>
           <p:sp>
             <p:nvSpPr>
@@ -17338,6 +16678,13 @@
                 <a:noFill/>
               </a:ln>
             </p:spPr>
+            <p:txBody>
+              <a:bodyPr/>
+              <a:lstStyle/>
+              <a:p>
+                <a:endParaRPr lang="en-US"/>
+              </a:p>
+            </p:txBody>
           </p:sp>
           <p:sp>
             <p:nvSpPr>
@@ -17456,6 +16803,13 @@
                 </a:solidFill>
               </a:ln>
             </p:spPr>
+            <p:txBody>
+              <a:bodyPr/>
+              <a:lstStyle/>
+              <a:p>
+                <a:endParaRPr lang="en-US"/>
+              </a:p>
+            </p:txBody>
           </p:sp>
           <p:sp>
             <p:nvSpPr>
@@ -17496,6 +16850,13 @@
                 <a:noFill/>
               </a:ln>
             </p:spPr>
+            <p:txBody>
+              <a:bodyPr/>
+              <a:lstStyle/>
+              <a:p>
+                <a:endParaRPr lang="en-US"/>
+              </a:p>
+            </p:txBody>
           </p:sp>
           <p:sp>
             <p:nvSpPr>
@@ -17520,6 +16881,13 @@
                 <a:noFill/>
               </a:ln>
             </p:spPr>
+            <p:txBody>
+              <a:bodyPr/>
+              <a:lstStyle/>
+              <a:p>
+                <a:endParaRPr lang="en-US"/>
+              </a:p>
+            </p:txBody>
           </p:sp>
           <p:sp>
             <p:nvSpPr>
@@ -17648,13 +17016,22 @@
   <p:clrMapOvr>
     <a:masterClrMapping/>
   </p:clrMapOvr>
-  <p:transition xmlns:p14="http://schemas.microsoft.com/office/powerpoint/2010/main" p14:dur="400">
-    <p:fade/>
-  </p:transition>
+  <mc:AlternateContent xmlns:mc="http://schemas.openxmlformats.org/markup-compatibility/2006">
+    <mc:Choice xmlns:p14="http://schemas.microsoft.com/office/powerpoint/2010/main" Requires="p14">
+      <p:transition p14:dur="400">
+        <p:fade/>
+      </p:transition>
+    </mc:Choice>
+    <mc:Fallback>
+      <p:transition>
+        <p:fade/>
+      </p:transition>
+    </mc:Fallback>
+  </mc:AlternateContent>
 </p:sld>
 </file>
 
-<file path=ppt/slides/slide22.xml><?xml version="1.0" encoding="utf-8"?>
+<file path=ppt/slides/slide21.xml><?xml version="1.0" encoding="utf-8"?>
 <p:sld xmlns:a="http://schemas.openxmlformats.org/drawingml/2006/main" xmlns:r="http://schemas.openxmlformats.org/officeDocument/2006/relationships" xmlns:p="http://schemas.openxmlformats.org/presentationml/2006/main">
   <p:cSld>
     <p:bg>
@@ -17688,7 +17065,7 @@
           <p:nvPr/>
         </p:nvPicPr>
         <p:blipFill>
-          <a:blip r:embed="rId2"/>
+          <a:blip r:embed="rId3"/>
           <a:stretch>
             <a:fillRect/>
           </a:stretch>
@@ -17794,6 +17171,13 @@
                 <a:noFill/>
               </a:ln>
             </p:spPr>
+            <p:txBody>
+              <a:bodyPr/>
+              <a:lstStyle/>
+              <a:p>
+                <a:endParaRPr lang="en-US"/>
+              </a:p>
+            </p:txBody>
           </p:sp>
           <p:sp>
             <p:nvSpPr>
@@ -18020,6 +17404,13 @@
                 <a:noFill/>
               </a:ln>
             </p:spPr>
+            <p:txBody>
+              <a:bodyPr/>
+              <a:lstStyle/>
+              <a:p>
+                <a:endParaRPr lang="en-US"/>
+              </a:p>
+            </p:txBody>
           </p:sp>
           <p:sp>
             <p:nvSpPr>
@@ -18099,6 +17490,13 @@
                 <a:noFill/>
               </a:ln>
             </p:spPr>
+            <p:txBody>
+              <a:bodyPr/>
+              <a:lstStyle/>
+              <a:p>
+                <a:endParaRPr lang="en-US"/>
+              </a:p>
+            </p:txBody>
           </p:sp>
           <p:sp>
             <p:nvSpPr>
@@ -18325,6 +17723,13 @@
                 <a:noFill/>
               </a:ln>
             </p:spPr>
+            <p:txBody>
+              <a:bodyPr/>
+              <a:lstStyle/>
+              <a:p>
+                <a:endParaRPr lang="en-US"/>
+              </a:p>
+            </p:txBody>
           </p:sp>
           <p:sp>
             <p:nvSpPr>
@@ -18404,6 +17809,13 @@
                 <a:noFill/>
               </a:ln>
             </p:spPr>
+            <p:txBody>
+              <a:bodyPr/>
+              <a:lstStyle/>
+              <a:p>
+                <a:endParaRPr lang="en-US"/>
+              </a:p>
+            </p:txBody>
           </p:sp>
           <p:sp>
             <p:nvSpPr>
@@ -18630,6 +18042,13 @@
                 <a:noFill/>
               </a:ln>
             </p:spPr>
+            <p:txBody>
+              <a:bodyPr/>
+              <a:lstStyle/>
+              <a:p>
+                <a:endParaRPr lang="en-US"/>
+              </a:p>
+            </p:txBody>
           </p:sp>
           <p:sp>
             <p:nvSpPr>
@@ -18750,6 +18169,13 @@
               <a:noFill/>
             </a:ln>
           </p:spPr>
+          <p:txBody>
+            <a:bodyPr/>
+            <a:lstStyle/>
+            <a:p>
+              <a:endParaRPr lang="en-US"/>
+            </a:p>
+          </p:txBody>
         </p:sp>
         <p:sp>
           <p:nvSpPr>
@@ -18814,6 +18240,13 @@
               <a:noFill/>
             </a:ln>
           </p:spPr>
+          <p:txBody>
+            <a:bodyPr/>
+            <a:lstStyle/>
+            <a:p>
+              <a:endParaRPr lang="en-US"/>
+            </a:p>
+          </p:txBody>
         </p:sp>
         <p:sp>
           <p:nvSpPr>
@@ -18878,6 +18311,13 @@
               <a:noFill/>
             </a:ln>
           </p:spPr>
+          <p:txBody>
+            <a:bodyPr/>
+            <a:lstStyle/>
+            <a:p>
+              <a:endParaRPr lang="en-US"/>
+            </a:p>
+          </p:txBody>
         </p:sp>
         <p:sp>
           <p:nvSpPr>
@@ -18942,6 +18382,13 @@
               <a:noFill/>
             </a:ln>
           </p:spPr>
+          <p:txBody>
+            <a:bodyPr/>
+            <a:lstStyle/>
+            <a:p>
+              <a:endParaRPr lang="en-US"/>
+            </a:p>
+          </p:txBody>
         </p:sp>
         <p:sp>
           <p:nvSpPr>
@@ -19029,13 +18476,22 @@
   <p:clrMapOvr>
     <a:masterClrMapping/>
   </p:clrMapOvr>
-  <p:transition xmlns:p14="http://schemas.microsoft.com/office/powerpoint/2010/main" p14:dur="400">
-    <p:fade/>
-  </p:transition>
+  <mc:AlternateContent xmlns:mc="http://schemas.openxmlformats.org/markup-compatibility/2006">
+    <mc:Choice xmlns:p14="http://schemas.microsoft.com/office/powerpoint/2010/main" Requires="p14">
+      <p:transition p14:dur="400">
+        <p:fade/>
+      </p:transition>
+    </mc:Choice>
+    <mc:Fallback>
+      <p:transition>
+        <p:fade/>
+      </p:transition>
+    </mc:Fallback>
+  </mc:AlternateContent>
 </p:sld>
 </file>
 
-<file path=ppt/slides/slide23.xml><?xml version="1.0" encoding="utf-8"?>
+<file path=ppt/slides/slide22.xml><?xml version="1.0" encoding="utf-8"?>
 <p:sld xmlns:a="http://schemas.openxmlformats.org/drawingml/2006/main" xmlns:r="http://schemas.openxmlformats.org/officeDocument/2006/relationships" xmlns:p="http://schemas.openxmlformats.org/presentationml/2006/main">
   <p:cSld>
     <p:bg>
@@ -19069,7 +18525,7 @@
           <p:nvPr/>
         </p:nvPicPr>
         <p:blipFill>
-          <a:blip r:embed="rId2"/>
+          <a:blip r:embed="rId3"/>
           <a:stretch>
             <a:fillRect/>
           </a:stretch>
@@ -19162,7 +18618,7 @@
             <p:nvPr/>
           </p:nvPicPr>
           <p:blipFill>
-            <a:blip r:embed="rId3"/>
+            <a:blip r:embed="rId4"/>
             <a:stretch>
               <a:fillRect/>
             </a:stretch>
@@ -19201,7 +18657,7 @@
             <p:nvPr/>
           </p:nvPicPr>
           <p:blipFill>
-            <a:blip r:embed="rId4"/>
+            <a:blip r:embed="rId5"/>
             <a:stretch>
               <a:fillRect/>
             </a:stretch>
@@ -19225,7 +18681,7 @@
             <p:nvPr/>
           </p:nvPicPr>
           <p:blipFill>
-            <a:blip r:embed="rId5"/>
+            <a:blip r:embed="rId6"/>
             <a:stretch>
               <a:fillRect/>
             </a:stretch>
@@ -19249,7 +18705,7 @@
             <p:nvPr/>
           </p:nvPicPr>
           <p:blipFill>
-            <a:blip r:embed="rId6"/>
+            <a:blip r:embed="rId7"/>
             <a:stretch>
               <a:fillRect/>
             </a:stretch>
@@ -19310,9 +18766,18 @@
   <p:clrMapOvr>
     <a:masterClrMapping/>
   </p:clrMapOvr>
-  <p:transition xmlns:p14="http://schemas.microsoft.com/office/powerpoint/2010/main" p14:dur="400">
-    <p:fade/>
-  </p:transition>
+  <mc:AlternateContent xmlns:mc="http://schemas.openxmlformats.org/markup-compatibility/2006">
+    <mc:Choice xmlns:p14="http://schemas.microsoft.com/office/powerpoint/2010/main" Requires="p14">
+      <p:transition p14:dur="400">
+        <p:fade/>
+      </p:transition>
+    </mc:Choice>
+    <mc:Fallback>
+      <p:transition>
+        <p:fade/>
+      </p:transition>
+    </mc:Fallback>
+  </mc:AlternateContent>
 </p:sld>
 </file>
 
@@ -19350,7 +18815,7 @@
           <p:nvPr/>
         </p:nvPicPr>
         <p:blipFill>
-          <a:blip r:embed="rId2"/>
+          <a:blip r:embed="rId3"/>
           <a:stretch>
             <a:fillRect/>
           </a:stretch>
@@ -19414,9 +18879,9 @@
         <p:grpSpPr>
           <a:xfrm>
             <a:off x="8953500" y="228600"/>
-            <a:ext cx="2667000" cy="647700"/>
+            <a:ext cx="2357628" cy="647700"/>
             <a:chOff x="8953500" y="228600"/>
-            <a:chExt cx="2667000" cy="647700"/>
+            <a:chExt cx="2357628" cy="647700"/>
           </a:xfrm>
         </p:grpSpPr>
         <p:sp>
@@ -19428,7 +18893,7 @@
           <p:spPr>
             <a:xfrm>
               <a:off x="8953500" y="228600"/>
-              <a:ext cx="1200150" cy="647700"/>
+              <a:ext cx="2357628" cy="647700"/>
             </a:xfrm>
             <a:prstGeom prst="roundRect">
               <a:avLst>
@@ -19442,6 +18907,13 @@
               <a:noFill/>
             </a:ln>
           </p:spPr>
+          <p:txBody>
+            <a:bodyPr/>
+            <a:lstStyle/>
+            <a:p>
+              <a:endParaRPr lang="en-US"/>
+            </a:p>
+          </p:txBody>
         </p:sp>
         <p:sp>
           <p:nvSpPr>
@@ -19451,7 +18923,7 @@
           </p:nvSpPr>
           <p:spPr>
             <a:xfrm>
-              <a:off x="9279762" y="338138"/>
+              <a:off x="9839121" y="332422"/>
               <a:ext cx="547626" cy="440055"/>
             </a:xfrm>
             <a:prstGeom prst="rect">
@@ -19491,7 +18963,7 @@
           </p:nvSpPr>
           <p:spPr>
             <a:xfrm>
-              <a:off x="9383954" y="667702"/>
+              <a:off x="9962693" y="647890"/>
               <a:ext cx="339242" cy="205359"/>
             </a:xfrm>
             <a:prstGeom prst="rect">
@@ -19523,110 +18995,6 @@
             </a:p>
           </p:txBody>
         </p:sp>
-        <p:sp>
-          <p:nvSpPr>
-            <p:cNvPr id="7" name="Rectangle 7"/>
-            <p:cNvSpPr/>
-            <p:nvPr/>
-          </p:nvSpPr>
-          <p:spPr>
-            <a:xfrm>
-              <a:off x="10267950" y="228600"/>
-              <a:ext cx="1352550" cy="647700"/>
-            </a:xfrm>
-            <a:prstGeom prst="roundRect">
-              <a:avLst>
-                <a:gd name="adj" fmla="val 5882"/>
-              </a:avLst>
-            </a:prstGeom>
-            <a:solidFill>
-              <a:schemeClr val="accent1"/>
-            </a:solidFill>
-            <a:ln>
-              <a:noFill/>
-            </a:ln>
-          </p:spPr>
-        </p:sp>
-        <p:sp>
-          <p:nvSpPr>
-            <p:cNvPr id="8" name="TextBox 8"/>
-            <p:cNvSpPr txBox="1"/>
-            <p:nvPr/>
-          </p:nvSpPr>
-          <p:spPr>
-            <a:xfrm>
-              <a:off x="10670412" y="338138"/>
-              <a:ext cx="547626" cy="440055"/>
-            </a:xfrm>
-            <a:prstGeom prst="rect">
-              <a:avLst/>
-            </a:prstGeom>
-            <a:noFill/>
-            <a:ln>
-              <a:noFill/>
-            </a:ln>
-          </p:spPr>
-          <p:txBody>
-            <a:bodyPr wrap="none" lIns="0" tIns="0" rIns="0" bIns="0" anchor="t" anchorCtr="0">
-              <a:spAutoFit/>
-            </a:bodyPr>
-            <a:lstStyle/>
-            <a:p>
-              <a:pPr algn="ctr"/>
-              <a:r>
-                <a:rPr lang="en-US" sz="2250" b="1" dirty="0">
-                  <a:solidFill>
-                    <a:srgbClr val="FFFFFF"/>
-                  </a:solidFill>
-                  <a:latin typeface="+mn-lt"/>
-                  <a:ea typeface="+mn-ea"/>
-                  <a:cs typeface="+mn-cs"/>
-                </a:rPr>
-                <a:t>102</a:t>
-              </a:r>
-            </a:p>
-          </p:txBody>
-        </p:sp>
-        <p:sp>
-          <p:nvSpPr>
-            <p:cNvPr id="9" name="TextBox 9"/>
-            <p:cNvSpPr txBox="1"/>
-            <p:nvPr/>
-          </p:nvSpPr>
-          <p:spPr>
-            <a:xfrm>
-              <a:off x="10453497" y="667702"/>
-              <a:ext cx="981456" cy="205359"/>
-            </a:xfrm>
-            <a:prstGeom prst="rect">
-              <a:avLst/>
-            </a:prstGeom>
-            <a:noFill/>
-            <a:ln>
-              <a:noFill/>
-            </a:ln>
-          </p:spPr>
-          <p:txBody>
-            <a:bodyPr wrap="none" lIns="0" tIns="0" rIns="0" bIns="0" anchor="t" anchorCtr="0">
-              <a:spAutoFit/>
-            </a:bodyPr>
-            <a:lstStyle/>
-            <a:p>
-              <a:pPr algn="ctr"/>
-              <a:r>
-                <a:rPr lang="en-US" sz="1050" dirty="0">
-                  <a:solidFill>
-                    <a:srgbClr val="FFFFFF"/>
-                  </a:solidFill>
-                  <a:latin typeface="+mn-lt"/>
-                  <a:ea typeface="+mn-ea"/>
-                  <a:cs typeface="+mn-cs"/>
-                </a:rPr>
-                <a:t>DONE · 89,5%</a:t>
-              </a:r>
-            </a:p>
-          </p:txBody>
-        </p:sp>
       </p:grpSp>
       <p:grpSp>
         <p:nvGrpSpPr>
@@ -19636,7 +19004,7 @@
         </p:nvGrpSpPr>
         <p:grpSpPr>
           <a:xfrm>
-            <a:off x="3328035" y="1135856"/>
+            <a:off x="3708654" y="1384268"/>
             <a:ext cx="7917180" cy="264319"/>
             <a:chOff x="3328035" y="1135856"/>
             <a:chExt cx="7917180" cy="264319"/>
@@ -19677,6 +19045,13 @@
               </a:solidFill>
             </a:ln>
           </p:spPr>
+          <p:txBody>
+            <a:bodyPr/>
+            <a:lstStyle/>
+            <a:p>
+              <a:endParaRPr lang="en-US"/>
+            </a:p>
+          </p:txBody>
         </p:sp>
         <p:sp>
           <p:nvSpPr>
@@ -19887,10 +19262,10 @@
         </p:nvGrpSpPr>
         <p:grpSpPr>
           <a:xfrm>
-            <a:off x="658368" y="1707832"/>
-            <a:ext cx="10581132" cy="514827"/>
-            <a:chOff x="658368" y="1707832"/>
-            <a:chExt cx="10581132" cy="514827"/>
+            <a:off x="1000406" y="1962912"/>
+            <a:ext cx="10619713" cy="460486"/>
+            <a:chOff x="619787" y="1714500"/>
+            <a:chExt cx="10619713" cy="460486"/>
           </a:xfrm>
         </p:grpSpPr>
         <p:sp>
@@ -19901,7 +19276,7 @@
           </p:nvSpPr>
           <p:spPr>
             <a:xfrm>
-              <a:off x="658368" y="1707832"/>
+              <a:off x="619787" y="1779746"/>
               <a:ext cx="768378" cy="322707"/>
             </a:xfrm>
             <a:prstGeom prst="rect">
@@ -19942,7 +19317,7 @@
           <p:spPr>
             <a:xfrm>
               <a:off x="661035" y="2002631"/>
-              <a:ext cx="1279304" cy="220028"/>
+              <a:ext cx="65" cy="172355"/>
             </a:xfrm>
             <a:prstGeom prst="rect">
               <a:avLst/>
@@ -19959,17 +19334,14 @@
             <a:lstStyle/>
             <a:p>
               <a:pPr algn="l"/>
-              <a:r>
-                <a:rPr lang="en-US" sz="1120" dirty="0">
-                  <a:solidFill>
-                    <a:srgbClr val="66706A"/>
-                  </a:solidFill>
-                  <a:latin typeface="+mn-lt"/>
-                  <a:ea typeface="+mn-ea"/>
-                  <a:cs typeface="+mn-cs"/>
-                </a:rPr>
-                <a:t>98 task · 91 Done</a:t>
-              </a:r>
+              <a:endParaRPr lang="en-US" sz="1120" dirty="0">
+                <a:solidFill>
+                  <a:srgbClr val="66706A"/>
+                </a:solidFill>
+                <a:latin typeface="+mn-lt"/>
+                <a:ea typeface="+mn-ea"/>
+                <a:cs typeface="+mn-cs"/>
+              </a:endParaRPr>
             </a:p>
           </p:txBody>
         </p:sp>
@@ -19996,6 +19368,13 @@
               <a:noFill/>
             </a:ln>
           </p:spPr>
+          <p:txBody>
+            <a:bodyPr/>
+            <a:lstStyle/>
+            <a:p>
+              <a:endParaRPr lang="en-US"/>
+            </a:p>
+          </p:txBody>
         </p:sp>
         <p:sp>
           <p:nvSpPr>
@@ -20005,8 +19384,8 @@
           </p:nvSpPr>
           <p:spPr>
             <a:xfrm>
-              <a:off x="10085491" y="1831181"/>
-              <a:ext cx="969224" cy="220028"/>
+              <a:off x="10108943" y="1831181"/>
+              <a:ext cx="945772" cy="172355"/>
             </a:xfrm>
             <a:prstGeom prst="rect">
               <a:avLst/>
@@ -20032,8 +19411,49 @@
                   <a:ea typeface="+mn-ea"/>
                   <a:cs typeface="+mn-cs"/>
                 </a:rPr>
-                <a:t>20/03–22/07</a:t>
+                <a:t>20/03–</a:t>
               </a:r>
+              <a:r>
+                <a:rPr lang="en-US" sz="1120" b="1" dirty="0" err="1">
+                  <a:solidFill>
+                    <a:srgbClr val="FFFFFF"/>
+                  </a:solidFill>
+                  <a:latin typeface="+mn-lt"/>
+                  <a:ea typeface="+mn-ea"/>
+                  <a:cs typeface="+mn-cs"/>
+                </a:rPr>
+                <a:t>hiện</a:t>
+              </a:r>
+              <a:r>
+                <a:rPr lang="en-US" sz="1120" b="1" dirty="0">
+                  <a:solidFill>
+                    <a:srgbClr val="FFFFFF"/>
+                  </a:solidFill>
+                  <a:latin typeface="+mn-lt"/>
+                  <a:ea typeface="+mn-ea"/>
+                  <a:cs typeface="+mn-cs"/>
+                </a:rPr>
+                <a:t> </a:t>
+              </a:r>
+              <a:r>
+                <a:rPr lang="en-US" sz="1120" b="1" dirty="0" err="1">
+                  <a:solidFill>
+                    <a:srgbClr val="FFFFFF"/>
+                  </a:solidFill>
+                  <a:latin typeface="+mn-lt"/>
+                  <a:ea typeface="+mn-ea"/>
+                  <a:cs typeface="+mn-cs"/>
+                </a:rPr>
+                <a:t>tại</a:t>
+              </a:r>
+              <a:endParaRPr lang="en-US" sz="1120" b="1" dirty="0">
+                <a:solidFill>
+                  <a:srgbClr val="FFFFFF"/>
+                </a:solidFill>
+                <a:latin typeface="+mn-lt"/>
+                <a:ea typeface="+mn-ea"/>
+                <a:cs typeface="+mn-cs"/>
+              </a:endParaRPr>
             </a:p>
           </p:txBody>
         </p:sp>
@@ -20046,10 +19466,10 @@
         </p:nvGrpSpPr>
         <p:grpSpPr>
           <a:xfrm>
-            <a:off x="658368" y="2590800"/>
-            <a:ext cx="10581132" cy="527209"/>
+            <a:off x="1038987" y="2839212"/>
+            <a:ext cx="10581132" cy="361950"/>
             <a:chOff x="658368" y="2590800"/>
-            <a:chExt cx="10581132" cy="527209"/>
+            <a:chExt cx="10581132" cy="361950"/>
           </a:xfrm>
         </p:grpSpPr>
         <p:sp>
@@ -20094,46 +19514,6 @@
         </p:sp>
         <p:sp>
           <p:nvSpPr>
-            <p:cNvPr id="24" name="TextBox 24"/>
-            <p:cNvSpPr txBox="1"/>
-            <p:nvPr/>
-          </p:nvSpPr>
-          <p:spPr>
-            <a:xfrm>
-              <a:off x="661035" y="2897981"/>
-              <a:ext cx="2218400" cy="220028"/>
-            </a:xfrm>
-            <a:prstGeom prst="rect">
-              <a:avLst/>
-            </a:prstGeom>
-            <a:noFill/>
-            <a:ln>
-              <a:noFill/>
-            </a:ln>
-          </p:spPr>
-          <p:txBody>
-            <a:bodyPr wrap="none" lIns="0" tIns="0" rIns="0" bIns="0" anchor="t" anchorCtr="0">
-              <a:spAutoFit/>
-            </a:bodyPr>
-            <a:lstStyle/>
-            <a:p>
-              <a:pPr algn="l"/>
-              <a:r>
-                <a:rPr lang="en-US" sz="1120" dirty="0">
-                  <a:solidFill>
-                    <a:srgbClr val="66706A"/>
-                  </a:solidFill>
-                  <a:latin typeface="+mn-lt"/>
-                  <a:ea typeface="+mn-ea"/>
-                  <a:cs typeface="+mn-cs"/>
-                </a:rPr>
-                <a:t>Automation · cảm biến · servo</a:t>
-              </a:r>
-            </a:p>
-          </p:txBody>
-        </p:sp>
-        <p:sp>
-          <p:nvSpPr>
             <p:cNvPr id="25" name="Rectangle 25"/>
             <p:cNvSpPr/>
             <p:nvPr/>
@@ -20155,6 +19535,13 @@
               <a:noFill/>
             </a:ln>
           </p:spPr>
+          <p:txBody>
+            <a:bodyPr/>
+            <a:lstStyle/>
+            <a:p>
+              <a:endParaRPr lang="en-US"/>
+            </a:p>
+          </p:txBody>
         </p:sp>
         <p:sp>
           <p:nvSpPr>
@@ -20164,8 +19551,8 @@
           </p:nvSpPr>
           <p:spPr>
             <a:xfrm>
-              <a:off x="8323473" y="2697956"/>
-              <a:ext cx="1473942" cy="220028"/>
+              <a:off x="10223242" y="2690406"/>
+              <a:ext cx="945773" cy="172355"/>
             </a:xfrm>
             <a:prstGeom prst="rect">
               <a:avLst/>
@@ -20185,14 +19572,55 @@
               <a:r>
                 <a:rPr lang="en-US" sz="1120" dirty="0">
                   <a:solidFill>
-                    <a:srgbClr val="66706A"/>
+                    <a:schemeClr val="bg1"/>
                   </a:solidFill>
                   <a:latin typeface="+mn-lt"/>
                   <a:ea typeface="+mn-ea"/>
                   <a:cs typeface="+mn-cs"/>
                 </a:rPr>
-                <a:t>06/07–25/07 dự kiến</a:t>
+                <a:t>06/07– </a:t>
               </a:r>
+              <a:r>
+                <a:rPr lang="en-US" sz="1120" dirty="0" err="1">
+                  <a:solidFill>
+                    <a:schemeClr val="bg1"/>
+                  </a:solidFill>
+                  <a:latin typeface="+mn-lt"/>
+                  <a:ea typeface="+mn-ea"/>
+                  <a:cs typeface="+mn-cs"/>
+                </a:rPr>
+                <a:t>hiện</a:t>
+              </a:r>
+              <a:r>
+                <a:rPr lang="en-US" sz="1120" dirty="0">
+                  <a:solidFill>
+                    <a:schemeClr val="bg1"/>
+                  </a:solidFill>
+                  <a:latin typeface="+mn-lt"/>
+                  <a:ea typeface="+mn-ea"/>
+                  <a:cs typeface="+mn-cs"/>
+                </a:rPr>
+                <a:t> </a:t>
+              </a:r>
+              <a:r>
+                <a:rPr lang="en-US" sz="1120" dirty="0" err="1">
+                  <a:solidFill>
+                    <a:schemeClr val="bg1"/>
+                  </a:solidFill>
+                  <a:latin typeface="+mn-lt"/>
+                  <a:ea typeface="+mn-ea"/>
+                  <a:cs typeface="+mn-cs"/>
+                </a:rPr>
+                <a:t>tại</a:t>
+              </a:r>
+              <a:endParaRPr lang="en-US" sz="1120" dirty="0">
+                <a:solidFill>
+                  <a:schemeClr val="bg1"/>
+                </a:solidFill>
+                <a:latin typeface="+mn-lt"/>
+                <a:ea typeface="+mn-ea"/>
+                <a:cs typeface="+mn-cs"/>
+              </a:endParaRPr>
             </a:p>
           </p:txBody>
         </p:sp>
@@ -20205,7 +19633,7 @@
         </p:nvGrpSpPr>
         <p:grpSpPr>
           <a:xfrm>
-            <a:off x="658368" y="3448050"/>
+            <a:off x="1038987" y="3696462"/>
             <a:ext cx="10581132" cy="765334"/>
             <a:chOff x="658368" y="3448050"/>
             <a:chExt cx="10581132" cy="765334"/>
@@ -20354,6 +19782,13 @@
               <a:noFill/>
             </a:ln>
           </p:spPr>
+          <p:txBody>
+            <a:bodyPr/>
+            <a:lstStyle/>
+            <a:p>
+              <a:endParaRPr lang="en-US"/>
+            </a:p>
+          </p:txBody>
         </p:sp>
         <p:sp>
           <p:nvSpPr>
@@ -20363,8 +19798,8 @@
           </p:nvSpPr>
           <p:spPr>
             <a:xfrm>
-              <a:off x="6395085" y="3555206"/>
-              <a:ext cx="1776173" cy="220028"/>
+              <a:off x="10055843" y="3621785"/>
+              <a:ext cx="953787" cy="172355"/>
             </a:xfrm>
             <a:prstGeom prst="rect">
               <a:avLst/>
@@ -20390,207 +19825,48 @@
                   <a:ea typeface="+mn-ea"/>
                   <a:cs typeface="+mn-cs"/>
                 </a:rPr>
-                <a:t>18/05–ĐANG TRIỂN KHAI</a:t>
+                <a:t>18/05</a:t>
               </a:r>
-            </a:p>
-          </p:txBody>
-        </p:sp>
-        <p:sp>
-          <p:nvSpPr>
-            <p:cNvPr id="33" name="TextBox 33"/>
-            <p:cNvSpPr txBox="1"/>
-            <p:nvPr/>
-          </p:nvSpPr>
-          <p:spPr>
-            <a:xfrm>
-              <a:off x="6395466" y="3763328"/>
-              <a:ext cx="3620219" cy="205359"/>
-            </a:xfrm>
-            <a:prstGeom prst="rect">
-              <a:avLst/>
-            </a:prstGeom>
-            <a:noFill/>
-            <a:ln>
-              <a:noFill/>
-            </a:ln>
-          </p:spPr>
-          <p:txBody>
-            <a:bodyPr wrap="none" lIns="0" tIns="0" rIns="0" bIns="0" anchor="t" anchorCtr="0">
-              <a:spAutoFit/>
-            </a:bodyPr>
-            <a:lstStyle/>
-            <a:p>
-              <a:pPr algn="l"/>
               <a:r>
-                <a:rPr lang="en-US" sz="1050" dirty="0">
+                <a:rPr lang="en-US" sz="1120" b="1" dirty="0">
                   <a:solidFill>
                     <a:srgbClr val="FFFFFF"/>
                   </a:solidFill>
-                  <a:latin typeface="+mn-lt"/>
-                  <a:ea typeface="+mn-ea"/>
-                  <a:cs typeface="+mn-cs"/>
                 </a:rPr>
-                <a:t>Test tool + loader được quản lý trong một nhóm dự án</a:t>
+                <a:t>- </a:t>
               </a:r>
-            </a:p>
-          </p:txBody>
-        </p:sp>
-      </p:grpSp>
-      <p:grpSp>
-        <p:nvGrpSpPr>
-          <p:cNvPr id="39" name="Group 39"/>
-          <p:cNvGrpSpPr/>
-          <p:nvPr/>
-        </p:nvGrpSpPr>
-        <p:grpSpPr>
-          <a:xfrm>
-            <a:off x="658368" y="4762500"/>
-            <a:ext cx="5288732" cy="527209"/>
-            <a:chOff x="658368" y="4762500"/>
-            <a:chExt cx="5288732" cy="527209"/>
-          </a:xfrm>
-        </p:grpSpPr>
-        <p:sp>
-          <p:nvSpPr>
-            <p:cNvPr id="35" name="TextBox 35"/>
-            <p:cNvSpPr txBox="1"/>
-            <p:nvPr/>
-          </p:nvSpPr>
-          <p:spPr>
-            <a:xfrm>
-              <a:off x="658368" y="4774882"/>
-              <a:ext cx="1642621" cy="322707"/>
-            </a:xfrm>
-            <a:prstGeom prst="rect">
-              <a:avLst/>
-            </a:prstGeom>
-            <a:noFill/>
-            <a:ln>
-              <a:noFill/>
-            </a:ln>
-          </p:spPr>
-          <p:txBody>
-            <a:bodyPr wrap="none" lIns="0" tIns="0" rIns="0" bIns="0" anchor="t" anchorCtr="0">
-              <a:spAutoFit/>
-            </a:bodyPr>
-            <a:lstStyle/>
-            <a:p>
-              <a:pPr algn="l"/>
               <a:r>
-                <a:rPr lang="en-US" sz="1650" b="1" dirty="0">
+                <a:rPr lang="en-US" sz="1120" b="1" dirty="0" err="1">
                   <a:solidFill>
-                    <a:schemeClr val="dk1"/>
+                    <a:srgbClr val="FFFFFF"/>
                   </a:solidFill>
-                  <a:latin typeface="+mn-lt"/>
-                  <a:ea typeface="+mn-ea"/>
-                  <a:cs typeface="+mn-cs"/>
                 </a:rPr>
-                <a:t>04 MSB Office</a:t>
+                <a:t>hiện</a:t>
               </a:r>
-            </a:p>
-          </p:txBody>
-        </p:sp>
-        <p:sp>
-          <p:nvSpPr>
-            <p:cNvPr id="36" name="TextBox 36"/>
-            <p:cNvSpPr txBox="1"/>
-            <p:nvPr/>
-          </p:nvSpPr>
-          <p:spPr>
-            <a:xfrm>
-              <a:off x="661035" y="5069681"/>
-              <a:ext cx="2293726" cy="220028"/>
-            </a:xfrm>
-            <a:prstGeom prst="rect">
-              <a:avLst/>
-            </a:prstGeom>
-            <a:noFill/>
-            <a:ln>
-              <a:noFill/>
-            </a:ln>
-          </p:spPr>
-          <p:txBody>
-            <a:bodyPr wrap="none" lIns="0" tIns="0" rIns="0" bIns="0" anchor="t" anchorCtr="0">
-              <a:spAutoFit/>
-            </a:bodyPr>
-            <a:lstStyle/>
-            <a:p>
-              <a:pPr algn="l"/>
               <a:r>
-                <a:rPr lang="en-US" sz="1120" dirty="0">
+                <a:rPr lang="en-US" sz="1120" b="1" dirty="0">
                   <a:solidFill>
-                    <a:srgbClr val="66706A"/>
+                    <a:srgbClr val="FFFFFF"/>
                   </a:solidFill>
-                  <a:latin typeface="+mn-lt"/>
-                  <a:ea typeface="+mn-ea"/>
-                  <a:cs typeface="+mn-cs"/>
                 </a:rPr>
-                <a:t>Jig test · đo lường · hiệu chỉnh</a:t>
+                <a:t> </a:t>
               </a:r>
-            </a:p>
-          </p:txBody>
-        </p:sp>
-        <p:sp>
-          <p:nvSpPr>
-            <p:cNvPr id="37" name="Rectangle 37"/>
-            <p:cNvSpPr/>
-            <p:nvPr/>
-          </p:nvSpPr>
-          <p:spPr>
-            <a:xfrm>
-              <a:off x="4343400" y="4762500"/>
-              <a:ext cx="552450" cy="323850"/>
-            </a:xfrm>
-            <a:prstGeom prst="roundRect">
-              <a:avLst>
-                <a:gd name="adj" fmla="val 11765"/>
-              </a:avLst>
-            </a:prstGeom>
-            <a:solidFill>
-              <a:schemeClr val="accent3"/>
-            </a:solidFill>
-            <a:ln>
-              <a:noFill/>
-            </a:ln>
-          </p:spPr>
-        </p:sp>
-        <p:sp>
-          <p:nvSpPr>
-            <p:cNvPr id="38" name="TextBox 38"/>
-            <p:cNvSpPr txBox="1"/>
-            <p:nvPr/>
-          </p:nvSpPr>
-          <p:spPr>
-            <a:xfrm>
-              <a:off x="5023485" y="4860131"/>
-              <a:ext cx="923615" cy="220028"/>
-            </a:xfrm>
-            <a:prstGeom prst="rect">
-              <a:avLst/>
-            </a:prstGeom>
-            <a:noFill/>
-            <a:ln>
-              <a:noFill/>
-            </a:ln>
-          </p:spPr>
-          <p:txBody>
-            <a:bodyPr wrap="none" lIns="0" tIns="0" rIns="0" bIns="0" anchor="t" anchorCtr="0">
-              <a:spAutoFit/>
-            </a:bodyPr>
-            <a:lstStyle/>
-            <a:p>
-              <a:pPr algn="l"/>
               <a:r>
-                <a:rPr lang="en-US" sz="1120" dirty="0">
+                <a:rPr lang="en-US" sz="1120" b="1" dirty="0" err="1">
                   <a:solidFill>
-                    <a:srgbClr val="66706A"/>
+                    <a:srgbClr val="FFFFFF"/>
                   </a:solidFill>
-                  <a:latin typeface="+mn-lt"/>
-                  <a:ea typeface="+mn-ea"/>
-                  <a:cs typeface="+mn-cs"/>
                 </a:rPr>
-                <a:t>07/04–10/04</a:t>
+                <a:t>tại</a:t>
               </a:r>
+              <a:endParaRPr lang="en-US" sz="1120" b="1" dirty="0">
+                <a:solidFill>
+                  <a:srgbClr val="FFFFFF"/>
+                </a:solidFill>
+                <a:latin typeface="+mn-lt"/>
+                <a:ea typeface="+mn-ea"/>
+                <a:cs typeface="+mn-cs"/>
+              </a:endParaRPr>
             </a:p>
           </p:txBody>
         </p:sp>
@@ -20603,7 +19879,7 @@
         </p:nvGrpSpPr>
         <p:grpSpPr>
           <a:xfrm>
-            <a:off x="495300" y="5753100"/>
+            <a:off x="533400" y="5591174"/>
             <a:ext cx="11125200" cy="590550"/>
             <a:chOff x="495300" y="5753100"/>
             <a:chExt cx="11125200" cy="590550"/>
@@ -20632,6 +19908,13 @@
               <a:noFill/>
             </a:ln>
           </p:spPr>
+          <p:txBody>
+            <a:bodyPr/>
+            <a:lstStyle/>
+            <a:p>
+              <a:endParaRPr lang="en-US"/>
+            </a:p>
+          </p:txBody>
         </p:sp>
         <p:sp>
           <p:nvSpPr>
@@ -20654,6 +19937,13 @@
               <a:noFill/>
             </a:ln>
           </p:spPr>
+          <p:txBody>
+            <a:bodyPr/>
+            <a:lstStyle/>
+            <a:p>
+              <a:endParaRPr lang="en-US"/>
+            </a:p>
+          </p:txBody>
         </p:sp>
         <p:sp>
           <p:nvSpPr>
@@ -20664,7 +19954,7 @@
           <p:spPr>
             <a:xfrm>
               <a:off x="736473" y="5872639"/>
-              <a:ext cx="1752606" cy="249364"/>
+              <a:ext cx="1784143" cy="196977"/>
             </a:xfrm>
             <a:prstGeom prst="rect">
               <a:avLst/>
@@ -20690,7 +19980,7 @@
                   <a:ea typeface="+mn-ea"/>
                   <a:cs typeface="+mn-cs"/>
                 </a:rPr>
-                <a:t>4 NHÓM DỰ ÁN CHÍNH</a:t>
+                <a:t>3 NHÓM DỰ ÁN CHÍNH</a:t>
               </a:r>
             </a:p>
           </p:txBody>
@@ -20744,7 +20034,7 @@
         </p:nvSpPr>
         <p:spPr>
           <a:xfrm>
-            <a:off x="11141640" y="6630352"/>
+            <a:off x="11179740" y="6650735"/>
             <a:ext cx="484194" cy="205359"/>
           </a:xfrm>
           <a:prstGeom prst="rect">
@@ -20781,9 +20071,18 @@
   <p:clrMapOvr>
     <a:masterClrMapping/>
   </p:clrMapOvr>
-  <p:transition xmlns:p14="http://schemas.microsoft.com/office/powerpoint/2010/main" p14:dur="400">
-    <p:fade/>
-  </p:transition>
+  <mc:AlternateContent xmlns:mc="http://schemas.openxmlformats.org/markup-compatibility/2006">
+    <mc:Choice xmlns:p14="http://schemas.microsoft.com/office/powerpoint/2010/main" Requires="p14">
+      <p:transition p14:dur="400">
+        <p:fade/>
+      </p:transition>
+    </mc:Choice>
+    <mc:Fallback>
+      <p:transition>
+        <p:fade/>
+      </p:transition>
+    </mc:Fallback>
+  </mc:AlternateContent>
 </p:sld>
 </file>
 
@@ -20821,7 +20120,7 @@
           <p:nvPr/>
         </p:nvPicPr>
         <p:blipFill>
-          <a:blip r:embed="rId2"/>
+          <a:blip r:embed="rId3"/>
           <a:stretch>
             <a:fillRect/>
           </a:stretch>
@@ -20899,6 +20198,13 @@
             <a:noFill/>
           </a:ln>
         </p:spPr>
+        <p:txBody>
+          <a:bodyPr/>
+          <a:lstStyle/>
+          <a:p>
+            <a:endParaRPr lang="en-US"/>
+          </a:p>
+        </p:txBody>
       </p:sp>
       <p:sp>
         <p:nvSpPr>
@@ -20977,6 +20283,13 @@
               <a:noFill/>
             </a:ln>
           </p:spPr>
+          <p:txBody>
+            <a:bodyPr/>
+            <a:lstStyle/>
+            <a:p>
+              <a:endParaRPr lang="en-US"/>
+            </a:p>
+          </p:txBody>
         </p:sp>
         <p:sp>
           <p:nvSpPr>
@@ -21188,7 +20501,7 @@
           <p:nvPr/>
         </p:nvPicPr>
         <p:blipFill>
-          <a:blip r:embed="rId3"/>
+          <a:blip r:embed="rId4"/>
           <a:stretch>
             <a:fillRect/>
           </a:stretch>
@@ -21211,10 +20524,10 @@
         </p:nvGrpSpPr>
         <p:grpSpPr>
           <a:xfrm>
-            <a:off x="533400" y="3762375"/>
-            <a:ext cx="11180047" cy="1047750"/>
+            <a:off x="2840831" y="3830574"/>
+            <a:ext cx="7105650" cy="1047750"/>
             <a:chOff x="533400" y="3762375"/>
-            <a:chExt cx="11180047" cy="1047750"/>
+            <a:chExt cx="7105650" cy="1047750"/>
           </a:xfrm>
         </p:grpSpPr>
         <p:sp>
@@ -21240,6 +20553,13 @@
               <a:noFill/>
             </a:ln>
           </p:spPr>
+          <p:txBody>
+            <a:bodyPr/>
+            <a:lstStyle/>
+            <a:p>
+              <a:endParaRPr lang="en-US"/>
+            </a:p>
+          </p:txBody>
         </p:sp>
         <p:sp>
           <p:nvSpPr>
@@ -21384,6 +20704,13 @@
               <a:noFill/>
             </a:ln>
           </p:spPr>
+          <p:txBody>
+            <a:bodyPr/>
+            <a:lstStyle/>
+            <a:p>
+              <a:endParaRPr lang="en-US"/>
+            </a:p>
+          </p:txBody>
         </p:sp>
         <p:sp>
           <p:nvSpPr>
@@ -21505,110 +20832,6 @@
             </a:p>
           </p:txBody>
         </p:sp>
-        <p:sp>
-          <p:nvSpPr>
-            <p:cNvPr id="22" name="Rectangle 22"/>
-            <p:cNvSpPr/>
-            <p:nvPr/>
-          </p:nvSpPr>
-          <p:spPr>
-            <a:xfrm>
-              <a:off x="7886700" y="3762375"/>
-              <a:ext cx="3771900" cy="1047750"/>
-            </a:xfrm>
-            <a:prstGeom prst="roundRect">
-              <a:avLst>
-                <a:gd name="adj" fmla="val 14545"/>
-              </a:avLst>
-            </a:prstGeom>
-            <a:solidFill>
-              <a:schemeClr val="lt2"/>
-            </a:solidFill>
-            <a:ln>
-              <a:noFill/>
-            </a:ln>
-          </p:spPr>
-        </p:sp>
-        <p:sp>
-          <p:nvSpPr>
-            <p:cNvPr id="23" name="TextBox 23"/>
-            <p:cNvSpPr txBox="1"/>
-            <p:nvPr/>
-          </p:nvSpPr>
-          <p:spPr>
-            <a:xfrm>
-              <a:off x="8165211" y="4018121"/>
-              <a:ext cx="1309112" cy="278702"/>
-            </a:xfrm>
-            <a:prstGeom prst="rect">
-              <a:avLst/>
-            </a:prstGeom>
-            <a:noFill/>
-            <a:ln>
-              <a:noFill/>
-            </a:ln>
-          </p:spPr>
-          <p:txBody>
-            <a:bodyPr wrap="none" lIns="0" tIns="0" rIns="0" bIns="0" anchor="t" anchorCtr="0">
-              <a:spAutoFit/>
-            </a:bodyPr>
-            <a:lstStyle/>
-            <a:p>
-              <a:pPr algn="l"/>
-              <a:r>
-                <a:rPr lang="en-US" sz="1420" b="1" dirty="0">
-                  <a:solidFill>
-                    <a:schemeClr val="dk1"/>
-                  </a:solidFill>
-                  <a:latin typeface="+mn-lt"/>
-                  <a:ea typeface="+mn-ea"/>
-                  <a:cs typeface="+mn-cs"/>
-                </a:rPr>
-                <a:t>7 task còn lại</a:t>
-              </a:r>
-            </a:p>
-          </p:txBody>
-        </p:sp>
-        <p:sp>
-          <p:nvSpPr>
-            <p:cNvPr id="24" name="TextBox 24"/>
-            <p:cNvSpPr txBox="1"/>
-            <p:nvPr/>
-          </p:nvSpPr>
-          <p:spPr>
-            <a:xfrm>
-              <a:off x="8166354" y="4347210"/>
-              <a:ext cx="3547093" cy="234696"/>
-            </a:xfrm>
-            <a:prstGeom prst="rect">
-              <a:avLst/>
-            </a:prstGeom>
-            <a:noFill/>
-            <a:ln>
-              <a:noFill/>
-            </a:ln>
-          </p:spPr>
-          <p:txBody>
-            <a:bodyPr wrap="none" lIns="0" tIns="0" rIns="0" bIns="0" anchor="t" anchorCtr="0">
-              <a:spAutoFit/>
-            </a:bodyPr>
-            <a:lstStyle/>
-            <a:p>
-              <a:pPr algn="l"/>
-              <a:r>
-                <a:rPr lang="en-US" sz="1200" dirty="0">
-                  <a:solidFill>
-                    <a:srgbClr val="66706A"/>
-                  </a:solidFill>
-                  <a:latin typeface="+mn-lt"/>
-                  <a:ea typeface="+mn-ea"/>
-                  <a:cs typeface="+mn-cs"/>
-                </a:rPr>
-                <a:t>2 Ongoing · 2 Late · 2 Not started · 1 Closed</a:t>
-              </a:r>
-            </a:p>
-          </p:txBody>
-        </p:sp>
       </p:grpSp>
       <p:grpSp>
         <p:nvGrpSpPr>
@@ -21689,6 +20912,13 @@
               </a:solidFill>
             </a:ln>
           </p:spPr>
+          <p:txBody>
+            <a:bodyPr/>
+            <a:lstStyle/>
+            <a:p>
+              <a:endParaRPr lang="en-US"/>
+            </a:p>
+          </p:txBody>
         </p:sp>
         <p:sp>
           <p:nvSpPr>
@@ -21755,6 +20985,13 @@
               </a:solidFill>
             </a:ln>
           </p:spPr>
+          <p:txBody>
+            <a:bodyPr/>
+            <a:lstStyle/>
+            <a:p>
+              <a:endParaRPr lang="en-US"/>
+            </a:p>
+          </p:txBody>
         </p:sp>
         <p:sp>
           <p:nvSpPr>
@@ -21821,6 +21058,13 @@
               </a:solidFill>
             </a:ln>
           </p:spPr>
+          <p:txBody>
+            <a:bodyPr/>
+            <a:lstStyle/>
+            <a:p>
+              <a:endParaRPr lang="en-US"/>
+            </a:p>
+          </p:txBody>
         </p:sp>
         <p:sp>
           <p:nvSpPr>
@@ -21908,9 +21152,18 @@
   <p:clrMapOvr>
     <a:masterClrMapping/>
   </p:clrMapOvr>
-  <p:transition xmlns:p14="http://schemas.microsoft.com/office/powerpoint/2010/main" p14:dur="400">
-    <p:fade/>
-  </p:transition>
+  <mc:AlternateContent xmlns:mc="http://schemas.openxmlformats.org/markup-compatibility/2006">
+    <mc:Choice xmlns:p14="http://schemas.microsoft.com/office/powerpoint/2010/main" Requires="p14">
+      <p:transition p14:dur="400">
+        <p:fade/>
+      </p:transition>
+    </mc:Choice>
+    <mc:Fallback>
+      <p:transition>
+        <p:fade/>
+      </p:transition>
+    </mc:Fallback>
+  </mc:AlternateContent>
 </p:sld>
 </file>
 
@@ -21948,7 +21201,7 @@
           <p:nvPr/>
         </p:nvPicPr>
         <p:blipFill>
-          <a:blip r:embed="rId2"/>
+          <a:blip r:embed="rId3"/>
           <a:stretch>
             <a:fillRect/>
           </a:stretch>
@@ -22026,6 +21279,13 @@
             <a:noFill/>
           </a:ln>
         </p:spPr>
+        <p:txBody>
+          <a:bodyPr/>
+          <a:lstStyle/>
+          <a:p>
+            <a:endParaRPr lang="en-US"/>
+          </a:p>
+        </p:txBody>
       </p:sp>
       <p:sp>
         <p:nvSpPr>
@@ -22118,6 +21378,13 @@
                 <a:noFill/>
               </a:ln>
             </p:spPr>
+            <p:txBody>
+              <a:bodyPr/>
+              <a:lstStyle/>
+              <a:p>
+                <a:endParaRPr lang="en-US"/>
+              </a:p>
+            </p:txBody>
           </p:sp>
           <p:sp>
             <p:nvSpPr>
@@ -22142,6 +21409,13 @@
                 <a:noFill/>
               </a:ln>
             </p:spPr>
+            <p:txBody>
+              <a:bodyPr/>
+              <a:lstStyle/>
+              <a:p>
+                <a:endParaRPr lang="en-US"/>
+              </a:p>
+            </p:txBody>
           </p:sp>
           <p:sp>
             <p:nvSpPr>
@@ -22208,7 +21482,7 @@
               </a:bodyPr>
               <a:lstStyle/>
               <a:p>
-                <a:pPr algn="l" marL="153289" indent="-153289">
+                <a:pPr marL="153289" indent="-153289" algn="l">
                   <a:buClr>
                     <a:schemeClr val="dk1"/>
                   </a:buClr>
@@ -22255,7 +21529,7 @@
               </a:bodyPr>
               <a:lstStyle/>
               <a:p>
-                <a:pPr algn="l" marL="153289" indent="-153289">
+                <a:pPr marL="153289" indent="-153289" algn="l">
                   <a:buClr>
                     <a:schemeClr val="dk1"/>
                   </a:buClr>
@@ -22302,7 +21576,7 @@
               </a:bodyPr>
               <a:lstStyle/>
               <a:p>
-                <a:pPr algn="l" marL="153289" indent="-153289">
+                <a:pPr marL="153289" indent="-153289" algn="l">
                   <a:buClr>
                     <a:schemeClr val="dk1"/>
                   </a:buClr>
@@ -22359,6 +21633,13 @@
                 </a:solidFill>
               </a:ln>
             </p:spPr>
+            <p:txBody>
+              <a:bodyPr/>
+              <a:lstStyle/>
+              <a:p>
+                <a:endParaRPr lang="en-US"/>
+              </a:p>
+            </p:txBody>
           </p:sp>
           <p:sp>
             <p:nvSpPr>
@@ -22518,6 +21799,13 @@
                 <a:noFill/>
               </a:ln>
             </p:spPr>
+            <p:txBody>
+              <a:bodyPr/>
+              <a:lstStyle/>
+              <a:p>
+                <a:endParaRPr lang="en-US"/>
+              </a:p>
+            </p:txBody>
           </p:sp>
           <p:sp>
             <p:nvSpPr>
@@ -22542,6 +21830,13 @@
                 <a:noFill/>
               </a:ln>
             </p:spPr>
+            <p:txBody>
+              <a:bodyPr/>
+              <a:lstStyle/>
+              <a:p>
+                <a:endParaRPr lang="en-US"/>
+              </a:p>
+            </p:txBody>
           </p:sp>
           <p:sp>
             <p:nvSpPr>
@@ -22608,7 +21903,7 @@
               </a:bodyPr>
               <a:lstStyle/>
               <a:p>
-                <a:pPr algn="l" marL="153289" indent="-153289">
+                <a:pPr marL="153289" indent="-153289" algn="l">
                   <a:buClr>
                     <a:schemeClr val="dk1"/>
                   </a:buClr>
@@ -22655,7 +21950,7 @@
               </a:bodyPr>
               <a:lstStyle/>
               <a:p>
-                <a:pPr algn="l" marL="153289" indent="-153289">
+                <a:pPr marL="153289" indent="-153289" algn="l">
                   <a:buClr>
                     <a:schemeClr val="dk1"/>
                   </a:buClr>
@@ -22702,7 +21997,7 @@
               </a:bodyPr>
               <a:lstStyle/>
               <a:p>
-                <a:pPr algn="l" marL="153289" indent="-153289">
+                <a:pPr marL="153289" indent="-153289" algn="l">
                   <a:buClr>
                     <a:schemeClr val="dk1"/>
                   </a:buClr>
@@ -22759,6 +22054,13 @@
                 </a:solidFill>
               </a:ln>
             </p:spPr>
+            <p:txBody>
+              <a:bodyPr/>
+              <a:lstStyle/>
+              <a:p>
+                <a:endParaRPr lang="en-US"/>
+              </a:p>
+            </p:txBody>
           </p:sp>
           <p:sp>
             <p:nvSpPr>
@@ -22918,6 +22220,13 @@
                 <a:noFill/>
               </a:ln>
             </p:spPr>
+            <p:txBody>
+              <a:bodyPr/>
+              <a:lstStyle/>
+              <a:p>
+                <a:endParaRPr lang="en-US"/>
+              </a:p>
+            </p:txBody>
           </p:sp>
           <p:sp>
             <p:nvSpPr>
@@ -22942,6 +22251,13 @@
                 <a:noFill/>
               </a:ln>
             </p:spPr>
+            <p:txBody>
+              <a:bodyPr/>
+              <a:lstStyle/>
+              <a:p>
+                <a:endParaRPr lang="en-US"/>
+              </a:p>
+            </p:txBody>
           </p:sp>
           <p:sp>
             <p:nvSpPr>
@@ -23008,7 +22324,7 @@
               </a:bodyPr>
               <a:lstStyle/>
               <a:p>
-                <a:pPr algn="l" marL="153289" indent="-153289">
+                <a:pPr marL="153289" indent="-153289" algn="l">
                   <a:buClr>
                     <a:schemeClr val="dk1"/>
                   </a:buClr>
@@ -23055,7 +22371,7 @@
               </a:bodyPr>
               <a:lstStyle/>
               <a:p>
-                <a:pPr algn="l" marL="153289" indent="-153289">
+                <a:pPr marL="153289" indent="-153289" algn="l">
                   <a:buClr>
                     <a:schemeClr val="dk1"/>
                   </a:buClr>
@@ -23102,7 +22418,7 @@
               </a:bodyPr>
               <a:lstStyle/>
               <a:p>
-                <a:pPr algn="l" marL="153289" indent="-153289">
+                <a:pPr marL="153289" indent="-153289" algn="l">
                   <a:buClr>
                     <a:schemeClr val="dk1"/>
                   </a:buClr>
@@ -23159,6 +22475,13 @@
                 </a:solidFill>
               </a:ln>
             </p:spPr>
+            <p:txBody>
+              <a:bodyPr/>
+              <a:lstStyle/>
+              <a:p>
+                <a:endParaRPr lang="en-US"/>
+              </a:p>
+            </p:txBody>
           </p:sp>
           <p:sp>
             <p:nvSpPr>
@@ -23305,6 +22628,13 @@
             <a:noFill/>
           </a:ln>
         </p:spPr>
+        <p:txBody>
+          <a:bodyPr/>
+          <a:lstStyle/>
+          <a:p>
+            <a:endParaRPr lang="en-US"/>
+          </a:p>
+        </p:txBody>
       </p:sp>
       <p:sp>
         <p:nvSpPr>
@@ -23391,9 +22721,18 @@
   <p:clrMapOvr>
     <a:masterClrMapping/>
   </p:clrMapOvr>
-  <p:transition xmlns:p14="http://schemas.microsoft.com/office/powerpoint/2010/main" p14:dur="400">
-    <p:fade/>
-  </p:transition>
+  <mc:AlternateContent xmlns:mc="http://schemas.openxmlformats.org/markup-compatibility/2006">
+    <mc:Choice xmlns:p14="http://schemas.microsoft.com/office/powerpoint/2010/main" Requires="p14">
+      <p:transition p14:dur="400">
+        <p:fade/>
+      </p:transition>
+    </mc:Choice>
+    <mc:Fallback>
+      <p:transition>
+        <p:fade/>
+      </p:transition>
+    </mc:Fallback>
+  </mc:AlternateContent>
 </p:sld>
 </file>
 
@@ -23431,7 +22770,7 @@
           <p:nvPr/>
         </p:nvPicPr>
         <p:blipFill>
-          <a:blip r:embed="rId2"/>
+          <a:blip r:embed="rId3"/>
           <a:stretch>
             <a:fillRect/>
           </a:stretch>
@@ -23509,6 +22848,13 @@
             <a:noFill/>
           </a:ln>
         </p:spPr>
+        <p:txBody>
+          <a:bodyPr/>
+          <a:lstStyle/>
+          <a:p>
+            <a:endParaRPr lang="en-US"/>
+          </a:p>
+        </p:txBody>
       </p:sp>
       <p:sp>
         <p:nvSpPr>
@@ -23589,6 +22935,13 @@
               </a:solidFill>
             </a:ln>
           </p:spPr>
+          <p:txBody>
+            <a:bodyPr/>
+            <a:lstStyle/>
+            <a:p>
+              <a:endParaRPr lang="en-US"/>
+            </a:p>
+          </p:txBody>
         </p:sp>
         <p:pic>
           <p:nvPicPr>
@@ -23599,7 +22952,7 @@
             <p:nvPr/>
           </p:nvPicPr>
           <p:blipFill>
-            <a:blip r:embed="rId3"/>
+            <a:blip r:embed="rId4"/>
             <a:stretch>
               <a:fillRect/>
             </a:stretch>
@@ -23637,6 +22990,13 @@
               <a:noFill/>
             </a:ln>
           </p:spPr>
+          <p:txBody>
+            <a:bodyPr/>
+            <a:lstStyle/>
+            <a:p>
+              <a:endParaRPr lang="en-US"/>
+            </a:p>
+          </p:txBody>
         </p:sp>
         <p:sp>
           <p:nvSpPr>
@@ -23764,9 +23124,18 @@
   <p:clrMapOvr>
     <a:masterClrMapping/>
   </p:clrMapOvr>
-  <p:transition xmlns:p14="http://schemas.microsoft.com/office/powerpoint/2010/main" p14:dur="400">
-    <p:fade/>
-  </p:transition>
+  <mc:AlternateContent xmlns:mc="http://schemas.openxmlformats.org/markup-compatibility/2006">
+    <mc:Choice xmlns:p14="http://schemas.microsoft.com/office/powerpoint/2010/main" Requires="p14">
+      <p:transition p14:dur="400">
+        <p:fade/>
+      </p:transition>
+    </mc:Choice>
+    <mc:Fallback>
+      <p:transition>
+        <p:fade/>
+      </p:transition>
+    </mc:Fallback>
+  </mc:AlternateContent>
 </p:sld>
 </file>
 
@@ -23804,7 +23173,7 @@
           <p:nvPr/>
         </p:nvPicPr>
         <p:blipFill>
-          <a:blip r:embed="rId2"/>
+          <a:blip r:embed="rId3"/>
           <a:stretch>
             <a:fillRect/>
           </a:stretch>
@@ -23882,6 +23251,13 @@
             <a:noFill/>
           </a:ln>
         </p:spPr>
+        <p:txBody>
+          <a:bodyPr/>
+          <a:lstStyle/>
+          <a:p>
+            <a:endParaRPr lang="en-US"/>
+          </a:p>
+        </p:txBody>
       </p:sp>
       <p:sp>
         <p:nvSpPr>
@@ -23962,6 +23338,13 @@
               </a:solidFill>
             </a:ln>
           </p:spPr>
+          <p:txBody>
+            <a:bodyPr/>
+            <a:lstStyle/>
+            <a:p>
+              <a:endParaRPr lang="en-US"/>
+            </a:p>
+          </p:txBody>
         </p:sp>
         <p:pic>
           <p:nvPicPr>
@@ -23972,7 +23355,7 @@
             <p:nvPr/>
           </p:nvPicPr>
           <p:blipFill>
-            <a:blip r:embed="rId3"/>
+            <a:blip r:embed="rId4"/>
             <a:stretch>
               <a:fillRect/>
             </a:stretch>
@@ -24010,6 +23393,13 @@
               <a:noFill/>
             </a:ln>
           </p:spPr>
+          <p:txBody>
+            <a:bodyPr/>
+            <a:lstStyle/>
+            <a:p>
+              <a:endParaRPr lang="en-US"/>
+            </a:p>
+          </p:txBody>
         </p:sp>
         <p:sp>
           <p:nvSpPr>
@@ -24137,9 +23527,18 @@
   <p:clrMapOvr>
     <a:masterClrMapping/>
   </p:clrMapOvr>
-  <p:transition xmlns:p14="http://schemas.microsoft.com/office/powerpoint/2010/main" p14:dur="400">
-    <p:fade/>
-  </p:transition>
+  <mc:AlternateContent xmlns:mc="http://schemas.openxmlformats.org/markup-compatibility/2006">
+    <mc:Choice xmlns:p14="http://schemas.microsoft.com/office/powerpoint/2010/main" Requires="p14">
+      <p:transition p14:dur="400">
+        <p:fade/>
+      </p:transition>
+    </mc:Choice>
+    <mc:Fallback>
+      <p:transition>
+        <p:fade/>
+      </p:transition>
+    </mc:Fallback>
+  </mc:AlternateContent>
 </p:sld>
 </file>
 
@@ -24177,7 +23576,7 @@
           <p:nvPr/>
         </p:nvPicPr>
         <p:blipFill>
-          <a:blip r:embed="rId2"/>
+          <a:blip r:embed="rId3"/>
           <a:stretch>
             <a:fillRect/>
           </a:stretch>
@@ -24255,6 +23654,13 @@
             <a:noFill/>
           </a:ln>
         </p:spPr>
+        <p:txBody>
+          <a:bodyPr/>
+          <a:lstStyle/>
+          <a:p>
+            <a:endParaRPr lang="en-US"/>
+          </a:p>
+        </p:txBody>
       </p:sp>
       <p:sp>
         <p:nvSpPr>
@@ -24335,6 +23741,13 @@
               </a:solidFill>
             </a:ln>
           </p:spPr>
+          <p:txBody>
+            <a:bodyPr/>
+            <a:lstStyle/>
+            <a:p>
+              <a:endParaRPr lang="en-US"/>
+            </a:p>
+          </p:txBody>
         </p:sp>
         <p:pic>
           <p:nvPicPr>
@@ -24345,7 +23758,7 @@
             <p:nvPr/>
           </p:nvPicPr>
           <p:blipFill>
-            <a:blip r:embed="rId3"/>
+            <a:blip r:embed="rId4"/>
             <a:stretch>
               <a:fillRect/>
             </a:stretch>
@@ -24383,6 +23796,13 @@
               <a:noFill/>
             </a:ln>
           </p:spPr>
+          <p:txBody>
+            <a:bodyPr/>
+            <a:lstStyle/>
+            <a:p>
+              <a:endParaRPr lang="en-US"/>
+            </a:p>
+          </p:txBody>
         </p:sp>
         <p:sp>
           <p:nvSpPr>
@@ -24510,9 +23930,18 @@
   <p:clrMapOvr>
     <a:masterClrMapping/>
   </p:clrMapOvr>
-  <p:transition xmlns:p14="http://schemas.microsoft.com/office/powerpoint/2010/main" p14:dur="400">
-    <p:fade/>
-  </p:transition>
+  <mc:AlternateContent xmlns:mc="http://schemas.openxmlformats.org/markup-compatibility/2006">
+    <mc:Choice xmlns:p14="http://schemas.microsoft.com/office/powerpoint/2010/main" Requires="p14">
+      <p:transition p14:dur="400">
+        <p:fade/>
+      </p:transition>
+    </mc:Choice>
+    <mc:Fallback>
+      <p:transition>
+        <p:fade/>
+      </p:transition>
+    </mc:Fallback>
+  </mc:AlternateContent>
 </p:sld>
 </file>
 
@@ -24550,7 +23979,7 @@
           <p:nvPr/>
         </p:nvPicPr>
         <p:blipFill>
-          <a:blip r:embed="rId2"/>
+          <a:blip r:embed="rId3"/>
           <a:stretch>
             <a:fillRect/>
           </a:stretch>
@@ -24628,6 +24057,13 @@
             <a:noFill/>
           </a:ln>
         </p:spPr>
+        <p:txBody>
+          <a:bodyPr/>
+          <a:lstStyle/>
+          <a:p>
+            <a:endParaRPr lang="en-US"/>
+          </a:p>
+        </p:txBody>
       </p:sp>
       <p:sp>
         <p:nvSpPr>
@@ -24720,6 +24156,13 @@
                 <a:noFill/>
               </a:ln>
             </p:spPr>
+            <p:txBody>
+              <a:bodyPr/>
+              <a:lstStyle/>
+              <a:p>
+                <a:endParaRPr lang="en-US"/>
+              </a:p>
+            </p:txBody>
           </p:sp>
           <p:sp>
             <p:nvSpPr>
@@ -24919,6 +24362,13 @@
                 <a:noFill/>
               </a:ln>
             </p:spPr>
+            <p:txBody>
+              <a:bodyPr/>
+              <a:lstStyle/>
+              <a:p>
+                <a:endParaRPr lang="en-US"/>
+              </a:p>
+            </p:txBody>
           </p:sp>
           <p:sp>
             <p:nvSpPr>
@@ -25118,6 +24568,13 @@
                 <a:noFill/>
               </a:ln>
             </p:spPr>
+            <p:txBody>
+              <a:bodyPr/>
+              <a:lstStyle/>
+              <a:p>
+                <a:endParaRPr lang="en-US"/>
+              </a:p>
+            </p:txBody>
           </p:sp>
           <p:sp>
             <p:nvSpPr>
@@ -25317,6 +24774,13 @@
                 <a:noFill/>
               </a:ln>
             </p:spPr>
+            <p:txBody>
+              <a:bodyPr/>
+              <a:lstStyle/>
+              <a:p>
+                <a:endParaRPr lang="en-US"/>
+              </a:p>
+            </p:txBody>
           </p:sp>
           <p:sp>
             <p:nvSpPr>
@@ -25519,6 +24983,13 @@
               </a:solidFill>
             </a:ln>
           </p:spPr>
+          <p:txBody>
+            <a:bodyPr/>
+            <a:lstStyle/>
+            <a:p>
+              <a:endParaRPr lang="en-US"/>
+            </a:p>
+          </p:txBody>
         </p:sp>
         <p:sp>
           <p:nvSpPr>
@@ -25583,6 +25054,13 @@
               <a:noFill/>
             </a:ln>
           </p:spPr>
+          <p:txBody>
+            <a:bodyPr/>
+            <a:lstStyle/>
+            <a:p>
+              <a:endParaRPr lang="en-US"/>
+            </a:p>
+          </p:txBody>
         </p:sp>
         <p:pic>
           <p:nvPicPr>
@@ -25593,7 +25071,7 @@
             <p:nvPr/>
           </p:nvPicPr>
           <p:blipFill>
-            <a:blip r:embed="rId3"/>
+            <a:blip r:embed="rId4"/>
             <a:stretch>
               <a:fillRect/>
             </a:stretch>
@@ -25671,6 +25149,13 @@
               <a:noFill/>
             </a:ln>
           </p:spPr>
+          <p:txBody>
+            <a:bodyPr/>
+            <a:lstStyle/>
+            <a:p>
+              <a:endParaRPr lang="en-US"/>
+            </a:p>
+          </p:txBody>
         </p:sp>
         <p:sp>
           <p:nvSpPr>
@@ -25855,6 +25340,13 @@
               <a:noFill/>
             </a:ln>
           </p:spPr>
+          <p:txBody>
+            <a:bodyPr/>
+            <a:lstStyle/>
+            <a:p>
+              <a:endParaRPr lang="en-US"/>
+            </a:p>
+          </p:txBody>
         </p:sp>
         <p:pic>
           <p:nvPicPr>
@@ -25865,7 +25357,7 @@
             <p:nvPr/>
           </p:nvPicPr>
           <p:blipFill>
-            <a:blip r:embed="rId4"/>
+            <a:blip r:embed="rId5"/>
             <a:stretch>
               <a:fillRect/>
             </a:stretch>
@@ -25966,9 +25458,18 @@
   <p:clrMapOvr>
     <a:masterClrMapping/>
   </p:clrMapOvr>
-  <p:transition xmlns:p14="http://schemas.microsoft.com/office/powerpoint/2010/main" p14:dur="400">
-    <p:fade/>
-  </p:transition>
+  <mc:AlternateContent xmlns:mc="http://schemas.openxmlformats.org/markup-compatibility/2006">
+    <mc:Choice xmlns:p14="http://schemas.microsoft.com/office/powerpoint/2010/main" Requires="p14">
+      <p:transition p14:dur="400">
+        <p:fade/>
+      </p:transition>
+    </mc:Choice>
+    <mc:Fallback>
+      <p:transition>
+        <p:fade/>
+      </p:transition>
+    </mc:Fallback>
+  </mc:AlternateContent>
 </p:sld>
 </file>
 
